--- a/CMG Case Study Slide.pptx
+++ b/CMG Case Study Slide.pptx
@@ -3117,7 +3117,7 @@
 <dgm:dataModel xmlns:dgm="http://schemas.openxmlformats.org/drawingml/2006/diagram" xmlns:a="http://schemas.openxmlformats.org/drawingml/2006/main">
   <dgm:ptLst>
     <dgm:pt modelId="{1AD2BBFF-3680-4C4B-B1B9-14E00C8603EE}" type="doc">
-      <dgm:prSet loTypeId="urn:microsoft.com/office/officeart/2005/8/layout/process2" loCatId="process" qsTypeId="urn:microsoft.com/office/officeart/2005/8/quickstyle/simple1" qsCatId="simple" csTypeId="urn:microsoft.com/office/officeart/2005/8/colors/accent1_2" csCatId="accent1" phldr="1"/>
+      <dgm:prSet loTypeId="urn:microsoft.com/office/officeart/2009/3/layout/StepUpProcess" loCatId="process" qsTypeId="urn:microsoft.com/office/officeart/2005/8/quickstyle/simple1" qsCatId="simple" csTypeId="urn:microsoft.com/office/officeart/2005/8/colors/accent1_2" csCatId="accent1" phldr="1"/>
       <dgm:spPr/>
     </dgm:pt>
     <dgm:pt modelId="{519ED86E-46C6-4676-98D8-460F9F6474E8}">
@@ -3268,65 +3268,120 @@
         </a:p>
       </dgm:t>
     </dgm:pt>
-    <dgm:pt modelId="{F1A3E940-B326-48A8-AB8A-9B01ECDDC7B7}" type="pres">
-      <dgm:prSet presAssocID="{1AD2BBFF-3680-4C4B-B1B9-14E00C8603EE}" presName="linearFlow" presStyleCnt="0">
+    <dgm:pt modelId="{FFB56551-8718-487F-A8A0-217A843CA321}" type="pres">
+      <dgm:prSet presAssocID="{1AD2BBFF-3680-4C4B-B1B9-14E00C8603EE}" presName="rootnode" presStyleCnt="0">
         <dgm:presLayoutVars>
-          <dgm:resizeHandles val="exact"/>
+          <dgm:chMax/>
+          <dgm:chPref/>
+          <dgm:dir/>
+          <dgm:animLvl val="lvl"/>
         </dgm:presLayoutVars>
       </dgm:prSet>
       <dgm:spPr/>
     </dgm:pt>
-    <dgm:pt modelId="{0BFD1F0F-D3B8-4B85-A889-8DADC47D3905}" type="pres">
-      <dgm:prSet presAssocID="{519ED86E-46C6-4676-98D8-460F9F6474E8}" presName="node" presStyleLbl="node1" presStyleIdx="0" presStyleCnt="4" custLinFactNeighborX="0">
+    <dgm:pt modelId="{A75B9386-E4E3-4107-8683-02FBB140C42D}" type="pres">
+      <dgm:prSet presAssocID="{519ED86E-46C6-4676-98D8-460F9F6474E8}" presName="composite" presStyleCnt="0"/>
+      <dgm:spPr/>
+    </dgm:pt>
+    <dgm:pt modelId="{69527FD1-40C6-4E55-A11B-F6133781A754}" type="pres">
+      <dgm:prSet presAssocID="{519ED86E-46C6-4676-98D8-460F9F6474E8}" presName="LShape" presStyleLbl="alignNode1" presStyleIdx="0" presStyleCnt="7"/>
+      <dgm:spPr/>
+    </dgm:pt>
+    <dgm:pt modelId="{BFCFA4A0-2561-4D60-BF5E-C3303B3F0B06}" type="pres">
+      <dgm:prSet presAssocID="{519ED86E-46C6-4676-98D8-460F9F6474E8}" presName="ParentText" presStyleLbl="revTx" presStyleIdx="0" presStyleCnt="4">
         <dgm:presLayoutVars>
+          <dgm:chMax val="0"/>
+          <dgm:chPref val="0"/>
           <dgm:bulletEnabled val="1"/>
         </dgm:presLayoutVars>
       </dgm:prSet>
       <dgm:spPr/>
     </dgm:pt>
-    <dgm:pt modelId="{6F6120D2-0087-45CF-BE46-4209A3EC5C6A}" type="pres">
-      <dgm:prSet presAssocID="{D2233C38-B53B-4D12-BF9D-599B42CE6955}" presName="sibTrans" presStyleLbl="sibTrans2D1" presStyleIdx="0" presStyleCnt="3"/>
+    <dgm:pt modelId="{851E3E90-19C2-4415-AE07-E49F52089EF0}" type="pres">
+      <dgm:prSet presAssocID="{519ED86E-46C6-4676-98D8-460F9F6474E8}" presName="Triangle" presStyleLbl="alignNode1" presStyleIdx="1" presStyleCnt="7"/>
       <dgm:spPr/>
     </dgm:pt>
-    <dgm:pt modelId="{374D60D8-BFEA-47E4-9C20-63283C113C26}" type="pres">
-      <dgm:prSet presAssocID="{D2233C38-B53B-4D12-BF9D-599B42CE6955}" presName="connectorText" presStyleLbl="sibTrans2D1" presStyleIdx="0" presStyleCnt="3"/>
+    <dgm:pt modelId="{ED5A876A-512F-48EE-BE66-C3C9089F853B}" type="pres">
+      <dgm:prSet presAssocID="{D2233C38-B53B-4D12-BF9D-599B42CE6955}" presName="sibTrans" presStyleCnt="0"/>
       <dgm:spPr/>
     </dgm:pt>
-    <dgm:pt modelId="{8D99679D-8E6D-4DF3-ABD8-3A2B1D2054E7}" type="pres">
-      <dgm:prSet presAssocID="{9336350A-36E3-4859-8EB7-FB3554362064}" presName="node" presStyleLbl="node1" presStyleIdx="1" presStyleCnt="4">
+    <dgm:pt modelId="{7B80FFAD-1345-4A67-A34E-4629D92F0E24}" type="pres">
+      <dgm:prSet presAssocID="{D2233C38-B53B-4D12-BF9D-599B42CE6955}" presName="space" presStyleCnt="0"/>
+      <dgm:spPr/>
+    </dgm:pt>
+    <dgm:pt modelId="{1809298D-6B1A-498E-BB4E-09E91369DEAB}" type="pres">
+      <dgm:prSet presAssocID="{9336350A-36E3-4859-8EB7-FB3554362064}" presName="composite" presStyleCnt="0"/>
+      <dgm:spPr/>
+    </dgm:pt>
+    <dgm:pt modelId="{BBD445AC-F09E-4D1B-84AE-644D94AB0AA4}" type="pres">
+      <dgm:prSet presAssocID="{9336350A-36E3-4859-8EB7-FB3554362064}" presName="LShape" presStyleLbl="alignNode1" presStyleIdx="2" presStyleCnt="7"/>
+      <dgm:spPr/>
+    </dgm:pt>
+    <dgm:pt modelId="{B5D5A48F-C936-47AA-A2A5-7DB8135BC282}" type="pres">
+      <dgm:prSet presAssocID="{9336350A-36E3-4859-8EB7-FB3554362064}" presName="ParentText" presStyleLbl="revTx" presStyleIdx="1" presStyleCnt="4">
         <dgm:presLayoutVars>
+          <dgm:chMax val="0"/>
+          <dgm:chPref val="0"/>
           <dgm:bulletEnabled val="1"/>
         </dgm:presLayoutVars>
       </dgm:prSet>
       <dgm:spPr/>
     </dgm:pt>
-    <dgm:pt modelId="{A20917AB-CF4C-4477-B61C-CDF1A26E8EE9}" type="pres">
-      <dgm:prSet presAssocID="{C995644B-05FB-4C57-90A5-D257068A1CEA}" presName="sibTrans" presStyleLbl="sibTrans2D1" presStyleIdx="1" presStyleCnt="3"/>
+    <dgm:pt modelId="{4D6B8DAC-F4A5-4CF2-959C-17273ED6A7B5}" type="pres">
+      <dgm:prSet presAssocID="{9336350A-36E3-4859-8EB7-FB3554362064}" presName="Triangle" presStyleLbl="alignNode1" presStyleIdx="3" presStyleCnt="7"/>
       <dgm:spPr/>
     </dgm:pt>
-    <dgm:pt modelId="{36E52905-0DC5-4AA4-BCD5-9814203F6656}" type="pres">
-      <dgm:prSet presAssocID="{C995644B-05FB-4C57-90A5-D257068A1CEA}" presName="connectorText" presStyleLbl="sibTrans2D1" presStyleIdx="1" presStyleCnt="3"/>
+    <dgm:pt modelId="{6CE42B97-DA35-4814-B770-42AC989121F5}" type="pres">
+      <dgm:prSet presAssocID="{C995644B-05FB-4C57-90A5-D257068A1CEA}" presName="sibTrans" presStyleCnt="0"/>
       <dgm:spPr/>
     </dgm:pt>
-    <dgm:pt modelId="{121E402C-B8CB-44B5-A5B4-311E2FF2C2CD}" type="pres">
-      <dgm:prSet presAssocID="{78B3884E-00FD-4E93-9A16-18395518D1EA}" presName="node" presStyleLbl="node1" presStyleIdx="2" presStyleCnt="4">
+    <dgm:pt modelId="{0DCB7DC6-8D28-4DBA-BE8D-FB88B5457183}" type="pres">
+      <dgm:prSet presAssocID="{C995644B-05FB-4C57-90A5-D257068A1CEA}" presName="space" presStyleCnt="0"/>
+      <dgm:spPr/>
+    </dgm:pt>
+    <dgm:pt modelId="{27CA6906-A8C5-4129-93C7-9B8654837262}" type="pres">
+      <dgm:prSet presAssocID="{78B3884E-00FD-4E93-9A16-18395518D1EA}" presName="composite" presStyleCnt="0"/>
+      <dgm:spPr/>
+    </dgm:pt>
+    <dgm:pt modelId="{7C1AA815-39FE-4B6C-84C6-2E0654AE69BF}" type="pres">
+      <dgm:prSet presAssocID="{78B3884E-00FD-4E93-9A16-18395518D1EA}" presName="LShape" presStyleLbl="alignNode1" presStyleIdx="4" presStyleCnt="7"/>
+      <dgm:spPr/>
+    </dgm:pt>
+    <dgm:pt modelId="{1F6B1AAB-E658-459B-90B9-2FC936FDFF3E}" type="pres">
+      <dgm:prSet presAssocID="{78B3884E-00FD-4E93-9A16-18395518D1EA}" presName="ParentText" presStyleLbl="revTx" presStyleIdx="2" presStyleCnt="4">
         <dgm:presLayoutVars>
+          <dgm:chMax val="0"/>
+          <dgm:chPref val="0"/>
           <dgm:bulletEnabled val="1"/>
         </dgm:presLayoutVars>
       </dgm:prSet>
       <dgm:spPr/>
     </dgm:pt>
-    <dgm:pt modelId="{408EB5D0-81CB-4813-B524-9B40A882A9DF}" type="pres">
-      <dgm:prSet presAssocID="{1FEEDA28-067C-4E95-B141-4C67DE712ED7}" presName="sibTrans" presStyleLbl="sibTrans2D1" presStyleIdx="2" presStyleCnt="3"/>
+    <dgm:pt modelId="{CE67EDBB-FE94-4FB3-AF84-E6645676087D}" type="pres">
+      <dgm:prSet presAssocID="{78B3884E-00FD-4E93-9A16-18395518D1EA}" presName="Triangle" presStyleLbl="alignNode1" presStyleIdx="5" presStyleCnt="7"/>
       <dgm:spPr/>
     </dgm:pt>
-    <dgm:pt modelId="{5B56106B-3100-4729-80CA-9CDEE8DC84BC}" type="pres">
-      <dgm:prSet presAssocID="{1FEEDA28-067C-4E95-B141-4C67DE712ED7}" presName="connectorText" presStyleLbl="sibTrans2D1" presStyleIdx="2" presStyleCnt="3"/>
+    <dgm:pt modelId="{0A4DBFEF-D03D-4639-89DA-48BC45A18576}" type="pres">
+      <dgm:prSet presAssocID="{1FEEDA28-067C-4E95-B141-4C67DE712ED7}" presName="sibTrans" presStyleCnt="0"/>
       <dgm:spPr/>
     </dgm:pt>
-    <dgm:pt modelId="{7AAC00C7-C2E3-4F7B-9A8E-E786CBE969C0}" type="pres">
-      <dgm:prSet presAssocID="{C6691616-B1F5-4FD5-96CF-5C62A05AEB21}" presName="node" presStyleLbl="node1" presStyleIdx="3" presStyleCnt="4">
+    <dgm:pt modelId="{6D77CEA5-28A8-4793-AB8D-D5B857E15B4C}" type="pres">
+      <dgm:prSet presAssocID="{1FEEDA28-067C-4E95-B141-4C67DE712ED7}" presName="space" presStyleCnt="0"/>
+      <dgm:spPr/>
+    </dgm:pt>
+    <dgm:pt modelId="{6FE2F184-C9E6-4FD5-9E18-F90828473C4F}" type="pres">
+      <dgm:prSet presAssocID="{C6691616-B1F5-4FD5-96CF-5C62A05AEB21}" presName="composite" presStyleCnt="0"/>
+      <dgm:spPr/>
+    </dgm:pt>
+    <dgm:pt modelId="{87EAF7AC-2269-4374-8B8F-4C3ADC5FC321}" type="pres">
+      <dgm:prSet presAssocID="{C6691616-B1F5-4FD5-96CF-5C62A05AEB21}" presName="LShape" presStyleLbl="alignNode1" presStyleIdx="6" presStyleCnt="7"/>
+      <dgm:spPr/>
+    </dgm:pt>
+    <dgm:pt modelId="{C974D6A0-B25E-4AA0-812C-B40C094E02CF}" type="pres">
+      <dgm:prSet presAssocID="{C6691616-B1F5-4FD5-96CF-5C62A05AEB21}" presName="ParentText" presStyleLbl="revTx" presStyleIdx="3" presStyleCnt="4">
         <dgm:presLayoutVars>
+          <dgm:chMax val="0"/>
+          <dgm:chPref val="0"/>
           <dgm:bulletEnabled val="1"/>
         </dgm:presLayoutVars>
       </dgm:prSet>
@@ -3335,30 +3390,35 @@
   </dgm:ptLst>
   <dgm:cxnLst>
     <dgm:cxn modelId="{232BCB08-4DD0-431A-853E-BADEE1781681}" srcId="{1AD2BBFF-3680-4C4B-B1B9-14E00C8603EE}" destId="{9336350A-36E3-4859-8EB7-FB3554362064}" srcOrd="1" destOrd="0" parTransId="{FF990FE5-AA43-4D3A-B2C4-07553636A564}" sibTransId="{C995644B-05FB-4C57-90A5-D257068A1CEA}"/>
-    <dgm:cxn modelId="{10C5660A-1FB8-432B-8C4C-D4157667AC68}" type="presOf" srcId="{C995644B-05FB-4C57-90A5-D257068A1CEA}" destId="{A20917AB-CF4C-4477-B61C-CDF1A26E8EE9}" srcOrd="0" destOrd="0" presId="urn:microsoft.com/office/officeart/2005/8/layout/process2"/>
-    <dgm:cxn modelId="{06EF5112-DC34-4D5C-AC4B-17EFEF705AB1}" type="presOf" srcId="{D2233C38-B53B-4D12-BF9D-599B42CE6955}" destId="{374D60D8-BFEA-47E4-9C20-63283C113C26}" srcOrd="1" destOrd="0" presId="urn:microsoft.com/office/officeart/2005/8/layout/process2"/>
-    <dgm:cxn modelId="{D1459D1D-A116-434A-8B89-A18F50058E8D}" type="presOf" srcId="{519ED86E-46C6-4676-98D8-460F9F6474E8}" destId="{0BFD1F0F-D3B8-4B85-A889-8DADC47D3905}" srcOrd="0" destOrd="0" presId="urn:microsoft.com/office/officeart/2005/8/layout/process2"/>
+    <dgm:cxn modelId="{C06C361F-985B-4AF2-95C6-6C9CC7B80460}" type="presOf" srcId="{9336350A-36E3-4859-8EB7-FB3554362064}" destId="{B5D5A48F-C936-47AA-A2A5-7DB8135BC282}" srcOrd="0" destOrd="0" presId="urn:microsoft.com/office/officeart/2009/3/layout/StepUpProcess"/>
+    <dgm:cxn modelId="{9F77DF2E-9F4A-4E67-871B-9E0324A6090C}" type="presOf" srcId="{519ED86E-46C6-4676-98D8-460F9F6474E8}" destId="{BFCFA4A0-2561-4D60-BF5E-C3303B3F0B06}" srcOrd="0" destOrd="0" presId="urn:microsoft.com/office/officeart/2009/3/layout/StepUpProcess"/>
+    <dgm:cxn modelId="{ADF62838-1D72-449F-B69E-982D83273415}" type="presOf" srcId="{78B3884E-00FD-4E93-9A16-18395518D1EA}" destId="{1F6B1AAB-E658-459B-90B9-2FC936FDFF3E}" srcOrd="0" destOrd="0" presId="urn:microsoft.com/office/officeart/2009/3/layout/StepUpProcess"/>
     <dgm:cxn modelId="{B38D2E61-34CB-4787-8F3E-4B33789E63C0}" srcId="{1AD2BBFF-3680-4C4B-B1B9-14E00C8603EE}" destId="{C6691616-B1F5-4FD5-96CF-5C62A05AEB21}" srcOrd="3" destOrd="0" parTransId="{90006D75-E8D7-47D7-B192-FC39CCDCFA72}" sibTransId="{129F19C7-9194-4F1F-A7E7-08A3CF48CC99}"/>
-    <dgm:cxn modelId="{D0E87E49-759E-4C6D-AABA-869BB97CA78C}" type="presOf" srcId="{C995644B-05FB-4C57-90A5-D257068A1CEA}" destId="{36E52905-0DC5-4AA4-BCD5-9814203F6656}" srcOrd="1" destOrd="0" presId="urn:microsoft.com/office/officeart/2005/8/layout/process2"/>
-    <dgm:cxn modelId="{D1FAC652-EAB7-47AB-818E-7DCA845F4951}" type="presOf" srcId="{78B3884E-00FD-4E93-9A16-18395518D1EA}" destId="{121E402C-B8CB-44B5-A5B4-311E2FF2C2CD}" srcOrd="0" destOrd="0" presId="urn:microsoft.com/office/officeart/2005/8/layout/process2"/>
-    <dgm:cxn modelId="{B7EE1D79-C4F6-44BA-9ABB-9BF604996287}" type="presOf" srcId="{D2233C38-B53B-4D12-BF9D-599B42CE6955}" destId="{6F6120D2-0087-45CF-BE46-4209A3EC5C6A}" srcOrd="0" destOrd="0" presId="urn:microsoft.com/office/officeart/2005/8/layout/process2"/>
-    <dgm:cxn modelId="{EEEC4280-36AE-49D1-957F-0231DAF2EF29}" type="presOf" srcId="{1AD2BBFF-3680-4C4B-B1B9-14E00C8603EE}" destId="{F1A3E940-B326-48A8-AB8A-9B01ECDDC7B7}" srcOrd="0" destOrd="0" presId="urn:microsoft.com/office/officeart/2005/8/layout/process2"/>
+    <dgm:cxn modelId="{70D29567-D31B-4A73-978A-5C4646009F78}" type="presOf" srcId="{C6691616-B1F5-4FD5-96CF-5C62A05AEB21}" destId="{C974D6A0-B25E-4AA0-812C-B40C094E02CF}" srcOrd="0" destOrd="0" presId="urn:microsoft.com/office/officeart/2009/3/layout/StepUpProcess"/>
+    <dgm:cxn modelId="{85B3FF52-CA91-4708-9D58-4C9F1C6A74C0}" type="presOf" srcId="{1AD2BBFF-3680-4C4B-B1B9-14E00C8603EE}" destId="{FFB56551-8718-487F-A8A0-217A843CA321}" srcOrd="0" destOrd="0" presId="urn:microsoft.com/office/officeart/2009/3/layout/StepUpProcess"/>
     <dgm:cxn modelId="{28088A93-7E45-46DB-9660-3C758C5FE7B0}" srcId="{1AD2BBFF-3680-4C4B-B1B9-14E00C8603EE}" destId="{519ED86E-46C6-4676-98D8-460F9F6474E8}" srcOrd="0" destOrd="0" parTransId="{06601361-7938-403B-ADDF-CD3C88539F3A}" sibTransId="{D2233C38-B53B-4D12-BF9D-599B42CE6955}"/>
-    <dgm:cxn modelId="{0C90A39F-FF4F-48B4-BCB5-9DAFE7D25421}" type="presOf" srcId="{C6691616-B1F5-4FD5-96CF-5C62A05AEB21}" destId="{7AAC00C7-C2E3-4F7B-9A8E-E786CBE969C0}" srcOrd="0" destOrd="0" presId="urn:microsoft.com/office/officeart/2005/8/layout/process2"/>
-    <dgm:cxn modelId="{23BD97D9-7104-4970-B335-FDCB6966F428}" type="presOf" srcId="{1FEEDA28-067C-4E95-B141-4C67DE712ED7}" destId="{5B56106B-3100-4729-80CA-9CDEE8DC84BC}" srcOrd="1" destOrd="0" presId="urn:microsoft.com/office/officeart/2005/8/layout/process2"/>
     <dgm:cxn modelId="{244CC9DF-8947-4242-893B-247BCCECB102}" srcId="{1AD2BBFF-3680-4C4B-B1B9-14E00C8603EE}" destId="{78B3884E-00FD-4E93-9A16-18395518D1EA}" srcOrd="2" destOrd="0" parTransId="{105379A7-1378-4CEC-A39E-990972FD1DA7}" sibTransId="{1FEEDA28-067C-4E95-B141-4C67DE712ED7}"/>
-    <dgm:cxn modelId="{156FC2E9-9E59-403D-9BAD-EE2A43DBF5BB}" type="presOf" srcId="{9336350A-36E3-4859-8EB7-FB3554362064}" destId="{8D99679D-8E6D-4DF3-ABD8-3A2B1D2054E7}" srcOrd="0" destOrd="0" presId="urn:microsoft.com/office/officeart/2005/8/layout/process2"/>
-    <dgm:cxn modelId="{10F830FD-4CBF-412B-928E-7A9B2C80F7DA}" type="presOf" srcId="{1FEEDA28-067C-4E95-B141-4C67DE712ED7}" destId="{408EB5D0-81CB-4813-B524-9B40A882A9DF}" srcOrd="0" destOrd="0" presId="urn:microsoft.com/office/officeart/2005/8/layout/process2"/>
-    <dgm:cxn modelId="{0555D405-64F4-4060-8390-C1B9EAE4C59B}" type="presParOf" srcId="{F1A3E940-B326-48A8-AB8A-9B01ECDDC7B7}" destId="{0BFD1F0F-D3B8-4B85-A889-8DADC47D3905}" srcOrd="0" destOrd="0" presId="urn:microsoft.com/office/officeart/2005/8/layout/process2"/>
-    <dgm:cxn modelId="{8DDC381F-FB42-4962-AFAB-B53ED9B9D985}" type="presParOf" srcId="{F1A3E940-B326-48A8-AB8A-9B01ECDDC7B7}" destId="{6F6120D2-0087-45CF-BE46-4209A3EC5C6A}" srcOrd="1" destOrd="0" presId="urn:microsoft.com/office/officeart/2005/8/layout/process2"/>
-    <dgm:cxn modelId="{8B55D778-7E87-4F5B-9914-E6A43FEB0F8F}" type="presParOf" srcId="{6F6120D2-0087-45CF-BE46-4209A3EC5C6A}" destId="{374D60D8-BFEA-47E4-9C20-63283C113C26}" srcOrd="0" destOrd="0" presId="urn:microsoft.com/office/officeart/2005/8/layout/process2"/>
-    <dgm:cxn modelId="{B7EF21DA-C91E-467A-A06B-FBCB78DA1FDA}" type="presParOf" srcId="{F1A3E940-B326-48A8-AB8A-9B01ECDDC7B7}" destId="{8D99679D-8E6D-4DF3-ABD8-3A2B1D2054E7}" srcOrd="2" destOrd="0" presId="urn:microsoft.com/office/officeart/2005/8/layout/process2"/>
-    <dgm:cxn modelId="{CD4F8117-4E7F-4D55-91BA-9605E61CAB1C}" type="presParOf" srcId="{F1A3E940-B326-48A8-AB8A-9B01ECDDC7B7}" destId="{A20917AB-CF4C-4477-B61C-CDF1A26E8EE9}" srcOrd="3" destOrd="0" presId="urn:microsoft.com/office/officeart/2005/8/layout/process2"/>
-    <dgm:cxn modelId="{77D44F33-388F-4491-88D9-A2BF6FF5D72D}" type="presParOf" srcId="{A20917AB-CF4C-4477-B61C-CDF1A26E8EE9}" destId="{36E52905-0DC5-4AA4-BCD5-9814203F6656}" srcOrd="0" destOrd="0" presId="urn:microsoft.com/office/officeart/2005/8/layout/process2"/>
-    <dgm:cxn modelId="{5029C0BF-D5C0-4EAC-8A01-4BB0B6A5E40E}" type="presParOf" srcId="{F1A3E940-B326-48A8-AB8A-9B01ECDDC7B7}" destId="{121E402C-B8CB-44B5-A5B4-311E2FF2C2CD}" srcOrd="4" destOrd="0" presId="urn:microsoft.com/office/officeart/2005/8/layout/process2"/>
-    <dgm:cxn modelId="{52BE7EF3-2CDF-4AB3-BF61-FB0764159159}" type="presParOf" srcId="{F1A3E940-B326-48A8-AB8A-9B01ECDDC7B7}" destId="{408EB5D0-81CB-4813-B524-9B40A882A9DF}" srcOrd="5" destOrd="0" presId="urn:microsoft.com/office/officeart/2005/8/layout/process2"/>
-    <dgm:cxn modelId="{A8943152-A612-4BB2-A00C-B8A56385E227}" type="presParOf" srcId="{408EB5D0-81CB-4813-B524-9B40A882A9DF}" destId="{5B56106B-3100-4729-80CA-9CDEE8DC84BC}" srcOrd="0" destOrd="0" presId="urn:microsoft.com/office/officeart/2005/8/layout/process2"/>
-    <dgm:cxn modelId="{19AD5053-AB44-4B75-8AD2-5B11286375D2}" type="presParOf" srcId="{F1A3E940-B326-48A8-AB8A-9B01ECDDC7B7}" destId="{7AAC00C7-C2E3-4F7B-9A8E-E786CBE969C0}" srcOrd="6" destOrd="0" presId="urn:microsoft.com/office/officeart/2005/8/layout/process2"/>
+    <dgm:cxn modelId="{03EC73F9-BF38-4D88-9BF9-793FE177EBAB}" type="presParOf" srcId="{FFB56551-8718-487F-A8A0-217A843CA321}" destId="{A75B9386-E4E3-4107-8683-02FBB140C42D}" srcOrd="0" destOrd="0" presId="urn:microsoft.com/office/officeart/2009/3/layout/StepUpProcess"/>
+    <dgm:cxn modelId="{93F010D8-9252-450C-B213-11AE2E2C8B9B}" type="presParOf" srcId="{A75B9386-E4E3-4107-8683-02FBB140C42D}" destId="{69527FD1-40C6-4E55-A11B-F6133781A754}" srcOrd="0" destOrd="0" presId="urn:microsoft.com/office/officeart/2009/3/layout/StepUpProcess"/>
+    <dgm:cxn modelId="{B5C8D553-5077-4E80-8D41-C84DC749D028}" type="presParOf" srcId="{A75B9386-E4E3-4107-8683-02FBB140C42D}" destId="{BFCFA4A0-2561-4D60-BF5E-C3303B3F0B06}" srcOrd="1" destOrd="0" presId="urn:microsoft.com/office/officeart/2009/3/layout/StepUpProcess"/>
+    <dgm:cxn modelId="{A765210A-7B0A-4E51-9C47-8AA10B644C06}" type="presParOf" srcId="{A75B9386-E4E3-4107-8683-02FBB140C42D}" destId="{851E3E90-19C2-4415-AE07-E49F52089EF0}" srcOrd="2" destOrd="0" presId="urn:microsoft.com/office/officeart/2009/3/layout/StepUpProcess"/>
+    <dgm:cxn modelId="{630E4744-921D-4F1B-A8CD-E6F8AD17C05A}" type="presParOf" srcId="{FFB56551-8718-487F-A8A0-217A843CA321}" destId="{ED5A876A-512F-48EE-BE66-C3C9089F853B}" srcOrd="1" destOrd="0" presId="urn:microsoft.com/office/officeart/2009/3/layout/StepUpProcess"/>
+    <dgm:cxn modelId="{6AB0EEEA-BAE0-4E89-8493-CD88899F1129}" type="presParOf" srcId="{ED5A876A-512F-48EE-BE66-C3C9089F853B}" destId="{7B80FFAD-1345-4A67-A34E-4629D92F0E24}" srcOrd="0" destOrd="0" presId="urn:microsoft.com/office/officeart/2009/3/layout/StepUpProcess"/>
+    <dgm:cxn modelId="{C329347D-8583-40D6-A5EF-A2BA59B5969B}" type="presParOf" srcId="{FFB56551-8718-487F-A8A0-217A843CA321}" destId="{1809298D-6B1A-498E-BB4E-09E91369DEAB}" srcOrd="2" destOrd="0" presId="urn:microsoft.com/office/officeart/2009/3/layout/StepUpProcess"/>
+    <dgm:cxn modelId="{DFD3DC1D-8012-4582-AD49-1BB8E4804507}" type="presParOf" srcId="{1809298D-6B1A-498E-BB4E-09E91369DEAB}" destId="{BBD445AC-F09E-4D1B-84AE-644D94AB0AA4}" srcOrd="0" destOrd="0" presId="urn:microsoft.com/office/officeart/2009/3/layout/StepUpProcess"/>
+    <dgm:cxn modelId="{EBD7DFA8-21E3-4870-A0FE-F21D1C28545D}" type="presParOf" srcId="{1809298D-6B1A-498E-BB4E-09E91369DEAB}" destId="{B5D5A48F-C936-47AA-A2A5-7DB8135BC282}" srcOrd="1" destOrd="0" presId="urn:microsoft.com/office/officeart/2009/3/layout/StepUpProcess"/>
+    <dgm:cxn modelId="{F0362AFC-D0C8-41EE-B114-F1EEA9AE7B03}" type="presParOf" srcId="{1809298D-6B1A-498E-BB4E-09E91369DEAB}" destId="{4D6B8DAC-F4A5-4CF2-959C-17273ED6A7B5}" srcOrd="2" destOrd="0" presId="urn:microsoft.com/office/officeart/2009/3/layout/StepUpProcess"/>
+    <dgm:cxn modelId="{3BE29333-3789-47F8-AE8F-E603EF92921D}" type="presParOf" srcId="{FFB56551-8718-487F-A8A0-217A843CA321}" destId="{6CE42B97-DA35-4814-B770-42AC989121F5}" srcOrd="3" destOrd="0" presId="urn:microsoft.com/office/officeart/2009/3/layout/StepUpProcess"/>
+    <dgm:cxn modelId="{8D63FAFE-F8C1-45B3-AAD4-EB5E590723B4}" type="presParOf" srcId="{6CE42B97-DA35-4814-B770-42AC989121F5}" destId="{0DCB7DC6-8D28-4DBA-BE8D-FB88B5457183}" srcOrd="0" destOrd="0" presId="urn:microsoft.com/office/officeart/2009/3/layout/StepUpProcess"/>
+    <dgm:cxn modelId="{DDAF484A-D8EB-4724-AC06-843EC4C8B1FF}" type="presParOf" srcId="{FFB56551-8718-487F-A8A0-217A843CA321}" destId="{27CA6906-A8C5-4129-93C7-9B8654837262}" srcOrd="4" destOrd="0" presId="urn:microsoft.com/office/officeart/2009/3/layout/StepUpProcess"/>
+    <dgm:cxn modelId="{167AFB1B-06CC-43B9-8050-1197A803CEDB}" type="presParOf" srcId="{27CA6906-A8C5-4129-93C7-9B8654837262}" destId="{7C1AA815-39FE-4B6C-84C6-2E0654AE69BF}" srcOrd="0" destOrd="0" presId="urn:microsoft.com/office/officeart/2009/3/layout/StepUpProcess"/>
+    <dgm:cxn modelId="{B44E8759-A545-4672-B54B-DFD16AD90138}" type="presParOf" srcId="{27CA6906-A8C5-4129-93C7-9B8654837262}" destId="{1F6B1AAB-E658-459B-90B9-2FC936FDFF3E}" srcOrd="1" destOrd="0" presId="urn:microsoft.com/office/officeart/2009/3/layout/StepUpProcess"/>
+    <dgm:cxn modelId="{8B563F9E-FE33-4420-A003-3F6AFD060539}" type="presParOf" srcId="{27CA6906-A8C5-4129-93C7-9B8654837262}" destId="{CE67EDBB-FE94-4FB3-AF84-E6645676087D}" srcOrd="2" destOrd="0" presId="urn:microsoft.com/office/officeart/2009/3/layout/StepUpProcess"/>
+    <dgm:cxn modelId="{57EF89C6-BCDD-4DE7-9A17-B3F7050AFD98}" type="presParOf" srcId="{FFB56551-8718-487F-A8A0-217A843CA321}" destId="{0A4DBFEF-D03D-4639-89DA-48BC45A18576}" srcOrd="5" destOrd="0" presId="urn:microsoft.com/office/officeart/2009/3/layout/StepUpProcess"/>
+    <dgm:cxn modelId="{BC3E527D-38CD-4944-B2F2-5D570665E96D}" type="presParOf" srcId="{0A4DBFEF-D03D-4639-89DA-48BC45A18576}" destId="{6D77CEA5-28A8-4793-AB8D-D5B857E15B4C}" srcOrd="0" destOrd="0" presId="urn:microsoft.com/office/officeart/2009/3/layout/StepUpProcess"/>
+    <dgm:cxn modelId="{68AAD96F-5381-4610-A7FF-7F10452479F7}" type="presParOf" srcId="{FFB56551-8718-487F-A8A0-217A843CA321}" destId="{6FE2F184-C9E6-4FD5-9E18-F90828473C4F}" srcOrd="6" destOrd="0" presId="urn:microsoft.com/office/officeart/2009/3/layout/StepUpProcess"/>
+    <dgm:cxn modelId="{9DFBF6DA-26F8-4B3D-A5A4-5B069EA2187E}" type="presParOf" srcId="{6FE2F184-C9E6-4FD5-9E18-F90828473C4F}" destId="{87EAF7AC-2269-4374-8B8F-4C3ADC5FC321}" srcOrd="0" destOrd="0" presId="urn:microsoft.com/office/officeart/2009/3/layout/StepUpProcess"/>
+    <dgm:cxn modelId="{C253925F-214A-489B-B1A1-83FF77BD75E2}" type="presParOf" srcId="{6FE2F184-C9E6-4FD5-9E18-F90828473C4F}" destId="{C974D6A0-B25E-4AA0-812C-B40C094E02CF}" srcOrd="1" destOrd="0" presId="urn:microsoft.com/office/officeart/2009/3/layout/StepUpProcess"/>
   </dgm:cxnLst>
   <dgm:bg/>
   <dgm:whole/>
@@ -3384,241 +3444,7 @@
         </a:p>
       </dgm:t>
     </dgm:pt>
-    <mc:AlternateContent xmlns:mc="http://schemas.openxmlformats.org/markup-compatibility/2006">
-      <mc:Choice xmlns:a14="http://schemas.microsoft.com/office/drawing/2010/main" Requires="a14">
-        <dgm:pt modelId="{6592FCD5-916C-437A-912A-571D1A32A986}">
-          <dgm:prSet phldrT="[Text]" phldr="0"/>
-          <dgm:spPr/>
-          <dgm:t>
-            <a:bodyPr/>
-            <a:lstStyle/>
-            <a:p>
-              <a:r>
-                <a:rPr lang="en-US" altLang="zh-CN" dirty="0"/>
-                <a:t>ESPR-based Anchor: </a:t>
-              </a:r>
-              <a14:m>
-                <m:oMath xmlns:m="http://schemas.openxmlformats.org/officeDocument/2006/math">
-                  <m:r>
-                    <a:rPr lang="en-US" altLang="zh-CN" b="0" i="1" smtClean="0">
-                      <a:latin typeface="Cambria Math" panose="02040503050406030204" pitchFamily="18" charset="0"/>
-                    </a:rPr>
-                    <m:t>𝑦</m:t>
-                  </m:r>
-                  <m:sSub>
-                    <m:sSubPr>
-                      <m:ctrlPr>
-                        <a:rPr lang="en-US" altLang="zh-CN" b="0" i="1" smtClean="0">
-                          <a:latin typeface="Cambria Math" panose="02040503050406030204" pitchFamily="18" charset="0"/>
-                        </a:rPr>
-                      </m:ctrlPr>
-                    </m:sSubPr>
-                    <m:e>
-                      <m:r>
-                        <a:rPr lang="en-US" altLang="zh-CN" b="0" i="1" smtClean="0">
-                          <a:latin typeface="Cambria Math" panose="02040503050406030204" pitchFamily="18" charset="0"/>
-                        </a:rPr>
-                        <m:t>̂</m:t>
-                      </m:r>
-                    </m:e>
-                    <m:sub>
-                      <m:r>
-                        <a:rPr lang="en-US" altLang="zh-CN" b="0" i="1" smtClean="0">
-                          <a:latin typeface="Cambria Math" panose="02040503050406030204" pitchFamily="18" charset="0"/>
-                        </a:rPr>
-                        <m:t>𝑔</m:t>
-                      </m:r>
-                      <m:r>
-                        <a:rPr lang="en-US" altLang="zh-CN" b="0" i="1" smtClean="0">
-                          <a:latin typeface="Cambria Math" panose="02040503050406030204" pitchFamily="18" charset="0"/>
-                        </a:rPr>
-                        <m:t>,</m:t>
-                      </m:r>
-                      <m:r>
-                        <a:rPr lang="en-US" altLang="zh-CN" b="0" i="1" smtClean="0">
-                          <a:latin typeface="Cambria Math" panose="02040503050406030204" pitchFamily="18" charset="0"/>
-                        </a:rPr>
-                        <m:t>𝑡</m:t>
-                      </m:r>
-                    </m:sub>
-                  </m:sSub>
-                </m:oMath>
-              </a14:m>
-              <a:endParaRPr lang="en-US" altLang="zh-CN" b="0" dirty="0"/>
-            </a:p>
-          </dgm:t>
-        </dgm:pt>
-      </mc:Choice>
-      <mc:Fallback>
-        <dgm:pt modelId="{6592FCD5-916C-437A-912A-571D1A32A986}">
-          <dgm:prSet phldrT="[Text]" phldr="0"/>
-          <dgm:spPr/>
-          <dgm:t>
-            <a:bodyPr/>
-            <a:lstStyle/>
-            <a:p>
-              <a:r>
-                <a:rPr lang="en-US" altLang="zh-CN" dirty="0"/>
-                <a:t>ESPR-based Anchor: </a:t>
-              </a:r>
-              <a:r>
-                <a:rPr lang="en-US" altLang="zh-CN" b="0" i="0">
-                  <a:latin typeface="Cambria Math" panose="02040503050406030204" pitchFamily="18" charset="0"/>
-                </a:rPr>
-                <a:t>𝑦̂_(𝑔,𝑡)</a:t>
-              </a:r>
-              <a:endParaRPr lang="en-US" altLang="zh-CN" b="0" dirty="0"/>
-            </a:p>
-          </dgm:t>
-        </dgm:pt>
-      </mc:Fallback>
-    </mc:AlternateContent>
-    <dgm:pt modelId="{0D912108-C65F-4C3A-8852-8918560E88D7}" type="parTrans" cxnId="{CF28FA31-5372-429E-A15B-14FA1DD088B3}">
-      <dgm:prSet/>
-      <dgm:spPr/>
-      <dgm:t>
-        <a:bodyPr/>
-        <a:lstStyle/>
-        <a:p>
-          <a:endParaRPr lang="zh-CN" altLang="en-US"/>
-        </a:p>
-      </dgm:t>
-    </dgm:pt>
-    <dgm:pt modelId="{4843546A-E4F2-4E4A-904D-8D16F85C6AF9}" type="sibTrans" cxnId="{CF28FA31-5372-429E-A15B-14FA1DD088B3}">
-      <dgm:prSet/>
-      <dgm:spPr/>
-      <dgm:t>
-        <a:bodyPr/>
-        <a:lstStyle/>
-        <a:p>
-          <a:endParaRPr lang="zh-CN" altLang="en-US"/>
-        </a:p>
-      </dgm:t>
-    </dgm:pt>
-    <mc:AlternateContent xmlns:mc="http://schemas.openxmlformats.org/markup-compatibility/2006">
-      <mc:Choice xmlns:a14="http://schemas.microsoft.com/office/drawing/2010/main" Requires="a14">
-        <dgm:pt modelId="{932D7D63-20DD-4B99-AF38-40B9E7F6711C}">
-          <dgm:prSet phldrT="[Text]" phldr="0"/>
-          <dgm:spPr/>
-          <dgm:t>
-            <a:bodyPr/>
-            <a:lstStyle/>
-            <a:p>
-              <a:r>
-                <a:rPr lang="en-US" altLang="zh-CN" dirty="0"/>
-                <a:t>Add Lag Information: </a:t>
-              </a:r>
-              <a14:m>
-                <m:oMath xmlns:m="http://schemas.openxmlformats.org/officeDocument/2006/math">
-                  <m:r>
-                    <a:rPr lang="en-US" altLang="zh-CN" b="0" i="1" smtClean="0">
-                      <a:latin typeface="Cambria Math" panose="02040503050406030204" pitchFamily="18" charset="0"/>
-                    </a:rPr>
-                    <m:t>𝑦</m:t>
-                  </m:r>
-                  <m:sSub>
-                    <m:sSubPr>
-                      <m:ctrlPr>
-                        <a:rPr lang="en-US" altLang="zh-CN" b="0" i="1" smtClean="0">
-                          <a:latin typeface="Cambria Math" panose="02040503050406030204" pitchFamily="18" charset="0"/>
-                        </a:rPr>
-                      </m:ctrlPr>
-                    </m:sSubPr>
-                    <m:e>
-                      <m:r>
-                        <a:rPr lang="en-US" altLang="zh-CN" b="0" i="1" smtClean="0">
-                          <a:latin typeface="Cambria Math" panose="02040503050406030204" pitchFamily="18" charset="0"/>
-                        </a:rPr>
-                        <m:t>̂</m:t>
-                      </m:r>
-                    </m:e>
-                    <m:sub>
-                      <m:r>
-                        <a:rPr lang="en-US" altLang="zh-CN" b="0" i="1" smtClean="0">
-                          <a:latin typeface="Cambria Math" panose="02040503050406030204" pitchFamily="18" charset="0"/>
-                        </a:rPr>
-                        <m:t>𝑔</m:t>
-                      </m:r>
-                      <m:r>
-                        <a:rPr lang="en-US" altLang="zh-CN" b="0" i="1" smtClean="0">
-                          <a:latin typeface="Cambria Math" panose="02040503050406030204" pitchFamily="18" charset="0"/>
-                        </a:rPr>
-                        <m:t>,</m:t>
-                      </m:r>
-                      <m:r>
-                        <a:rPr lang="en-US" altLang="zh-CN" b="0" i="1" smtClean="0">
-                          <a:latin typeface="Cambria Math" panose="02040503050406030204" pitchFamily="18" charset="0"/>
-                        </a:rPr>
-                        <m:t>𝑡</m:t>
-                      </m:r>
-                      <m:r>
-                        <a:rPr lang="en-US" altLang="zh-CN" b="0" i="1" smtClean="0">
-                          <a:latin typeface="Cambria Math" panose="02040503050406030204" pitchFamily="18" charset="0"/>
-                        </a:rPr>
-                        <m:t>−</m:t>
-                      </m:r>
-                      <m:r>
-                        <a:rPr lang="en-US" altLang="zh-CN" b="0" i="1" smtClean="0">
-                          <a:latin typeface="Cambria Math" panose="02040503050406030204" pitchFamily="18" charset="0"/>
-                        </a:rPr>
-                        <m:t>1</m:t>
-                      </m:r>
-                    </m:sub>
-                  </m:sSub>
-                </m:oMath>
-              </a14:m>
-              <a:endParaRPr lang="en-US" altLang="zh-CN" b="0" dirty="0"/>
-            </a:p>
-          </dgm:t>
-        </dgm:pt>
-      </mc:Choice>
-      <mc:Fallback>
-        <dgm:pt modelId="{932D7D63-20DD-4B99-AF38-40B9E7F6711C}">
-          <dgm:prSet phldrT="[Text]" phldr="0"/>
-          <dgm:spPr/>
-          <dgm:t>
-            <a:bodyPr/>
-            <a:lstStyle/>
-            <a:p>
-              <a:r>
-                <a:rPr lang="en-US" altLang="zh-CN" dirty="0"/>
-                <a:t>Add Lag Information: </a:t>
-              </a:r>
-              <a:r>
-                <a:rPr lang="en-US" altLang="zh-CN" b="0" i="0">
-                  <a:latin typeface="Cambria Math" panose="02040503050406030204" pitchFamily="18" charset="0"/>
-                </a:rPr>
-                <a:t>𝑦̂_(𝑔,𝑡−1)</a:t>
-              </a:r>
-              <a:endParaRPr lang="en-US" altLang="zh-CN" b="0" dirty="0"/>
-            </a:p>
-          </dgm:t>
-        </dgm:pt>
-      </mc:Fallback>
-    </mc:AlternateContent>
-    <dgm:pt modelId="{757A9E2C-1A21-4DEB-AF85-3E9AAAA50772}" type="parTrans" cxnId="{A6A25E1A-4567-4ADE-AB6D-F94D7E68DDE4}">
-      <dgm:prSet/>
-      <dgm:spPr/>
-      <dgm:t>
-        <a:bodyPr/>
-        <a:lstStyle/>
-        <a:p>
-          <a:endParaRPr lang="zh-CN" altLang="en-US"/>
-        </a:p>
-      </dgm:t>
-    </dgm:pt>
-    <dgm:pt modelId="{B2300A11-5E6D-46C2-9336-F678B7C76DD6}" type="sibTrans" cxnId="{A6A25E1A-4567-4ADE-AB6D-F94D7E68DDE4}">
-      <dgm:prSet/>
-      <dgm:spPr/>
-      <dgm:t>
-        <a:bodyPr/>
-        <a:lstStyle/>
-        <a:p>
-          <a:endParaRPr lang="zh-CN" altLang="en-US"/>
-        </a:p>
-      </dgm:t>
-    </dgm:pt>
-    <dgm:pt modelId="{CC0A503C-9821-4417-A003-3EA0AD54FB92}">
+    <dgm:pt modelId="{6592FCD5-916C-437A-912A-571D1A32A986}">
       <dgm:prSet phldrT="[Text]" phldr="0"/>
       <dgm:spPr/>
       <dgm:t>
@@ -3627,208 +3453,9 @@
         <a:p>
           <a:r>
             <a:rPr lang="en-US" altLang="zh-CN" dirty="0"/>
-            <a:t>Apply Smoothing</a:t>
+            <a:t>ESPR-based Anchor</a:t>
           </a:r>
-          <a:endParaRPr lang="zh-CN" altLang="en-US" dirty="0"/>
-        </a:p>
-      </dgm:t>
-    </dgm:pt>
-    <dgm:pt modelId="{217E8FB1-DBF7-4C13-9ACC-DFBD7C0A2284}" type="parTrans" cxnId="{9EFAA74C-84EA-4A0D-89C2-CE766959BB4E}">
-      <dgm:prSet/>
-      <dgm:spPr/>
-      <dgm:t>
-        <a:bodyPr/>
-        <a:lstStyle/>
-        <a:p>
-          <a:endParaRPr lang="zh-CN" altLang="en-US"/>
-        </a:p>
-      </dgm:t>
-    </dgm:pt>
-    <dgm:pt modelId="{6FE22A07-FC3B-48A8-ADBA-CD840F825FE5}" type="sibTrans" cxnId="{9EFAA74C-84EA-4A0D-89C2-CE766959BB4E}">
-      <dgm:prSet/>
-      <dgm:spPr/>
-      <dgm:t>
-        <a:bodyPr/>
-        <a:lstStyle/>
-        <a:p>
-          <a:endParaRPr lang="zh-CN" altLang="en-US"/>
-        </a:p>
-      </dgm:t>
-    </dgm:pt>
-    <dgm:pt modelId="{0EB776C3-9F1E-40C5-8094-4B544449E236}">
-      <dgm:prSet phldrT="[Text]" phldr="0"/>
-      <dgm:spPr/>
-      <dgm:t>
-        <a:bodyPr/>
-        <a:lstStyle/>
-        <a:p>
-          <a:r>
-            <a:rPr lang="en-US" altLang="zh-CN" dirty="0"/>
-            <a:t>Ensure Value Safety (&gt; 0)</a:t>
-          </a:r>
-          <a:endParaRPr lang="zh-CN" altLang="en-US" dirty="0"/>
-        </a:p>
-      </dgm:t>
-    </dgm:pt>
-    <dgm:pt modelId="{B31B1228-914A-4EAE-AC8A-4A1769C7C5E2}" type="parTrans" cxnId="{31000530-04E1-41ED-8D1C-774C14E70798}">
-      <dgm:prSet/>
-      <dgm:spPr/>
-      <dgm:t>
-        <a:bodyPr/>
-        <a:lstStyle/>
-        <a:p>
-          <a:endParaRPr lang="zh-CN" altLang="en-US"/>
-        </a:p>
-      </dgm:t>
-    </dgm:pt>
-    <dgm:pt modelId="{D8C9731F-1676-4A23-98E4-91DAF38C9543}" type="sibTrans" cxnId="{31000530-04E1-41ED-8D1C-774C14E70798}">
-      <dgm:prSet/>
-      <dgm:spPr/>
-      <dgm:t>
-        <a:bodyPr/>
-        <a:lstStyle/>
-        <a:p>
-          <a:endParaRPr lang="zh-CN" altLang="en-US"/>
-        </a:p>
-      </dgm:t>
-    </dgm:pt>
-    <dgm:pt modelId="{D099BFEA-2679-4626-8D06-66D61EAD2CF8}" type="pres">
-      <dgm:prSet presAssocID="{4D6DE171-F4A4-46EB-B90B-43B1E1AE156D}" presName="diagram" presStyleCnt="0">
-        <dgm:presLayoutVars>
-          <dgm:dir/>
-          <dgm:resizeHandles val="exact"/>
-        </dgm:presLayoutVars>
-      </dgm:prSet>
-      <dgm:spPr/>
-    </dgm:pt>
-    <dgm:pt modelId="{CEE464C9-0ABE-4B61-9B02-235A5A24B9CF}" type="pres">
-      <dgm:prSet presAssocID="{6592FCD5-916C-437A-912A-571D1A32A986}" presName="node" presStyleLbl="node1" presStyleIdx="0" presStyleCnt="4">
-        <dgm:presLayoutVars>
-          <dgm:bulletEnabled val="1"/>
-        </dgm:presLayoutVars>
-      </dgm:prSet>
-      <dgm:spPr/>
-    </dgm:pt>
-    <dgm:pt modelId="{BAA20030-ECF7-4AA7-A618-AC6DD70882E7}" type="pres">
-      <dgm:prSet presAssocID="{4843546A-E4F2-4E4A-904D-8D16F85C6AF9}" presName="sibTrans" presStyleLbl="sibTrans2D1" presStyleIdx="0" presStyleCnt="3"/>
-      <dgm:spPr/>
-    </dgm:pt>
-    <dgm:pt modelId="{BD1F03A6-1E22-43A4-8ADF-F945321C1AD1}" type="pres">
-      <dgm:prSet presAssocID="{4843546A-E4F2-4E4A-904D-8D16F85C6AF9}" presName="connectorText" presStyleLbl="sibTrans2D1" presStyleIdx="0" presStyleCnt="3"/>
-      <dgm:spPr/>
-    </dgm:pt>
-    <dgm:pt modelId="{E634F90B-F8FE-4A5A-A41F-8F7A129455C2}" type="pres">
-      <dgm:prSet presAssocID="{932D7D63-20DD-4B99-AF38-40B9E7F6711C}" presName="node" presStyleLbl="node1" presStyleIdx="1" presStyleCnt="4">
-        <dgm:presLayoutVars>
-          <dgm:bulletEnabled val="1"/>
-        </dgm:presLayoutVars>
-      </dgm:prSet>
-      <dgm:spPr/>
-    </dgm:pt>
-    <dgm:pt modelId="{FA7BBE4A-5AB0-42FA-B29D-1C8DC83A8FC8}" type="pres">
-      <dgm:prSet presAssocID="{B2300A11-5E6D-46C2-9336-F678B7C76DD6}" presName="sibTrans" presStyleLbl="sibTrans2D1" presStyleIdx="1" presStyleCnt="3"/>
-      <dgm:spPr/>
-    </dgm:pt>
-    <dgm:pt modelId="{061C671A-8B3C-4198-8D25-BBA156C82489}" type="pres">
-      <dgm:prSet presAssocID="{B2300A11-5E6D-46C2-9336-F678B7C76DD6}" presName="connectorText" presStyleLbl="sibTrans2D1" presStyleIdx="1" presStyleCnt="3"/>
-      <dgm:spPr/>
-    </dgm:pt>
-    <dgm:pt modelId="{B3812193-A063-454B-B78C-D57C01349759}" type="pres">
-      <dgm:prSet presAssocID="{CC0A503C-9821-4417-A003-3EA0AD54FB92}" presName="node" presStyleLbl="node1" presStyleIdx="2" presStyleCnt="4">
-        <dgm:presLayoutVars>
-          <dgm:bulletEnabled val="1"/>
-        </dgm:presLayoutVars>
-      </dgm:prSet>
-      <dgm:spPr/>
-    </dgm:pt>
-    <dgm:pt modelId="{13FCA472-9D50-423B-B138-D14B1EC7AA0F}" type="pres">
-      <dgm:prSet presAssocID="{6FE22A07-FC3B-48A8-ADBA-CD840F825FE5}" presName="sibTrans" presStyleLbl="sibTrans2D1" presStyleIdx="2" presStyleCnt="3"/>
-      <dgm:spPr/>
-    </dgm:pt>
-    <dgm:pt modelId="{621070D9-36B0-4FE1-89E4-B8175FBB065F}" type="pres">
-      <dgm:prSet presAssocID="{6FE22A07-FC3B-48A8-ADBA-CD840F825FE5}" presName="connectorText" presStyleLbl="sibTrans2D1" presStyleIdx="2" presStyleCnt="3"/>
-      <dgm:spPr/>
-    </dgm:pt>
-    <dgm:pt modelId="{28A012FB-ABE5-4A0F-9902-7B4E46FE8990}" type="pres">
-      <dgm:prSet presAssocID="{0EB776C3-9F1E-40C5-8094-4B544449E236}" presName="node" presStyleLbl="node1" presStyleIdx="3" presStyleCnt="4">
-        <dgm:presLayoutVars>
-          <dgm:bulletEnabled val="1"/>
-        </dgm:presLayoutVars>
-      </dgm:prSet>
-      <dgm:spPr/>
-    </dgm:pt>
-  </dgm:ptLst>
-  <dgm:cxnLst>
-    <dgm:cxn modelId="{A6A25E1A-4567-4ADE-AB6D-F94D7E68DDE4}" srcId="{4D6DE171-F4A4-46EB-B90B-43B1E1AE156D}" destId="{932D7D63-20DD-4B99-AF38-40B9E7F6711C}" srcOrd="1" destOrd="0" parTransId="{757A9E2C-1A21-4DEB-AF85-3E9AAAA50772}" sibTransId="{B2300A11-5E6D-46C2-9336-F678B7C76DD6}"/>
-    <dgm:cxn modelId="{0BD8B01C-78CA-4952-8755-F0644D23475B}" type="presOf" srcId="{CC0A503C-9821-4417-A003-3EA0AD54FB92}" destId="{B3812193-A063-454B-B78C-D57C01349759}" srcOrd="0" destOrd="0" presId="urn:microsoft.com/office/officeart/2005/8/layout/process5"/>
-    <dgm:cxn modelId="{31000530-04E1-41ED-8D1C-774C14E70798}" srcId="{4D6DE171-F4A4-46EB-B90B-43B1E1AE156D}" destId="{0EB776C3-9F1E-40C5-8094-4B544449E236}" srcOrd="3" destOrd="0" parTransId="{B31B1228-914A-4EAE-AC8A-4A1769C7C5E2}" sibTransId="{D8C9731F-1676-4A23-98E4-91DAF38C9543}"/>
-    <dgm:cxn modelId="{5452FE30-B4CA-4941-9997-265DD7A9F7BA}" type="presOf" srcId="{4D6DE171-F4A4-46EB-B90B-43B1E1AE156D}" destId="{D099BFEA-2679-4626-8D06-66D61EAD2CF8}" srcOrd="0" destOrd="0" presId="urn:microsoft.com/office/officeart/2005/8/layout/process5"/>
-    <dgm:cxn modelId="{CF28FA31-5372-429E-A15B-14FA1DD088B3}" srcId="{4D6DE171-F4A4-46EB-B90B-43B1E1AE156D}" destId="{6592FCD5-916C-437A-912A-571D1A32A986}" srcOrd="0" destOrd="0" parTransId="{0D912108-C65F-4C3A-8852-8918560E88D7}" sibTransId="{4843546A-E4F2-4E4A-904D-8D16F85C6AF9}"/>
-    <dgm:cxn modelId="{E812FA33-D54A-4E3D-8F12-30FE6820E143}" type="presOf" srcId="{B2300A11-5E6D-46C2-9336-F678B7C76DD6}" destId="{061C671A-8B3C-4198-8D25-BBA156C82489}" srcOrd="1" destOrd="0" presId="urn:microsoft.com/office/officeart/2005/8/layout/process5"/>
-    <dgm:cxn modelId="{664B123B-0BF8-4211-A502-6B3634986759}" type="presOf" srcId="{932D7D63-20DD-4B99-AF38-40B9E7F6711C}" destId="{E634F90B-F8FE-4A5A-A41F-8F7A129455C2}" srcOrd="0" destOrd="0" presId="urn:microsoft.com/office/officeart/2005/8/layout/process5"/>
-    <dgm:cxn modelId="{0256B944-BC29-430D-A7D6-A81C333F14F3}" type="presOf" srcId="{6FE22A07-FC3B-48A8-ADBA-CD840F825FE5}" destId="{621070D9-36B0-4FE1-89E4-B8175FBB065F}" srcOrd="1" destOrd="0" presId="urn:microsoft.com/office/officeart/2005/8/layout/process5"/>
-    <dgm:cxn modelId="{BA801B4A-68DC-48B9-95FC-84450660AD62}" type="presOf" srcId="{4843546A-E4F2-4E4A-904D-8D16F85C6AF9}" destId="{BD1F03A6-1E22-43A4-8ADF-F945321C1AD1}" srcOrd="1" destOrd="0" presId="urn:microsoft.com/office/officeart/2005/8/layout/process5"/>
-    <dgm:cxn modelId="{9EFAA74C-84EA-4A0D-89C2-CE766959BB4E}" srcId="{4D6DE171-F4A4-46EB-B90B-43B1E1AE156D}" destId="{CC0A503C-9821-4417-A003-3EA0AD54FB92}" srcOrd="2" destOrd="0" parTransId="{217E8FB1-DBF7-4C13-9ACC-DFBD7C0A2284}" sibTransId="{6FE22A07-FC3B-48A8-ADBA-CD840F825FE5}"/>
-    <dgm:cxn modelId="{6E2BBE77-DA1B-45C4-809B-1BF13F489D79}" type="presOf" srcId="{0EB776C3-9F1E-40C5-8094-4B544449E236}" destId="{28A012FB-ABE5-4A0F-9902-7B4E46FE8990}" srcOrd="0" destOrd="0" presId="urn:microsoft.com/office/officeart/2005/8/layout/process5"/>
-    <dgm:cxn modelId="{E9EF189B-1C69-46A8-9972-7ACBA969ED58}" type="presOf" srcId="{6FE22A07-FC3B-48A8-ADBA-CD840F825FE5}" destId="{13FCA472-9D50-423B-B138-D14B1EC7AA0F}" srcOrd="0" destOrd="0" presId="urn:microsoft.com/office/officeart/2005/8/layout/process5"/>
-    <dgm:cxn modelId="{30CBC2EC-7A20-4F24-A861-1D16FE2DDBEC}" type="presOf" srcId="{6592FCD5-916C-437A-912A-571D1A32A986}" destId="{CEE464C9-0ABE-4B61-9B02-235A5A24B9CF}" srcOrd="0" destOrd="0" presId="urn:microsoft.com/office/officeart/2005/8/layout/process5"/>
-    <dgm:cxn modelId="{1D3A87FE-F23C-41E8-898C-B344BD6EE993}" type="presOf" srcId="{4843546A-E4F2-4E4A-904D-8D16F85C6AF9}" destId="{BAA20030-ECF7-4AA7-A618-AC6DD70882E7}" srcOrd="0" destOrd="0" presId="urn:microsoft.com/office/officeart/2005/8/layout/process5"/>
-    <dgm:cxn modelId="{843EFAFF-8941-43DE-80FE-E36FA23FA5E5}" type="presOf" srcId="{B2300A11-5E6D-46C2-9336-F678B7C76DD6}" destId="{FA7BBE4A-5AB0-42FA-B29D-1C8DC83A8FC8}" srcOrd="0" destOrd="0" presId="urn:microsoft.com/office/officeart/2005/8/layout/process5"/>
-    <dgm:cxn modelId="{A24942CC-DFE3-42CB-9A2A-8431D4A47F2D}" type="presParOf" srcId="{D099BFEA-2679-4626-8D06-66D61EAD2CF8}" destId="{CEE464C9-0ABE-4B61-9B02-235A5A24B9CF}" srcOrd="0" destOrd="0" presId="urn:microsoft.com/office/officeart/2005/8/layout/process5"/>
-    <dgm:cxn modelId="{DBAD85F9-7748-4BA1-A4BF-AB72BBAD99B1}" type="presParOf" srcId="{D099BFEA-2679-4626-8D06-66D61EAD2CF8}" destId="{BAA20030-ECF7-4AA7-A618-AC6DD70882E7}" srcOrd="1" destOrd="0" presId="urn:microsoft.com/office/officeart/2005/8/layout/process5"/>
-    <dgm:cxn modelId="{AA0E4BAF-ED01-4260-8562-7FF47D2A1A57}" type="presParOf" srcId="{BAA20030-ECF7-4AA7-A618-AC6DD70882E7}" destId="{BD1F03A6-1E22-43A4-8ADF-F945321C1AD1}" srcOrd="0" destOrd="0" presId="urn:microsoft.com/office/officeart/2005/8/layout/process5"/>
-    <dgm:cxn modelId="{B51BA083-77BE-472F-B05C-C36172183E2F}" type="presParOf" srcId="{D099BFEA-2679-4626-8D06-66D61EAD2CF8}" destId="{E634F90B-F8FE-4A5A-A41F-8F7A129455C2}" srcOrd="2" destOrd="0" presId="urn:microsoft.com/office/officeart/2005/8/layout/process5"/>
-    <dgm:cxn modelId="{530A22B6-CDE2-4450-8DD9-4AA0F9D58557}" type="presParOf" srcId="{D099BFEA-2679-4626-8D06-66D61EAD2CF8}" destId="{FA7BBE4A-5AB0-42FA-B29D-1C8DC83A8FC8}" srcOrd="3" destOrd="0" presId="urn:microsoft.com/office/officeart/2005/8/layout/process5"/>
-    <dgm:cxn modelId="{5086D987-9648-43FF-B32E-DD25A35F4B28}" type="presParOf" srcId="{FA7BBE4A-5AB0-42FA-B29D-1C8DC83A8FC8}" destId="{061C671A-8B3C-4198-8D25-BBA156C82489}" srcOrd="0" destOrd="0" presId="urn:microsoft.com/office/officeart/2005/8/layout/process5"/>
-    <dgm:cxn modelId="{05FDD408-7063-4598-B45F-DE50A2CA6328}" type="presParOf" srcId="{D099BFEA-2679-4626-8D06-66D61EAD2CF8}" destId="{B3812193-A063-454B-B78C-D57C01349759}" srcOrd="4" destOrd="0" presId="urn:microsoft.com/office/officeart/2005/8/layout/process5"/>
-    <dgm:cxn modelId="{2623F690-D226-4C17-8A5E-6609738A041E}" type="presParOf" srcId="{D099BFEA-2679-4626-8D06-66D61EAD2CF8}" destId="{13FCA472-9D50-423B-B138-D14B1EC7AA0F}" srcOrd="5" destOrd="0" presId="urn:microsoft.com/office/officeart/2005/8/layout/process5"/>
-    <dgm:cxn modelId="{A66D3880-8DA8-4884-9BD7-8B24744C4104}" type="presParOf" srcId="{13FCA472-9D50-423B-B138-D14B1EC7AA0F}" destId="{621070D9-36B0-4FE1-89E4-B8175FBB065F}" srcOrd="0" destOrd="0" presId="urn:microsoft.com/office/officeart/2005/8/layout/process5"/>
-    <dgm:cxn modelId="{28A8525A-B20F-4D60-A07A-09477C6BFAFA}" type="presParOf" srcId="{D099BFEA-2679-4626-8D06-66D61EAD2CF8}" destId="{28A012FB-ABE5-4A0F-9902-7B4E46FE8990}" srcOrd="6" destOrd="0" presId="urn:microsoft.com/office/officeart/2005/8/layout/process5"/>
-  </dgm:cxnLst>
-  <dgm:bg/>
-  <dgm:whole/>
-  <dgm:extLst>
-    <a:ext uri="http://schemas.microsoft.com/office/drawing/2008/diagram">
-      <dsp:dataModelExt xmlns:dsp="http://schemas.microsoft.com/office/drawing/2008/diagram" relId="rId7" minVer="http://schemas.openxmlformats.org/drawingml/2006/diagram"/>
-    </a:ext>
-  </dgm:extLst>
-</dgm:dataModel>
-</file>
-
-<file path=ppt/diagrams/data3.xml><?xml version="1.0" encoding="utf-8"?>
-<dgm:dataModel xmlns:dgm="http://schemas.openxmlformats.org/drawingml/2006/diagram" xmlns:a="http://schemas.openxmlformats.org/drawingml/2006/main">
-  <dgm:ptLst>
-    <dgm:pt modelId="{4D6DE171-F4A4-46EB-B90B-43B1E1AE156D}" type="doc">
-      <dgm:prSet loTypeId="urn:microsoft.com/office/officeart/2005/8/layout/process5" loCatId="process" qsTypeId="urn:microsoft.com/office/officeart/2005/8/quickstyle/simple1" qsCatId="simple" csTypeId="urn:microsoft.com/office/officeart/2005/8/colors/accent1_2" csCatId="accent1" phldr="1"/>
-      <dgm:spPr/>
-      <dgm:t>
-        <a:bodyPr/>
-        <a:lstStyle/>
-        <a:p>
-          <a:endParaRPr lang="zh-CN" altLang="en-US"/>
-        </a:p>
-      </dgm:t>
-    </dgm:pt>
-    <dgm:pt modelId="{6592FCD5-916C-437A-912A-571D1A32A986}">
-      <dgm:prSet phldrT="[Text]" phldr="0"/>
-      <dgm:spPr>
-        <a:blipFill>
-          <a:blip xmlns:r="http://schemas.openxmlformats.org/officeDocument/2006/relationships" r:embed="rId1"/>
-          <a:stretch>
-            <a:fillRect r="-4000"/>
-          </a:stretch>
-        </a:blipFill>
-      </dgm:spPr>
-      <dgm:t>
-        <a:bodyPr/>
-        <a:lstStyle/>
-        <a:p>
-          <a:r>
-            <a:rPr lang="zh-CN" altLang="en-US">
-              <a:noFill/>
-            </a:rPr>
-            <a:t> </a:t>
-          </a:r>
+          <a:endParaRPr lang="en-US" altLang="zh-CN" b="0" dirty="0"/>
         </a:p>
       </dgm:t>
     </dgm:pt>
@@ -3856,24 +3483,16 @@
     </dgm:pt>
     <dgm:pt modelId="{932D7D63-20DD-4B99-AF38-40B9E7F6711C}">
       <dgm:prSet phldrT="[Text]" phldr="0"/>
-      <dgm:spPr>
-        <a:blipFill>
-          <a:blip xmlns:r="http://schemas.openxmlformats.org/officeDocument/2006/relationships" r:embed="rId2"/>
-          <a:stretch>
-            <a:fillRect r="-727"/>
-          </a:stretch>
-        </a:blipFill>
-      </dgm:spPr>
+      <dgm:spPr/>
       <dgm:t>
         <a:bodyPr/>
         <a:lstStyle/>
         <a:p>
           <a:r>
-            <a:rPr lang="zh-CN" altLang="en-US">
-              <a:noFill/>
-            </a:rPr>
-            <a:t> </a:t>
+            <a:rPr lang="en-US" altLang="zh-CN" dirty="0"/>
+            <a:t>Add Lag Information</a:t>
           </a:r>
+          <a:endParaRPr lang="en-US" altLang="zh-CN" b="0" dirty="0"/>
         </a:p>
       </dgm:t>
     </dgm:pt>
@@ -4076,7 +3695,7 @@
 </dgm:dataModel>
 </file>
 
-<file path=ppt/diagrams/data4.xml><?xml version="1.0" encoding="utf-8"?>
+<file path=ppt/diagrams/data3.xml><?xml version="1.0" encoding="utf-8"?>
 <dgm:dataModel xmlns:dgm="http://schemas.openxmlformats.org/drawingml/2006/diagram" xmlns:a="http://schemas.openxmlformats.org/drawingml/2006/main">
   <dgm:ptLst>
     <dgm:pt modelId="{155FDF42-88B5-4A7D-BE62-8121EE190D74}" type="doc">
@@ -4461,7 +4080,7 @@
 </dgm:dataModel>
 </file>
 
-<file path=ppt/diagrams/data5.xml><?xml version="1.0" encoding="utf-8"?>
+<file path=ppt/diagrams/data4.xml><?xml version="1.0" encoding="utf-8"?>
 <dgm:dataModel xmlns:dgm="http://schemas.openxmlformats.org/drawingml/2006/diagram" xmlns:a="http://schemas.openxmlformats.org/drawingml/2006/main">
   <dgm:ptLst>
     <dgm:pt modelId="{52B887BB-9C70-4E67-9466-F11A60B495FC}" type="doc">
@@ -4777,19 +4396,20 @@
       <dsp:cNvGrpSpPr/>
     </dsp:nvGrpSpPr>
     <dsp:grpSpPr/>
-    <dsp:sp modelId="{0BFD1F0F-D3B8-4B85-A889-8DADC47D3905}">
+    <dsp:sp modelId="{69527FD1-40C6-4E55-A11B-F6133781A754}">
       <dsp:nvSpPr>
         <dsp:cNvPr id="0" name=""/>
         <dsp:cNvSpPr/>
       </dsp:nvSpPr>
       <dsp:spPr>
-        <a:xfrm>
-          <a:off x="2595189" y="2084"/>
-          <a:ext cx="1662303" cy="775418"/>
+        <a:xfrm rot="5400000">
+          <a:off x="317044" y="1762185"/>
+          <a:ext cx="953703" cy="1586940"/>
         </a:xfrm>
-        <a:prstGeom prst="roundRect">
+        <a:prstGeom prst="corner">
           <a:avLst>
-            <a:gd name="adj" fmla="val 10000"/>
+            <a:gd name="adj1" fmla="val 16120"/>
+            <a:gd name="adj2" fmla="val 16110"/>
           </a:avLst>
         </a:prstGeom>
         <a:solidFill>
@@ -4802,7 +4422,7 @@
         </a:solidFill>
         <a:ln w="12700" cap="flat" cmpd="sng" algn="ctr">
           <a:solidFill>
-            <a:schemeClr val="lt1">
+            <a:schemeClr val="accent1">
               <a:hueOff val="0"/>
               <a:satOff val="0"/>
               <a:lumOff val="0"/>
@@ -4828,13 +4448,45 @@
           <a:schemeClr val="lt1"/>
         </a:fontRef>
       </dsp:style>
+    </dsp:sp>
+    <dsp:sp modelId="{BFCFA4A0-2561-4D60-BF5E-C3303B3F0B06}">
+      <dsp:nvSpPr>
+        <dsp:cNvPr id="0" name=""/>
+        <dsp:cNvSpPr/>
+      </dsp:nvSpPr>
+      <dsp:spPr>
+        <a:xfrm>
+          <a:off x="157847" y="2236338"/>
+          <a:ext cx="1432699" cy="1255844"/>
+        </a:xfrm>
+        <a:prstGeom prst="rect">
+          <a:avLst/>
+        </a:prstGeom>
+        <a:noFill/>
+        <a:ln>
+          <a:noFill/>
+        </a:ln>
+        <a:effectLst/>
+      </dsp:spPr>
+      <dsp:style>
+        <a:lnRef idx="0">
+          <a:scrgbClr r="0" g="0" b="0"/>
+        </a:lnRef>
+        <a:fillRef idx="0">
+          <a:scrgbClr r="0" g="0" b="0"/>
+        </a:fillRef>
+        <a:effectRef idx="0">
+          <a:scrgbClr r="0" g="0" b="0"/>
+        </a:effectRef>
+        <a:fontRef idx="minor"/>
+      </dsp:style>
       <dsp:txBody>
-        <a:bodyPr spcFirstLastPara="0" vert="horz" wrap="square" lIns="68580" tIns="68580" rIns="68580" bIns="68580" numCol="1" spcCol="1270" anchor="ctr" anchorCtr="0">
+        <a:bodyPr spcFirstLastPara="0" vert="horz" wrap="square" lIns="60960" tIns="60960" rIns="60960" bIns="60960" numCol="1" spcCol="1270" anchor="t" anchorCtr="0">
           <a:noAutofit/>
         </a:bodyPr>
         <a:lstStyle/>
         <a:p>
-          <a:pPr marL="0" lvl="0" indent="0" algn="ctr" defTabSz="800100">
+          <a:pPr marL="0" lvl="0" indent="0" algn="l" defTabSz="711200">
             <a:lnSpc>
               <a:spcPct val="90000"/>
             </a:lnSpc>
@@ -4847,100 +4499,30 @@
             <a:buNone/>
           </a:pPr>
           <a:r>
-            <a:rPr lang="en-US" sz="1800" kern="1200" dirty="0"/>
+            <a:rPr lang="en-US" sz="1600" kern="1200" dirty="0"/>
             <a:t>EDA on Raw Data</a:t>
           </a:r>
-          <a:endParaRPr lang="zh-CN" altLang="en-US" sz="1800" kern="1200" dirty="0"/>
+          <a:endParaRPr lang="zh-CN" altLang="en-US" sz="1600" kern="1200" dirty="0"/>
         </a:p>
       </dsp:txBody>
       <dsp:txXfrm>
-        <a:off x="2617900" y="24795"/>
-        <a:ext cx="1616881" cy="729996"/>
+        <a:off x="157847" y="2236338"/>
+        <a:ext cx="1432699" cy="1255844"/>
       </dsp:txXfrm>
     </dsp:sp>
-    <dsp:sp modelId="{6F6120D2-0087-45CF-BE46-4209A3EC5C6A}">
-      <dsp:nvSpPr>
-        <dsp:cNvPr id="0" name=""/>
-        <dsp:cNvSpPr/>
-      </dsp:nvSpPr>
-      <dsp:spPr>
-        <a:xfrm rot="5400000">
-          <a:off x="3280950" y="796888"/>
-          <a:ext cx="290782" cy="348938"/>
-        </a:xfrm>
-        <a:prstGeom prst="rightArrow">
-          <a:avLst>
-            <a:gd name="adj1" fmla="val 60000"/>
-            <a:gd name="adj2" fmla="val 50000"/>
-          </a:avLst>
-        </a:prstGeom>
-        <a:solidFill>
-          <a:schemeClr val="accent1">
-            <a:tint val="60000"/>
-            <a:hueOff val="0"/>
-            <a:satOff val="0"/>
-            <a:lumOff val="0"/>
-            <a:alphaOff val="0"/>
-          </a:schemeClr>
-        </a:solidFill>
-        <a:ln>
-          <a:noFill/>
-        </a:ln>
-        <a:effectLst/>
-      </dsp:spPr>
-      <dsp:style>
-        <a:lnRef idx="0">
-          <a:scrgbClr r="0" g="0" b="0"/>
-        </a:lnRef>
-        <a:fillRef idx="1">
-          <a:scrgbClr r="0" g="0" b="0"/>
-        </a:fillRef>
-        <a:effectRef idx="0">
-          <a:scrgbClr r="0" g="0" b="0"/>
-        </a:effectRef>
-        <a:fontRef idx="minor">
-          <a:schemeClr val="lt1"/>
-        </a:fontRef>
-      </dsp:style>
-      <dsp:txBody>
-        <a:bodyPr spcFirstLastPara="0" vert="horz" wrap="square" lIns="0" tIns="0" rIns="0" bIns="0" numCol="1" spcCol="1270" anchor="ctr" anchorCtr="0">
-          <a:noAutofit/>
-        </a:bodyPr>
-        <a:lstStyle/>
-        <a:p>
-          <a:pPr marL="0" lvl="0" indent="0" algn="ctr" defTabSz="622300">
-            <a:lnSpc>
-              <a:spcPct val="90000"/>
-            </a:lnSpc>
-            <a:spcBef>
-              <a:spcPct val="0"/>
-            </a:spcBef>
-            <a:spcAft>
-              <a:spcPct val="35000"/>
-            </a:spcAft>
-            <a:buNone/>
-          </a:pPr>
-          <a:endParaRPr lang="zh-CN" altLang="en-US" sz="1400" kern="1200"/>
-        </a:p>
-      </dsp:txBody>
-      <dsp:txXfrm rot="-5400000">
-        <a:off x="3321661" y="825966"/>
-        <a:ext cx="209362" cy="203547"/>
-      </dsp:txXfrm>
-    </dsp:sp>
-    <dsp:sp modelId="{8D99679D-8E6D-4DF3-ABD8-3A2B1D2054E7}">
+    <dsp:sp modelId="{851E3E90-19C2-4415-AE07-E49F52089EF0}">
       <dsp:nvSpPr>
         <dsp:cNvPr id="0" name=""/>
         <dsp:cNvSpPr/>
       </dsp:nvSpPr>
       <dsp:spPr>
         <a:xfrm>
-          <a:off x="2595189" y="1165212"/>
-          <a:ext cx="1662303" cy="775418"/>
+          <a:off x="1320225" y="1645352"/>
+          <a:ext cx="270320" cy="270320"/>
         </a:xfrm>
-        <a:prstGeom prst="roundRect">
+        <a:prstGeom prst="triangle">
           <a:avLst>
-            <a:gd name="adj" fmla="val 10000"/>
+            <a:gd name="adj" fmla="val 100000"/>
           </a:avLst>
         </a:prstGeom>
         <a:solidFill>
@@ -4953,7 +4535,7 @@
         </a:solidFill>
         <a:ln w="12700" cap="flat" cmpd="sng" algn="ctr">
           <a:solidFill>
-            <a:schemeClr val="lt1">
+            <a:schemeClr val="accent1">
               <a:hueOff val="0"/>
               <a:satOff val="0"/>
               <a:lumOff val="0"/>
@@ -4979,119 +4561,21 @@
           <a:schemeClr val="lt1"/>
         </a:fontRef>
       </dsp:style>
-      <dsp:txBody>
-        <a:bodyPr spcFirstLastPara="0" vert="horz" wrap="square" lIns="68580" tIns="68580" rIns="68580" bIns="68580" numCol="1" spcCol="1270" anchor="ctr" anchorCtr="0">
-          <a:noAutofit/>
-        </a:bodyPr>
-        <a:lstStyle/>
-        <a:p>
-          <a:pPr marL="0" lvl="0" indent="0" algn="ctr" defTabSz="800100">
-            <a:lnSpc>
-              <a:spcPct val="90000"/>
-            </a:lnSpc>
-            <a:spcBef>
-              <a:spcPct val="0"/>
-            </a:spcBef>
-            <a:spcAft>
-              <a:spcPct val="35000"/>
-            </a:spcAft>
-            <a:buNone/>
-          </a:pPr>
-          <a:r>
-            <a:rPr lang="en-US" sz="1800" kern="1200" dirty="0"/>
-            <a:t>Data Harmonization</a:t>
-          </a:r>
-          <a:endParaRPr lang="zh-CN" altLang="en-US" sz="1800" kern="1200" dirty="0"/>
-        </a:p>
-      </dsp:txBody>
-      <dsp:txXfrm>
-        <a:off x="2617900" y="1187923"/>
-        <a:ext cx="1616881" cy="729996"/>
-      </dsp:txXfrm>
     </dsp:sp>
-    <dsp:sp modelId="{A20917AB-CF4C-4477-B61C-CDF1A26E8EE9}">
+    <dsp:sp modelId="{BBD445AC-F09E-4D1B-84AE-644D94AB0AA4}">
       <dsp:nvSpPr>
         <dsp:cNvPr id="0" name=""/>
         <dsp:cNvSpPr/>
       </dsp:nvSpPr>
       <dsp:spPr>
         <a:xfrm rot="5400000">
-          <a:off x="3280950" y="1960016"/>
-          <a:ext cx="290782" cy="348938"/>
+          <a:off x="2070947" y="1328180"/>
+          <a:ext cx="953703" cy="1586940"/>
         </a:xfrm>
-        <a:prstGeom prst="rightArrow">
+        <a:prstGeom prst="corner">
           <a:avLst>
-            <a:gd name="adj1" fmla="val 60000"/>
-            <a:gd name="adj2" fmla="val 50000"/>
-          </a:avLst>
-        </a:prstGeom>
-        <a:solidFill>
-          <a:schemeClr val="accent1">
-            <a:tint val="60000"/>
-            <a:hueOff val="0"/>
-            <a:satOff val="0"/>
-            <a:lumOff val="0"/>
-            <a:alphaOff val="0"/>
-          </a:schemeClr>
-        </a:solidFill>
-        <a:ln>
-          <a:noFill/>
-        </a:ln>
-        <a:effectLst/>
-      </dsp:spPr>
-      <dsp:style>
-        <a:lnRef idx="0">
-          <a:scrgbClr r="0" g="0" b="0"/>
-        </a:lnRef>
-        <a:fillRef idx="1">
-          <a:scrgbClr r="0" g="0" b="0"/>
-        </a:fillRef>
-        <a:effectRef idx="0">
-          <a:scrgbClr r="0" g="0" b="0"/>
-        </a:effectRef>
-        <a:fontRef idx="minor">
-          <a:schemeClr val="lt1"/>
-        </a:fontRef>
-      </dsp:style>
-      <dsp:txBody>
-        <a:bodyPr spcFirstLastPara="0" vert="horz" wrap="square" lIns="0" tIns="0" rIns="0" bIns="0" numCol="1" spcCol="1270" anchor="ctr" anchorCtr="0">
-          <a:noAutofit/>
-        </a:bodyPr>
-        <a:lstStyle/>
-        <a:p>
-          <a:pPr marL="0" lvl="0" indent="0" algn="ctr" defTabSz="622300">
-            <a:lnSpc>
-              <a:spcPct val="90000"/>
-            </a:lnSpc>
-            <a:spcBef>
-              <a:spcPct val="0"/>
-            </a:spcBef>
-            <a:spcAft>
-              <a:spcPct val="35000"/>
-            </a:spcAft>
-            <a:buNone/>
-          </a:pPr>
-          <a:endParaRPr lang="zh-CN" altLang="en-US" sz="1400" kern="1200"/>
-        </a:p>
-      </dsp:txBody>
-      <dsp:txXfrm rot="-5400000">
-        <a:off x="3321661" y="1989094"/>
-        <a:ext cx="209362" cy="203547"/>
-      </dsp:txXfrm>
-    </dsp:sp>
-    <dsp:sp modelId="{121E402C-B8CB-44B5-A5B4-311E2FF2C2CD}">
-      <dsp:nvSpPr>
-        <dsp:cNvPr id="0" name=""/>
-        <dsp:cNvSpPr/>
-      </dsp:nvSpPr>
-      <dsp:spPr>
-        <a:xfrm>
-          <a:off x="2595189" y="2328340"/>
-          <a:ext cx="1662303" cy="775418"/>
-        </a:xfrm>
-        <a:prstGeom prst="roundRect">
-          <a:avLst>
-            <a:gd name="adj" fmla="val 10000"/>
+            <a:gd name="adj1" fmla="val 16120"/>
+            <a:gd name="adj2" fmla="val 16110"/>
           </a:avLst>
         </a:prstGeom>
         <a:solidFill>
@@ -5104,7 +4588,7 @@
         </a:solidFill>
         <a:ln w="12700" cap="flat" cmpd="sng" algn="ctr">
           <a:solidFill>
-            <a:schemeClr val="lt1">
+            <a:schemeClr val="accent1">
               <a:hueOff val="0"/>
               <a:satOff val="0"/>
               <a:lumOff val="0"/>
@@ -5130,13 +4614,45 @@
           <a:schemeClr val="lt1"/>
         </a:fontRef>
       </dsp:style>
+    </dsp:sp>
+    <dsp:sp modelId="{B5D5A48F-C936-47AA-A2A5-7DB8135BC282}">
+      <dsp:nvSpPr>
+        <dsp:cNvPr id="0" name=""/>
+        <dsp:cNvSpPr/>
+      </dsp:nvSpPr>
+      <dsp:spPr>
+        <a:xfrm>
+          <a:off x="1911751" y="1802333"/>
+          <a:ext cx="1432699" cy="1255844"/>
+        </a:xfrm>
+        <a:prstGeom prst="rect">
+          <a:avLst/>
+        </a:prstGeom>
+        <a:noFill/>
+        <a:ln>
+          <a:noFill/>
+        </a:ln>
+        <a:effectLst/>
+      </dsp:spPr>
+      <dsp:style>
+        <a:lnRef idx="0">
+          <a:scrgbClr r="0" g="0" b="0"/>
+        </a:lnRef>
+        <a:fillRef idx="0">
+          <a:scrgbClr r="0" g="0" b="0"/>
+        </a:fillRef>
+        <a:effectRef idx="0">
+          <a:scrgbClr r="0" g="0" b="0"/>
+        </a:effectRef>
+        <a:fontRef idx="minor"/>
+      </dsp:style>
       <dsp:txBody>
-        <a:bodyPr spcFirstLastPara="0" vert="horz" wrap="square" lIns="68580" tIns="68580" rIns="68580" bIns="68580" numCol="1" spcCol="1270" anchor="ctr" anchorCtr="0">
+        <a:bodyPr spcFirstLastPara="0" vert="horz" wrap="square" lIns="60960" tIns="60960" rIns="60960" bIns="60960" numCol="1" spcCol="1270" anchor="t" anchorCtr="0">
           <a:noAutofit/>
         </a:bodyPr>
         <a:lstStyle/>
         <a:p>
-          <a:pPr marL="0" lvl="0" indent="0" algn="ctr" defTabSz="800100">
+          <a:pPr marL="0" lvl="0" indent="0" algn="l" defTabSz="711200">
             <a:lnSpc>
               <a:spcPct val="90000"/>
             </a:lnSpc>
@@ -5149,100 +4665,30 @@
             <a:buNone/>
           </a:pPr>
           <a:r>
-            <a:rPr lang="en-US" sz="1800" kern="1200" dirty="0"/>
-            <a:t>Estimation and Testing</a:t>
+            <a:rPr lang="en-US" sz="1600" kern="1200" dirty="0"/>
+            <a:t>Data Harmonization</a:t>
           </a:r>
-          <a:endParaRPr lang="zh-CN" altLang="en-US" sz="1800" kern="1200" dirty="0"/>
+          <a:endParaRPr lang="zh-CN" altLang="en-US" sz="1600" kern="1200" dirty="0"/>
         </a:p>
       </dsp:txBody>
       <dsp:txXfrm>
-        <a:off x="2617900" y="2351051"/>
-        <a:ext cx="1616881" cy="729996"/>
+        <a:off x="1911751" y="1802333"/>
+        <a:ext cx="1432699" cy="1255844"/>
       </dsp:txXfrm>
     </dsp:sp>
-    <dsp:sp modelId="{408EB5D0-81CB-4813-B524-9B40A882A9DF}">
-      <dsp:nvSpPr>
-        <dsp:cNvPr id="0" name=""/>
-        <dsp:cNvSpPr/>
-      </dsp:nvSpPr>
-      <dsp:spPr>
-        <a:xfrm rot="5400000">
-          <a:off x="3280950" y="3123144"/>
-          <a:ext cx="290782" cy="348938"/>
-        </a:xfrm>
-        <a:prstGeom prst="rightArrow">
-          <a:avLst>
-            <a:gd name="adj1" fmla="val 60000"/>
-            <a:gd name="adj2" fmla="val 50000"/>
-          </a:avLst>
-        </a:prstGeom>
-        <a:solidFill>
-          <a:schemeClr val="accent1">
-            <a:tint val="60000"/>
-            <a:hueOff val="0"/>
-            <a:satOff val="0"/>
-            <a:lumOff val="0"/>
-            <a:alphaOff val="0"/>
-          </a:schemeClr>
-        </a:solidFill>
-        <a:ln>
-          <a:noFill/>
-        </a:ln>
-        <a:effectLst/>
-      </dsp:spPr>
-      <dsp:style>
-        <a:lnRef idx="0">
-          <a:scrgbClr r="0" g="0" b="0"/>
-        </a:lnRef>
-        <a:fillRef idx="1">
-          <a:scrgbClr r="0" g="0" b="0"/>
-        </a:fillRef>
-        <a:effectRef idx="0">
-          <a:scrgbClr r="0" g="0" b="0"/>
-        </a:effectRef>
-        <a:fontRef idx="minor">
-          <a:schemeClr val="lt1"/>
-        </a:fontRef>
-      </dsp:style>
-      <dsp:txBody>
-        <a:bodyPr spcFirstLastPara="0" vert="horz" wrap="square" lIns="0" tIns="0" rIns="0" bIns="0" numCol="1" spcCol="1270" anchor="ctr" anchorCtr="0">
-          <a:noAutofit/>
-        </a:bodyPr>
-        <a:lstStyle/>
-        <a:p>
-          <a:pPr marL="0" lvl="0" indent="0" algn="ctr" defTabSz="622300">
-            <a:lnSpc>
-              <a:spcPct val="90000"/>
-            </a:lnSpc>
-            <a:spcBef>
-              <a:spcPct val="0"/>
-            </a:spcBef>
-            <a:spcAft>
-              <a:spcPct val="35000"/>
-            </a:spcAft>
-            <a:buNone/>
-          </a:pPr>
-          <a:endParaRPr lang="zh-CN" altLang="en-US" sz="1400" kern="1200"/>
-        </a:p>
-      </dsp:txBody>
-      <dsp:txXfrm rot="-5400000">
-        <a:off x="3321661" y="3152222"/>
-        <a:ext cx="209362" cy="203547"/>
-      </dsp:txXfrm>
-    </dsp:sp>
-    <dsp:sp modelId="{7AAC00C7-C2E3-4F7B-9A8E-E786CBE969C0}">
+    <dsp:sp modelId="{4D6B8DAC-F4A5-4CF2-959C-17273ED6A7B5}">
       <dsp:nvSpPr>
         <dsp:cNvPr id="0" name=""/>
         <dsp:cNvSpPr/>
       </dsp:nvSpPr>
       <dsp:spPr>
         <a:xfrm>
-          <a:off x="2595189" y="3491468"/>
-          <a:ext cx="1662303" cy="775418"/>
+          <a:off x="3074129" y="1211347"/>
+          <a:ext cx="270320" cy="270320"/>
         </a:xfrm>
-        <a:prstGeom prst="roundRect">
+        <a:prstGeom prst="triangle">
           <a:avLst>
-            <a:gd name="adj" fmla="val 10000"/>
+            <a:gd name="adj" fmla="val 100000"/>
           </a:avLst>
         </a:prstGeom>
         <a:solidFill>
@@ -5255,7 +4701,7 @@
         </a:solidFill>
         <a:ln w="12700" cap="flat" cmpd="sng" algn="ctr">
           <a:solidFill>
-            <a:schemeClr val="lt1">
+            <a:schemeClr val="accent1">
               <a:hueOff val="0"/>
               <a:satOff val="0"/>
               <a:lumOff val="0"/>
@@ -5281,13 +4727,98 @@
           <a:schemeClr val="lt1"/>
         </a:fontRef>
       </dsp:style>
+    </dsp:sp>
+    <dsp:sp modelId="{7C1AA815-39FE-4B6C-84C6-2E0654AE69BF}">
+      <dsp:nvSpPr>
+        <dsp:cNvPr id="0" name=""/>
+        <dsp:cNvSpPr/>
+      </dsp:nvSpPr>
+      <dsp:spPr>
+        <a:xfrm rot="5400000">
+          <a:off x="3824851" y="894174"/>
+          <a:ext cx="953703" cy="1586940"/>
+        </a:xfrm>
+        <a:prstGeom prst="corner">
+          <a:avLst>
+            <a:gd name="adj1" fmla="val 16120"/>
+            <a:gd name="adj2" fmla="val 16110"/>
+          </a:avLst>
+        </a:prstGeom>
+        <a:solidFill>
+          <a:schemeClr val="accent1">
+            <a:hueOff val="0"/>
+            <a:satOff val="0"/>
+            <a:lumOff val="0"/>
+            <a:alphaOff val="0"/>
+          </a:schemeClr>
+        </a:solidFill>
+        <a:ln w="12700" cap="flat" cmpd="sng" algn="ctr">
+          <a:solidFill>
+            <a:schemeClr val="accent1">
+              <a:hueOff val="0"/>
+              <a:satOff val="0"/>
+              <a:lumOff val="0"/>
+              <a:alphaOff val="0"/>
+            </a:schemeClr>
+          </a:solidFill>
+          <a:prstDash val="solid"/>
+          <a:miter lim="800000"/>
+        </a:ln>
+        <a:effectLst/>
+      </dsp:spPr>
+      <dsp:style>
+        <a:lnRef idx="2">
+          <a:scrgbClr r="0" g="0" b="0"/>
+        </a:lnRef>
+        <a:fillRef idx="1">
+          <a:scrgbClr r="0" g="0" b="0"/>
+        </a:fillRef>
+        <a:effectRef idx="0">
+          <a:scrgbClr r="0" g="0" b="0"/>
+        </a:effectRef>
+        <a:fontRef idx="minor">
+          <a:schemeClr val="lt1"/>
+        </a:fontRef>
+      </dsp:style>
+    </dsp:sp>
+    <dsp:sp modelId="{1F6B1AAB-E658-459B-90B9-2FC936FDFF3E}">
+      <dsp:nvSpPr>
+        <dsp:cNvPr id="0" name=""/>
+        <dsp:cNvSpPr/>
+      </dsp:nvSpPr>
+      <dsp:spPr>
+        <a:xfrm>
+          <a:off x="3665654" y="1368328"/>
+          <a:ext cx="1432699" cy="1255844"/>
+        </a:xfrm>
+        <a:prstGeom prst="rect">
+          <a:avLst/>
+        </a:prstGeom>
+        <a:noFill/>
+        <a:ln>
+          <a:noFill/>
+        </a:ln>
+        <a:effectLst/>
+      </dsp:spPr>
+      <dsp:style>
+        <a:lnRef idx="0">
+          <a:scrgbClr r="0" g="0" b="0"/>
+        </a:lnRef>
+        <a:fillRef idx="0">
+          <a:scrgbClr r="0" g="0" b="0"/>
+        </a:fillRef>
+        <a:effectRef idx="0">
+          <a:scrgbClr r="0" g="0" b="0"/>
+        </a:effectRef>
+        <a:fontRef idx="minor"/>
+      </dsp:style>
       <dsp:txBody>
-        <a:bodyPr spcFirstLastPara="0" vert="horz" wrap="square" lIns="68580" tIns="68580" rIns="68580" bIns="68580" numCol="1" spcCol="1270" anchor="ctr" anchorCtr="0">
+        <a:bodyPr spcFirstLastPara="0" vert="horz" wrap="square" lIns="60960" tIns="60960" rIns="60960" bIns="60960" numCol="1" spcCol="1270" anchor="t" anchorCtr="0">
           <a:noAutofit/>
         </a:bodyPr>
         <a:lstStyle/>
         <a:p>
-          <a:pPr marL="0" lvl="0" indent="0" algn="ctr" defTabSz="800100">
+          <a:pPr marL="0" lvl="0" indent="0" algn="l" defTabSz="711200">
             <a:lnSpc>
               <a:spcPct val="90000"/>
             </a:lnSpc>
@@ -5300,15 +4831,181 @@
             <a:buNone/>
           </a:pPr>
           <a:r>
-            <a:rPr lang="en-US" sz="1800" kern="1200"/>
-            <a:t>Reproducible Workflow</a:t>
+            <a:rPr lang="en-US" sz="1600" kern="1200" dirty="0"/>
+            <a:t>Estimation and Testing</a:t>
           </a:r>
-          <a:endParaRPr lang="zh-CN" altLang="en-US" sz="1800" kern="1200" dirty="0"/>
+          <a:endParaRPr lang="zh-CN" altLang="en-US" sz="1600" kern="1200" dirty="0"/>
         </a:p>
       </dsp:txBody>
       <dsp:txXfrm>
-        <a:off x="2617900" y="3514179"/>
-        <a:ext cx="1616881" cy="729996"/>
+        <a:off x="3665654" y="1368328"/>
+        <a:ext cx="1432699" cy="1255844"/>
+      </dsp:txXfrm>
+    </dsp:sp>
+    <dsp:sp modelId="{CE67EDBB-FE94-4FB3-AF84-E6645676087D}">
+      <dsp:nvSpPr>
+        <dsp:cNvPr id="0" name=""/>
+        <dsp:cNvSpPr/>
+      </dsp:nvSpPr>
+      <dsp:spPr>
+        <a:xfrm>
+          <a:off x="4828033" y="777342"/>
+          <a:ext cx="270320" cy="270320"/>
+        </a:xfrm>
+        <a:prstGeom prst="triangle">
+          <a:avLst>
+            <a:gd name="adj" fmla="val 100000"/>
+          </a:avLst>
+        </a:prstGeom>
+        <a:solidFill>
+          <a:schemeClr val="accent1">
+            <a:hueOff val="0"/>
+            <a:satOff val="0"/>
+            <a:lumOff val="0"/>
+            <a:alphaOff val="0"/>
+          </a:schemeClr>
+        </a:solidFill>
+        <a:ln w="12700" cap="flat" cmpd="sng" algn="ctr">
+          <a:solidFill>
+            <a:schemeClr val="accent1">
+              <a:hueOff val="0"/>
+              <a:satOff val="0"/>
+              <a:lumOff val="0"/>
+              <a:alphaOff val="0"/>
+            </a:schemeClr>
+          </a:solidFill>
+          <a:prstDash val="solid"/>
+          <a:miter lim="800000"/>
+        </a:ln>
+        <a:effectLst/>
+      </dsp:spPr>
+      <dsp:style>
+        <a:lnRef idx="2">
+          <a:scrgbClr r="0" g="0" b="0"/>
+        </a:lnRef>
+        <a:fillRef idx="1">
+          <a:scrgbClr r="0" g="0" b="0"/>
+        </a:fillRef>
+        <a:effectRef idx="0">
+          <a:scrgbClr r="0" g="0" b="0"/>
+        </a:effectRef>
+        <a:fontRef idx="minor">
+          <a:schemeClr val="lt1"/>
+        </a:fontRef>
+      </dsp:style>
+    </dsp:sp>
+    <dsp:sp modelId="{87EAF7AC-2269-4374-8B8F-4C3ADC5FC321}">
+      <dsp:nvSpPr>
+        <dsp:cNvPr id="0" name=""/>
+        <dsp:cNvSpPr/>
+      </dsp:nvSpPr>
+      <dsp:spPr>
+        <a:xfrm rot="5400000">
+          <a:off x="5578755" y="460169"/>
+          <a:ext cx="953703" cy="1586940"/>
+        </a:xfrm>
+        <a:prstGeom prst="corner">
+          <a:avLst>
+            <a:gd name="adj1" fmla="val 16120"/>
+            <a:gd name="adj2" fmla="val 16110"/>
+          </a:avLst>
+        </a:prstGeom>
+        <a:solidFill>
+          <a:schemeClr val="accent1">
+            <a:hueOff val="0"/>
+            <a:satOff val="0"/>
+            <a:lumOff val="0"/>
+            <a:alphaOff val="0"/>
+          </a:schemeClr>
+        </a:solidFill>
+        <a:ln w="12700" cap="flat" cmpd="sng" algn="ctr">
+          <a:solidFill>
+            <a:schemeClr val="accent1">
+              <a:hueOff val="0"/>
+              <a:satOff val="0"/>
+              <a:lumOff val="0"/>
+              <a:alphaOff val="0"/>
+            </a:schemeClr>
+          </a:solidFill>
+          <a:prstDash val="solid"/>
+          <a:miter lim="800000"/>
+        </a:ln>
+        <a:effectLst/>
+      </dsp:spPr>
+      <dsp:style>
+        <a:lnRef idx="2">
+          <a:scrgbClr r="0" g="0" b="0"/>
+        </a:lnRef>
+        <a:fillRef idx="1">
+          <a:scrgbClr r="0" g="0" b="0"/>
+        </a:fillRef>
+        <a:effectRef idx="0">
+          <a:scrgbClr r="0" g="0" b="0"/>
+        </a:effectRef>
+        <a:fontRef idx="minor">
+          <a:schemeClr val="lt1"/>
+        </a:fontRef>
+      </dsp:style>
+    </dsp:sp>
+    <dsp:sp modelId="{C974D6A0-B25E-4AA0-812C-B40C094E02CF}">
+      <dsp:nvSpPr>
+        <dsp:cNvPr id="0" name=""/>
+        <dsp:cNvSpPr/>
+      </dsp:nvSpPr>
+      <dsp:spPr>
+        <a:xfrm>
+          <a:off x="5419558" y="934323"/>
+          <a:ext cx="1432699" cy="1255844"/>
+        </a:xfrm>
+        <a:prstGeom prst="rect">
+          <a:avLst/>
+        </a:prstGeom>
+        <a:noFill/>
+        <a:ln>
+          <a:noFill/>
+        </a:ln>
+        <a:effectLst/>
+      </dsp:spPr>
+      <dsp:style>
+        <a:lnRef idx="0">
+          <a:scrgbClr r="0" g="0" b="0"/>
+        </a:lnRef>
+        <a:fillRef idx="0">
+          <a:scrgbClr r="0" g="0" b="0"/>
+        </a:fillRef>
+        <a:effectRef idx="0">
+          <a:scrgbClr r="0" g="0" b="0"/>
+        </a:effectRef>
+        <a:fontRef idx="minor"/>
+      </dsp:style>
+      <dsp:txBody>
+        <a:bodyPr spcFirstLastPara="0" vert="horz" wrap="square" lIns="60960" tIns="60960" rIns="60960" bIns="60960" numCol="1" spcCol="1270" anchor="t" anchorCtr="0">
+          <a:noAutofit/>
+        </a:bodyPr>
+        <a:lstStyle/>
+        <a:p>
+          <a:pPr marL="0" lvl="0" indent="0" algn="l" defTabSz="711200">
+            <a:lnSpc>
+              <a:spcPct val="90000"/>
+            </a:lnSpc>
+            <a:spcBef>
+              <a:spcPct val="0"/>
+            </a:spcBef>
+            <a:spcAft>
+              <a:spcPct val="35000"/>
+            </a:spcAft>
+            <a:buNone/>
+          </a:pPr>
+          <a:r>
+            <a:rPr lang="en-US" sz="1600" kern="1200"/>
+            <a:t>Reproducible Workflow</a:t>
+          </a:r>
+          <a:endParaRPr lang="zh-CN" altLang="en-US" sz="1600" kern="1200" dirty="0"/>
+        </a:p>
+      </dsp:txBody>
+      <dsp:txXfrm>
+        <a:off x="5419558" y="934323"/>
+        <a:ext cx="1432699" cy="1255844"/>
       </dsp:txXfrm>
     </dsp:sp>
   </dsp:spTree>
@@ -5394,55 +5091,8 @@
           </a:pPr>
           <a:r>
             <a:rPr lang="en-US" altLang="zh-CN" sz="1900" kern="1200" dirty="0"/>
-            <a:t>ESPR-based Anchor: </a:t>
+            <a:t>ESPR-based Anchor</a:t>
           </a:r>
-          <a14:m xmlns:a14="http://schemas.microsoft.com/office/drawing/2010/main">
-            <m:oMath xmlns:m="http://schemas.openxmlformats.org/officeDocument/2006/math">
-              <m:r>
-                <a:rPr lang="en-US" altLang="zh-CN" sz="1900" b="0" i="1" kern="1200" smtClean="0">
-                  <a:latin typeface="Cambria Math" panose="02040503050406030204" pitchFamily="18" charset="0"/>
-                </a:rPr>
-                <m:t>𝑦</m:t>
-              </m:r>
-              <m:sSub>
-                <m:sSubPr>
-                  <m:ctrlPr>
-                    <a:rPr lang="en-US" altLang="zh-CN" sz="1900" b="0" i="1" kern="1200" smtClean="0">
-                      <a:latin typeface="Cambria Math" panose="02040503050406030204" pitchFamily="18" charset="0"/>
-                    </a:rPr>
-                  </m:ctrlPr>
-                </m:sSubPr>
-                <m:e>
-                  <m:r>
-                    <a:rPr lang="en-US" altLang="zh-CN" sz="1900" b="0" i="1" kern="1200" smtClean="0">
-                      <a:latin typeface="Cambria Math" panose="02040503050406030204" pitchFamily="18" charset="0"/>
-                    </a:rPr>
-                    <m:t>̂</m:t>
-                  </m:r>
-                </m:e>
-                <m:sub>
-                  <m:r>
-                    <a:rPr lang="en-US" altLang="zh-CN" sz="1900" b="0" i="1" kern="1200" smtClean="0">
-                      <a:latin typeface="Cambria Math" panose="02040503050406030204" pitchFamily="18" charset="0"/>
-                    </a:rPr>
-                    <m:t>𝑔</m:t>
-                  </m:r>
-                  <m:r>
-                    <a:rPr lang="en-US" altLang="zh-CN" sz="1900" b="0" i="1" kern="1200" smtClean="0">
-                      <a:latin typeface="Cambria Math" panose="02040503050406030204" pitchFamily="18" charset="0"/>
-                    </a:rPr>
-                    <m:t>,</m:t>
-                  </m:r>
-                  <m:r>
-                    <a:rPr lang="en-US" altLang="zh-CN" sz="1900" b="0" i="1" kern="1200" smtClean="0">
-                      <a:latin typeface="Cambria Math" panose="02040503050406030204" pitchFamily="18" charset="0"/>
-                    </a:rPr>
-                    <m:t>𝑡</m:t>
-                  </m:r>
-                </m:sub>
-              </m:sSub>
-            </m:oMath>
-          </a14:m>
           <a:endParaRPr lang="en-US" altLang="zh-CN" sz="1900" b="0" kern="1200" dirty="0"/>
         </a:p>
       </dsp:txBody>
@@ -5501,7 +5151,7 @@
         </a:bodyPr>
         <a:lstStyle/>
         <a:p>
-          <a:pPr marL="0" lvl="0" indent="0" algn="ctr" defTabSz="711200">
+          <a:pPr marL="0" lvl="0" indent="0" algn="ctr" defTabSz="666750">
             <a:lnSpc>
               <a:spcPct val="90000"/>
             </a:lnSpc>
@@ -5513,7 +5163,7 @@
             </a:spcAft>
             <a:buNone/>
           </a:pPr>
-          <a:endParaRPr lang="zh-CN" altLang="en-US" sz="1600" kern="1200"/>
+          <a:endParaRPr lang="zh-CN" altLang="en-US" sz="1500" kern="1200"/>
         </a:p>
       </dsp:txBody>
       <dsp:txXfrm>
@@ -5592,67 +5242,8 @@
           </a:pPr>
           <a:r>
             <a:rPr lang="en-US" altLang="zh-CN" sz="1900" kern="1200" dirty="0"/>
-            <a:t>Add Lag Information: </a:t>
+            <a:t>Add Lag Information</a:t>
           </a:r>
-          <a14:m xmlns:a14="http://schemas.microsoft.com/office/drawing/2010/main">
-            <m:oMath xmlns:m="http://schemas.openxmlformats.org/officeDocument/2006/math">
-              <m:r>
-                <a:rPr lang="en-US" altLang="zh-CN" sz="1900" b="0" i="1" kern="1200" smtClean="0">
-                  <a:latin typeface="Cambria Math" panose="02040503050406030204" pitchFamily="18" charset="0"/>
-                </a:rPr>
-                <m:t>𝑦</m:t>
-              </m:r>
-              <m:sSub>
-                <m:sSubPr>
-                  <m:ctrlPr>
-                    <a:rPr lang="en-US" altLang="zh-CN" sz="1900" b="0" i="1" kern="1200" smtClean="0">
-                      <a:latin typeface="Cambria Math" panose="02040503050406030204" pitchFamily="18" charset="0"/>
-                    </a:rPr>
-                  </m:ctrlPr>
-                </m:sSubPr>
-                <m:e>
-                  <m:r>
-                    <a:rPr lang="en-US" altLang="zh-CN" sz="1900" b="0" i="1" kern="1200" smtClean="0">
-                      <a:latin typeface="Cambria Math" panose="02040503050406030204" pitchFamily="18" charset="0"/>
-                    </a:rPr>
-                    <m:t>̂</m:t>
-                  </m:r>
-                </m:e>
-                <m:sub>
-                  <m:r>
-                    <a:rPr lang="en-US" altLang="zh-CN" sz="1900" b="0" i="1" kern="1200" smtClean="0">
-                      <a:latin typeface="Cambria Math" panose="02040503050406030204" pitchFamily="18" charset="0"/>
-                    </a:rPr>
-                    <m:t>𝑔</m:t>
-                  </m:r>
-                  <m:r>
-                    <a:rPr lang="en-US" altLang="zh-CN" sz="1900" b="0" i="1" kern="1200" smtClean="0">
-                      <a:latin typeface="Cambria Math" panose="02040503050406030204" pitchFamily="18" charset="0"/>
-                    </a:rPr>
-                    <m:t>,</m:t>
-                  </m:r>
-                  <m:r>
-                    <a:rPr lang="en-US" altLang="zh-CN" sz="1900" b="0" i="1" kern="1200" smtClean="0">
-                      <a:latin typeface="Cambria Math" panose="02040503050406030204" pitchFamily="18" charset="0"/>
-                    </a:rPr>
-                    <m:t>𝑡</m:t>
-                  </m:r>
-                  <m:r>
-                    <a:rPr lang="en-US" altLang="zh-CN" sz="1900" b="0" i="1" kern="1200" smtClean="0">
-                      <a:latin typeface="Cambria Math" panose="02040503050406030204" pitchFamily="18" charset="0"/>
-                    </a:rPr>
-                    <m:t>−</m:t>
-                  </m:r>
-                  <m:r>
-                    <a:rPr lang="en-US" altLang="zh-CN" sz="1900" b="0" i="1" kern="1200" smtClean="0">
-                      <a:latin typeface="Cambria Math" panose="02040503050406030204" pitchFamily="18" charset="0"/>
-                    </a:rPr>
-                    <m:t>1</m:t>
-                  </m:r>
-                </m:sub>
-              </m:sSub>
-            </m:oMath>
-          </a14:m>
           <a:endParaRPr lang="en-US" altLang="zh-CN" sz="1900" b="0" kern="1200" dirty="0"/>
         </a:p>
       </dsp:txBody>
@@ -5711,7 +5302,7 @@
         </a:bodyPr>
         <a:lstStyle/>
         <a:p>
-          <a:pPr marL="0" lvl="0" indent="0" algn="ctr" defTabSz="711200">
+          <a:pPr marL="0" lvl="0" indent="0" algn="ctr" defTabSz="666750">
             <a:lnSpc>
               <a:spcPct val="90000"/>
             </a:lnSpc>
@@ -5723,7 +5314,7 @@
             </a:spcAft>
             <a:buNone/>
           </a:pPr>
-          <a:endParaRPr lang="zh-CN" altLang="en-US" sz="1600" kern="1200"/>
+          <a:endParaRPr lang="zh-CN" altLang="en-US" sz="1500" kern="1200"/>
         </a:p>
       </dsp:txBody>
       <dsp:txXfrm rot="-5400000">
@@ -5862,7 +5453,7 @@
         </a:bodyPr>
         <a:lstStyle/>
         <a:p>
-          <a:pPr marL="0" lvl="0" indent="0" algn="ctr" defTabSz="711200">
+          <a:pPr marL="0" lvl="0" indent="0" algn="ctr" defTabSz="666750">
             <a:lnSpc>
               <a:spcPct val="90000"/>
             </a:lnSpc>
@@ -5874,7 +5465,7 @@
             </a:spcAft>
             <a:buNone/>
           </a:pPr>
-          <a:endParaRPr lang="zh-CN" altLang="en-US" sz="1600" kern="1200"/>
+          <a:endParaRPr lang="zh-CN" altLang="en-US" sz="1500" kern="1200"/>
         </a:p>
       </dsp:txBody>
       <dsp:txXfrm rot="10800000">
@@ -6830,7 +6421,7 @@
       </dsp:nvSpPr>
       <dsp:spPr>
         <a:xfrm>
-          <a:off x="2548" y="1173218"/>
+          <a:off x="2548" y="1078190"/>
           <a:ext cx="2267813" cy="907125"/>
         </a:xfrm>
         <a:prstGeom prst="chevron">
@@ -6898,7 +6489,7 @@
         </a:p>
       </dsp:txBody>
       <dsp:txXfrm>
-        <a:off x="456111" y="1173218"/>
+        <a:off x="456111" y="1078190"/>
         <a:ext cx="1360688" cy="907125"/>
       </dsp:txXfrm>
     </dsp:sp>
@@ -6909,7 +6500,7 @@
       </dsp:nvSpPr>
       <dsp:spPr>
         <a:xfrm>
-          <a:off x="2043579" y="1173218"/>
+          <a:off x="2043579" y="1078190"/>
           <a:ext cx="2267813" cy="907125"/>
         </a:xfrm>
         <a:prstGeom prst="chevron">
@@ -6977,7 +6568,7 @@
         </a:p>
       </dsp:txBody>
       <dsp:txXfrm>
-        <a:off x="2497142" y="1173218"/>
+        <a:off x="2497142" y="1078190"/>
         <a:ext cx="1360688" cy="907125"/>
       </dsp:txXfrm>
     </dsp:sp>
@@ -6988,7 +6579,7 @@
       </dsp:nvSpPr>
       <dsp:spPr>
         <a:xfrm>
-          <a:off x="4084611" y="1173218"/>
+          <a:off x="4084611" y="1078190"/>
           <a:ext cx="2267813" cy="907125"/>
         </a:xfrm>
         <a:prstGeom prst="chevron">
@@ -7056,7 +6647,7 @@
         </a:p>
       </dsp:txBody>
       <dsp:txXfrm>
-        <a:off x="4538174" y="1173218"/>
+        <a:off x="4538174" y="1078190"/>
         <a:ext cx="1360688" cy="907125"/>
       </dsp:txXfrm>
     </dsp:sp>
@@ -7067,7 +6658,7 @@
       </dsp:nvSpPr>
       <dsp:spPr>
         <a:xfrm>
-          <a:off x="6125643" y="1173218"/>
+          <a:off x="6125643" y="1078190"/>
           <a:ext cx="2267813" cy="907125"/>
         </a:xfrm>
         <a:prstGeom prst="chevron">
@@ -7135,7 +6726,7 @@
         </a:p>
       </dsp:txBody>
       <dsp:txXfrm>
-        <a:off x="6579206" y="1173218"/>
+        <a:off x="6579206" y="1078190"/>
         <a:ext cx="1360688" cy="907125"/>
       </dsp:txXfrm>
     </dsp:sp>
@@ -7146,7 +6737,7 @@
       </dsp:nvSpPr>
       <dsp:spPr>
         <a:xfrm>
-          <a:off x="8166675" y="1173218"/>
+          <a:off x="8166675" y="1078190"/>
           <a:ext cx="2267813" cy="907125"/>
         </a:xfrm>
         <a:prstGeom prst="chevron">
@@ -7214,7 +6805,7 @@
         </a:p>
       </dsp:txBody>
       <dsp:txXfrm>
-        <a:off x="8620238" y="1173218"/>
+        <a:off x="8620238" y="1078190"/>
         <a:ext cx="1360688" cy="907125"/>
       </dsp:txXfrm>
     </dsp:sp>
@@ -7223,15 +6814,31 @@
 </file>
 
 <file path=ppt/diagrams/layout1.xml><?xml version="1.0" encoding="utf-8"?>
-<dgm:layoutDef xmlns:dgm="http://schemas.openxmlformats.org/drawingml/2006/diagram" xmlns:a="http://schemas.openxmlformats.org/drawingml/2006/main" uniqueId="urn:microsoft.com/office/officeart/2005/8/layout/process2">
+<dgm:layoutDef xmlns:dgm="http://schemas.openxmlformats.org/drawingml/2006/diagram" xmlns:a="http://schemas.openxmlformats.org/drawingml/2006/main" uniqueId="urn:microsoft.com/office/officeart/2009/3/layout/StepUpProcess">
   <dgm:title val=""/>
   <dgm:desc val=""/>
   <dgm:catLst>
-    <dgm:cat type="process" pri="13000"/>
+    <dgm:cat type="process" pri="1300"/>
   </dgm:catLst>
-  <dgm:sampData useDef="1">
+  <dgm:sampData>
     <dgm:dataModel>
-      <dgm:ptLst/>
+      <dgm:ptLst>
+        <dgm:pt modelId="0" type="doc"/>
+        <dgm:pt modelId="10">
+          <dgm:prSet phldr="1"/>
+        </dgm:pt>
+        <dgm:pt modelId="20">
+          <dgm:prSet phldr="1"/>
+        </dgm:pt>
+        <dgm:pt modelId="30">
+          <dgm:prSet phldr="1"/>
+        </dgm:pt>
+      </dgm:ptLst>
+      <dgm:cxnLst>
+        <dgm:cxn modelId="60" srcId="0" destId="10" srcOrd="0" destOrd="0"/>
+        <dgm:cxn modelId="70" srcId="0" destId="20" srcOrd="1" destOrd="0"/>
+        <dgm:cxn modelId="80" srcId="0" destId="30" srcOrd="2" destOrd="0"/>
+      </dgm:cxnLst>
       <dgm:bg/>
       <dgm:whole/>
     </dgm:dataModel>
@@ -7240,12 +6847,16 @@
     <dgm:dataModel>
       <dgm:ptLst>
         <dgm:pt modelId="0" type="doc"/>
-        <dgm:pt modelId="1"/>
-        <dgm:pt modelId="2"/>
+        <dgm:pt modelId="10">
+          <dgm:prSet phldr="1"/>
+        </dgm:pt>
+        <dgm:pt modelId="20">
+          <dgm:prSet phldr="1"/>
+        </dgm:pt>
       </dgm:ptLst>
       <dgm:cxnLst>
-        <dgm:cxn modelId="3" srcId="0" destId="1" srcOrd="0" destOrd="0"/>
-        <dgm:cxn modelId="4" srcId="0" destId="2" srcOrd="1" destOrd="0"/>
+        <dgm:cxn modelId="60" srcId="0" destId="10" srcOrd="0" destOrd="0"/>
+        <dgm:cxn modelId="70" srcId="0" destId="20" srcOrd="1" destOrd="0"/>
       </dgm:cxnLst>
       <dgm:bg/>
       <dgm:whole/>
@@ -7255,114 +6866,197 @@
     <dgm:dataModel>
       <dgm:ptLst>
         <dgm:pt modelId="0" type="doc"/>
-        <dgm:pt modelId="1"/>
-        <dgm:pt modelId="2"/>
-        <dgm:pt modelId="3"/>
-        <dgm:pt modelId="4"/>
+        <dgm:pt modelId="10">
+          <dgm:prSet phldr="1"/>
+        </dgm:pt>
+        <dgm:pt modelId="20">
+          <dgm:prSet phldr="1"/>
+        </dgm:pt>
+        <dgm:pt modelId="30">
+          <dgm:prSet phldr="1"/>
+        </dgm:pt>
+        <dgm:pt modelId="40">
+          <dgm:prSet phldr="1"/>
+        </dgm:pt>
       </dgm:ptLst>
       <dgm:cxnLst>
-        <dgm:cxn modelId="5" srcId="0" destId="1" srcOrd="0" destOrd="0"/>
-        <dgm:cxn modelId="6" srcId="0" destId="2" srcOrd="1" destOrd="0"/>
-        <dgm:cxn modelId="7" srcId="0" destId="3" srcOrd="2" destOrd="0"/>
-        <dgm:cxn modelId="8" srcId="0" destId="4" srcOrd="3" destOrd="0"/>
+        <dgm:cxn modelId="60" srcId="0" destId="10" srcOrd="0" destOrd="0"/>
+        <dgm:cxn modelId="70" srcId="0" destId="20" srcOrd="1" destOrd="0"/>
+        <dgm:cxn modelId="80" srcId="0" destId="30" srcOrd="2" destOrd="0"/>
+        <dgm:cxn modelId="90" srcId="0" destId="40" srcOrd="3" destOrd="0"/>
       </dgm:cxnLst>
       <dgm:bg/>
       <dgm:whole/>
     </dgm:dataModel>
   </dgm:clrData>
-  <dgm:layoutNode name="linearFlow">
+  <dgm:layoutNode name="rootnode">
     <dgm:varLst>
-      <dgm:resizeHandles val="exact"/>
+      <dgm:chMax/>
+      <dgm:chPref/>
+      <dgm:dir/>
+      <dgm:animLvl val="lvl"/>
     </dgm:varLst>
-    <dgm:alg type="lin">
-      <dgm:param type="linDir" val="fromT"/>
-    </dgm:alg>
+    <dgm:choose name="Name0">
+      <dgm:if name="Name1" func="var" arg="dir" op="equ" val="norm">
+        <dgm:alg type="snake">
+          <dgm:param type="grDir" val="bL"/>
+          <dgm:param type="flowDir" val="row"/>
+          <dgm:param type="off" val="off"/>
+          <dgm:param type="bkpt" val="fixed"/>
+          <dgm:param type="bkPtFixedVal" val="1"/>
+        </dgm:alg>
+      </dgm:if>
+      <dgm:else name="Name2">
+        <dgm:alg type="snake">
+          <dgm:param type="grDir" val="bR"/>
+          <dgm:param type="flowDir" val="row"/>
+          <dgm:param type="off" val="off"/>
+          <dgm:param type="bkpt" val="fixed"/>
+          <dgm:param type="bkPtFixedVal" val="1"/>
+        </dgm:alg>
+      </dgm:else>
+    </dgm:choose>
     <dgm:shape xmlns:r="http://schemas.openxmlformats.org/officeDocument/2006/relationships" r:blip="">
       <dgm:adjLst/>
     </dgm:shape>
-    <dgm:presOf/>
     <dgm:constrLst>
-      <dgm:constr type="h" for="ch" ptType="node" refType="h"/>
-      <dgm:constr type="h" for="ch" ptType="sibTrans" refType="h" refFor="ch" refPtType="node" fact="0.5"/>
-      <dgm:constr type="w" for="ch" ptType="node" op="equ"/>
-      <dgm:constr type="primFontSz" for="ch" ptType="node" op="equ" val="65"/>
-      <dgm:constr type="primFontSz" for="des" forName="connectorText" op="equ" val="55"/>
-      <dgm:constr type="primFontSz" for="des" forName="connectorText" refType="primFontSz" refFor="ch" refPtType="node" op="lte" fact="0.8"/>
+      <dgm:constr type="alignOff" forName="rootnode" val="1"/>
+      <dgm:constr type="primFontSz" for="des" ptType="node" op="equ" val="65"/>
+      <dgm:constr type="w" for="ch" forName="composite" refType="w"/>
+      <dgm:constr type="h" for="ch" forName="composite" refType="h"/>
+      <dgm:constr type="sp" refType="h" refFor="ch" refForName="composite" op="equ" fact="-0.765"/>
+      <dgm:constr type="w" for="ch" forName="sibTrans" refType="w" fact="0.103"/>
+      <dgm:constr type="h" for="ch" forName="sibTrans" refType="h" fact="0.103"/>
     </dgm:constrLst>
-    <dgm:ruleLst/>
     <dgm:forEach name="nodesForEach" axis="ch" ptType="node">
-      <dgm:layoutNode name="node">
-        <dgm:varLst>
-          <dgm:bulletEnabled val="1"/>
-        </dgm:varLst>
-        <dgm:choose name="Name0">
-          <dgm:if name="Name1" axis="root des" ptType="all node" func="maxDepth" op="gt" val="1">
-            <dgm:alg type="tx">
-              <dgm:param type="parTxLTRAlign" val="l"/>
-              <dgm:param type="parTxRTLAlign" val="r"/>
-              <dgm:param type="txAnchorVertCh" val="mid"/>
-            </dgm:alg>
+      <dgm:layoutNode name="composite">
+        <dgm:alg type="composite">
+          <dgm:param type="ar" val="0.861"/>
+        </dgm:alg>
+        <dgm:shape xmlns:r="http://schemas.openxmlformats.org/officeDocument/2006/relationships" r:blip="">
+          <dgm:adjLst/>
+        </dgm:shape>
+        <dgm:choose name="Name3">
+          <dgm:if name="Name4" func="var" arg="dir" op="equ" val="norm">
+            <dgm:constrLst>
+              <dgm:constr type="l" for="ch" forName="LShape" refType="w" fact="0"/>
+              <dgm:constr type="t" for="ch" forName="LShape" refType="h" fact="0.2347"/>
+              <dgm:constr type="w" for="ch" forName="LShape" refType="w" fact="0.998"/>
+              <dgm:constr type="h" for="ch" forName="LShape" refType="h" fact="0.5164"/>
+              <dgm:constr type="r" for="ch" forName="ParentText" refType="w"/>
+              <dgm:constr type="t" for="ch" forName="ParentText" refType="h" fact="0.32"/>
+              <dgm:constr type="w" for="ch" forName="ParentText" refType="w" fact="0.901"/>
+              <dgm:constr type="h" for="ch" forName="ParentText" refType="h" fact="0.68"/>
+              <dgm:constr type="l" for="ch" forName="Triangle" refType="w" fact="0.83"/>
+              <dgm:constr type="t" for="ch" forName="Triangle" refType="h" fact="0"/>
+              <dgm:constr type="w" for="ch" forName="Triangle" refType="w" fact="0.17"/>
+              <dgm:constr type="h" for="ch" forName="Triangle" refType="w" refFor="ch" refForName="Triangle"/>
+            </dgm:constrLst>
           </dgm:if>
-          <dgm:else name="Name2">
-            <dgm:alg type="tx"/>
+          <dgm:else name="Name5">
+            <dgm:constrLst>
+              <dgm:constr type="l" for="ch" forName="LShape" refType="w" fact="0.002"/>
+              <dgm:constr type="t" for="ch" forName="LShape" refType="h" fact="0.2347"/>
+              <dgm:constr type="w" for="ch" forName="LShape" refType="w"/>
+              <dgm:constr type="h" for="ch" forName="LShape" refType="h" fact="0.5164"/>
+              <dgm:constr type="l" for="ch" forName="ParentText" refType="w" fact="0"/>
+              <dgm:constr type="t" for="ch" forName="ParentText" refType="h" fact="0.32"/>
+              <dgm:constr type="w" for="ch" forName="ParentText" refType="w" fact="0.902"/>
+              <dgm:constr type="h" for="ch" forName="ParentText" refType="h" fact="0.68"/>
+              <dgm:constr type="l" for="ch" forName="Triangle" refType="w" fact="0"/>
+              <dgm:constr type="t" for="ch" forName="Triangle" refType="h" fact="0"/>
+              <dgm:constr type="w" for="ch" forName="Triangle" refType="w" fact="0.17"/>
+              <dgm:constr type="h" for="ch" forName="Triangle" refType="w" refFor="ch" refForName="Triangle"/>
+            </dgm:constrLst>
           </dgm:else>
         </dgm:choose>
-        <dgm:shape xmlns:r="http://schemas.openxmlformats.org/officeDocument/2006/relationships" type="roundRect" r:blip="">
-          <dgm:adjLst>
-            <dgm:adj idx="1" val="0.1"/>
-          </dgm:adjLst>
-        </dgm:shape>
-        <dgm:presOf axis="desOrSelf" ptType="node"/>
-        <dgm:constrLst>
-          <dgm:constr type="w" refType="h" fact="1.8"/>
-          <dgm:constr type="tMarg" refType="primFontSz" fact="0.3"/>
-          <dgm:constr type="bMarg" refType="primFontSz" fact="0.3"/>
-          <dgm:constr type="lMarg" refType="primFontSz" fact="0.3"/>
-          <dgm:constr type="rMarg" refType="primFontSz" fact="0.3"/>
-        </dgm:constrLst>
-        <dgm:ruleLst>
-          <dgm:rule type="primFontSz" val="18" fact="NaN" max="NaN"/>
-          <dgm:rule type="w" val="NaN" fact="4" max="NaN"/>
-          <dgm:rule type="primFontSz" val="5" fact="NaN" max="NaN"/>
-        </dgm:ruleLst>
+        <dgm:layoutNode name="LShape" styleLbl="alignNode1">
+          <dgm:alg type="sp"/>
+          <dgm:choose name="Name6">
+            <dgm:if name="Name7" func="var" arg="dir" op="equ" val="norm">
+              <dgm:shape xmlns:r="http://schemas.openxmlformats.org/officeDocument/2006/relationships" rot="90" type="corner" r:blip="">
+                <dgm:adjLst>
+                  <dgm:adj idx="1" val="0.1612"/>
+                  <dgm:adj idx="2" val="0.1611"/>
+                </dgm:adjLst>
+              </dgm:shape>
+            </dgm:if>
+            <dgm:else name="Name8">
+              <dgm:shape xmlns:r="http://schemas.openxmlformats.org/officeDocument/2006/relationships" rot="180" type="corner" r:blip="">
+                <dgm:adjLst>
+                  <dgm:adj idx="1" val="0.1612"/>
+                  <dgm:adj idx="2" val="0.1611"/>
+                </dgm:adjLst>
+              </dgm:shape>
+            </dgm:else>
+          </dgm:choose>
+          <dgm:presOf/>
+        </dgm:layoutNode>
+        <dgm:layoutNode name="ParentText" styleLbl="revTx">
+          <dgm:varLst>
+            <dgm:chMax val="0"/>
+            <dgm:chPref val="0"/>
+            <dgm:bulletEnabled val="1"/>
+          </dgm:varLst>
+          <dgm:alg type="tx">
+            <dgm:param type="parTxLTRAlign" val="l"/>
+            <dgm:param type="txAnchorVert" val="t"/>
+          </dgm:alg>
+          <dgm:shape xmlns:r="http://schemas.openxmlformats.org/officeDocument/2006/relationships" type="rect" r:blip="">
+            <dgm:adjLst/>
+          </dgm:shape>
+          <dgm:presOf axis="desOrSelf" ptType="node"/>
+          <dgm:constrLst>
+            <dgm:constr type="lMarg" refType="primFontSz" fact="0.3"/>
+            <dgm:constr type="rMarg" refType="primFontSz" fact="0.3"/>
+            <dgm:constr type="tMarg" refType="primFontSz" fact="0.3"/>
+            <dgm:constr type="bMarg" refType="primFontSz" fact="0.3"/>
+          </dgm:constrLst>
+          <dgm:ruleLst>
+            <dgm:rule type="primFontSz" val="5" fact="NaN" max="NaN"/>
+          </dgm:ruleLst>
+        </dgm:layoutNode>
+        <dgm:choose name="Name9">
+          <dgm:if name="Name10" axis="followSib" ptType="node" func="cnt" op="gte" val="1">
+            <dgm:layoutNode name="Triangle" styleLbl="alignNode1">
+              <dgm:alg type="sp"/>
+              <dgm:choose name="Name11">
+                <dgm:if name="Name12" func="var" arg="dir" op="equ" val="norm">
+                  <dgm:shape xmlns:r="http://schemas.openxmlformats.org/officeDocument/2006/relationships" type="triangle" r:blip="">
+                    <dgm:adjLst>
+                      <dgm:adj idx="1" val="1"/>
+                    </dgm:adjLst>
+                  </dgm:shape>
+                </dgm:if>
+                <dgm:else name="Name13">
+                  <dgm:shape xmlns:r="http://schemas.openxmlformats.org/officeDocument/2006/relationships" rot="90" type="triangle" r:blip="">
+                    <dgm:adjLst>
+                      <dgm:adj idx="1" val="1"/>
+                    </dgm:adjLst>
+                  </dgm:shape>
+                </dgm:else>
+              </dgm:choose>
+              <dgm:presOf/>
+            </dgm:layoutNode>
+          </dgm:if>
+          <dgm:else name="Name14"/>
+        </dgm:choose>
       </dgm:layoutNode>
       <dgm:forEach name="sibTransForEach" axis="followSib" ptType="sibTrans" cnt="1">
         <dgm:layoutNode name="sibTrans">
-          <dgm:alg type="conn">
-            <dgm:param type="begPts" val="auto"/>
-            <dgm:param type="endPts" val="auto"/>
+          <dgm:alg type="composite">
+            <dgm:param type="ar" val="0.861"/>
           </dgm:alg>
-          <dgm:shape xmlns:r="http://schemas.openxmlformats.org/officeDocument/2006/relationships" type="conn" r:blip="">
-            <dgm:adjLst/>
-          </dgm:shape>
-          <dgm:presOf axis="self"/>
           <dgm:constrLst>
-            <dgm:constr type="w" refType="h" fact="0.9"/>
-            <dgm:constr type="connDist"/>
-            <dgm:constr type="wArH" refType="w" fact="0.5"/>
-            <dgm:constr type="hArH" refType="w"/>
-            <dgm:constr type="stemThick" refType="w" fact="0.6"/>
-            <dgm:constr type="begPad" refType="connDist" fact="0.125"/>
-            <dgm:constr type="endPad" refType="connDist" fact="0.125"/>
+            <dgm:constr type="w" for="ch" forName="space" refType="w"/>
+            <dgm:constr type="h" for="ch" forName="space" refType="w"/>
           </dgm:constrLst>
-          <dgm:ruleLst/>
-          <dgm:layoutNode name="connectorText">
-            <dgm:alg type="tx">
-              <dgm:param type="autoTxRot" val="upr"/>
-            </dgm:alg>
-            <dgm:shape xmlns:r="http://schemas.openxmlformats.org/officeDocument/2006/relationships" type="conn" r:blip="" hideGeom="1">
+          <dgm:layoutNode name="space" styleLbl="alignNode1">
+            <dgm:alg type="sp"/>
+            <dgm:shape xmlns:r="http://schemas.openxmlformats.org/officeDocument/2006/relationships" r:blip="">
               <dgm:adjLst/>
             </dgm:shape>
-            <dgm:presOf axis="self"/>
-            <dgm:constrLst>
-              <dgm:constr type="lMarg"/>
-              <dgm:constr type="rMarg"/>
-              <dgm:constr type="tMarg"/>
-              <dgm:constr type="bMarg"/>
-            </dgm:constrLst>
-            <dgm:ruleLst>
-              <dgm:rule type="primFontSz" val="5" fact="NaN" max="NaN"/>
-            </dgm:ruleLst>
+            <dgm:presOf/>
           </dgm:layoutNode>
         </dgm:layoutNode>
       </dgm:forEach>
@@ -13169,6 +12863,53 @@
           </a:p>
         </p:txBody>
       </p:sp>
+      <p:pic>
+        <p:nvPicPr>
+          <p:cNvPr id="2052" name="Picture 4">
+            <a:extLst>
+              <a:ext uri="{FF2B5EF4-FFF2-40B4-BE49-F238E27FC236}">
+                <a16:creationId xmlns:a16="http://schemas.microsoft.com/office/drawing/2014/main" id="{5AB1B7E7-319C-746F-E54F-A9718352BD1C}"/>
+              </a:ext>
+            </a:extLst>
+          </p:cNvPr>
+          <p:cNvPicPr>
+            <a:picLocks noChangeAspect="1" noChangeArrowheads="1"/>
+          </p:cNvPicPr>
+          <p:nvPr userDrawn="1"/>
+        </p:nvPicPr>
+        <p:blipFill>
+          <a:blip r:embed="rId2">
+            <a:extLst>
+              <a:ext uri="{28A0092B-C50C-407E-A947-70E740481C1C}">
+                <a14:useLocalDpi xmlns:a14="http://schemas.microsoft.com/office/drawing/2010/main" val="0"/>
+              </a:ext>
+            </a:extLst>
+          </a:blip>
+          <a:srcRect/>
+          <a:stretch>
+            <a:fillRect/>
+          </a:stretch>
+        </p:blipFill>
+        <p:spPr bwMode="auto">
+          <a:xfrm>
+            <a:off x="9169330" y="5648434"/>
+            <a:ext cx="2919642" cy="1209566"/>
+          </a:xfrm>
+          <a:prstGeom prst="rect">
+            <a:avLst/>
+          </a:prstGeom>
+          <a:noFill/>
+          <a:extLst>
+            <a:ext uri="{909E8E84-426E-40DD-AFC4-6F175D3DCCD1}">
+              <a14:hiddenFill xmlns:a14="http://schemas.microsoft.com/office/drawing/2010/main">
+                <a:solidFill>
+                  <a:srgbClr val="FFFFFF"/>
+                </a:solidFill>
+              </a14:hiddenFill>
+            </a:ext>
+          </a:extLst>
+        </p:spPr>
+      </p:pic>
     </p:spTree>
   </p:cSld>
   <p:clrMapOvr>
@@ -14248,6 +13989,53 @@
           </a:p>
         </p:txBody>
       </p:sp>
+      <p:pic>
+        <p:nvPicPr>
+          <p:cNvPr id="7" name="Picture 4">
+            <a:extLst>
+              <a:ext uri="{FF2B5EF4-FFF2-40B4-BE49-F238E27FC236}">
+                <a16:creationId xmlns:a16="http://schemas.microsoft.com/office/drawing/2014/main" id="{22EBFD23-57FD-184D-C2C1-C000FE9F8B95}"/>
+              </a:ext>
+            </a:extLst>
+          </p:cNvPr>
+          <p:cNvPicPr>
+            <a:picLocks noChangeAspect="1" noChangeArrowheads="1"/>
+          </p:cNvPicPr>
+          <p:nvPr userDrawn="1"/>
+        </p:nvPicPr>
+        <p:blipFill>
+          <a:blip r:embed="rId2">
+            <a:extLst>
+              <a:ext uri="{28A0092B-C50C-407E-A947-70E740481C1C}">
+                <a14:useLocalDpi xmlns:a14="http://schemas.microsoft.com/office/drawing/2010/main" val="0"/>
+              </a:ext>
+            </a:extLst>
+          </a:blip>
+          <a:srcRect/>
+          <a:stretch>
+            <a:fillRect/>
+          </a:stretch>
+        </p:blipFill>
+        <p:spPr bwMode="auto">
+          <a:xfrm>
+            <a:off x="9285610" y="5696606"/>
+            <a:ext cx="2803362" cy="1161393"/>
+          </a:xfrm>
+          <a:prstGeom prst="rect">
+            <a:avLst/>
+          </a:prstGeom>
+          <a:noFill/>
+          <a:extLst>
+            <a:ext uri="{909E8E84-426E-40DD-AFC4-6F175D3DCCD1}">
+              <a14:hiddenFill xmlns:a14="http://schemas.microsoft.com/office/drawing/2010/main">
+                <a:solidFill>
+                  <a:srgbClr val="FFFFFF"/>
+                </a:solidFill>
+              </a14:hiddenFill>
+            </a:ext>
+          </a:extLst>
+        </p:spPr>
+      </p:pic>
     </p:spTree>
   </p:cSld>
   <p:clrMapOvr>
@@ -15615,6 +15403,53 @@
           </a:p>
         </p:txBody>
       </p:sp>
+      <p:pic>
+        <p:nvPicPr>
+          <p:cNvPr id="6" name="Picture 4">
+            <a:extLst>
+              <a:ext uri="{FF2B5EF4-FFF2-40B4-BE49-F238E27FC236}">
+                <a16:creationId xmlns:a16="http://schemas.microsoft.com/office/drawing/2014/main" id="{42F60154-D0BF-95B6-1586-E372179402C4}"/>
+              </a:ext>
+            </a:extLst>
+          </p:cNvPr>
+          <p:cNvPicPr>
+            <a:picLocks noChangeAspect="1" noChangeArrowheads="1"/>
+          </p:cNvPicPr>
+          <p:nvPr userDrawn="1"/>
+        </p:nvPicPr>
+        <p:blipFill>
+          <a:blip r:embed="rId2">
+            <a:extLst>
+              <a:ext uri="{28A0092B-C50C-407E-A947-70E740481C1C}">
+                <a14:useLocalDpi xmlns:a14="http://schemas.microsoft.com/office/drawing/2010/main" val="0"/>
+              </a:ext>
+            </a:extLst>
+          </a:blip>
+          <a:srcRect/>
+          <a:stretch>
+            <a:fillRect/>
+          </a:stretch>
+        </p:blipFill>
+        <p:spPr bwMode="auto">
+          <a:xfrm>
+            <a:off x="9526622" y="5796454"/>
+            <a:ext cx="2562350" cy="1061545"/>
+          </a:xfrm>
+          <a:prstGeom prst="rect">
+            <a:avLst/>
+          </a:prstGeom>
+          <a:noFill/>
+          <a:extLst>
+            <a:ext uri="{909E8E84-426E-40DD-AFC4-6F175D3DCCD1}">
+              <a14:hiddenFill xmlns:a14="http://schemas.microsoft.com/office/drawing/2010/main">
+                <a:solidFill>
+                  <a:srgbClr val="FFFFFF"/>
+                </a:solidFill>
+              </a14:hiddenFill>
+            </a:ext>
+          </a:extLst>
+        </p:spPr>
+      </p:pic>
     </p:spTree>
   </p:cSld>
   <p:clrMapOvr>
@@ -17961,6 +17796,53 @@
           </a:p>
         </p:txBody>
       </p:sp>
+      <p:pic>
+        <p:nvPicPr>
+          <p:cNvPr id="5" name="Picture 4">
+            <a:extLst>
+              <a:ext uri="{FF2B5EF4-FFF2-40B4-BE49-F238E27FC236}">
+                <a16:creationId xmlns:a16="http://schemas.microsoft.com/office/drawing/2014/main" id="{5FFC1B66-4ED8-4E44-BB73-6EEF6C7DD877}"/>
+              </a:ext>
+            </a:extLst>
+          </p:cNvPr>
+          <p:cNvPicPr>
+            <a:picLocks noChangeAspect="1" noChangeArrowheads="1"/>
+          </p:cNvPicPr>
+          <p:nvPr/>
+        </p:nvPicPr>
+        <p:blipFill>
+          <a:blip r:embed="rId2">
+            <a:extLst>
+              <a:ext uri="{28A0092B-C50C-407E-A947-70E740481C1C}">
+                <a14:useLocalDpi xmlns:a14="http://schemas.microsoft.com/office/drawing/2010/main" val="0"/>
+              </a:ext>
+            </a:extLst>
+          </a:blip>
+          <a:srcRect/>
+          <a:stretch>
+            <a:fillRect/>
+          </a:stretch>
+        </p:blipFill>
+        <p:spPr bwMode="auto">
+          <a:xfrm>
+            <a:off x="9353262" y="5748282"/>
+            <a:ext cx="2919642" cy="1209566"/>
+          </a:xfrm>
+          <a:prstGeom prst="rect">
+            <a:avLst/>
+          </a:prstGeom>
+          <a:noFill/>
+          <a:extLst>
+            <a:ext uri="{909E8E84-426E-40DD-AFC4-6F175D3DCCD1}">
+              <a14:hiddenFill xmlns:a14="http://schemas.microsoft.com/office/drawing/2010/main">
+                <a:solidFill>
+                  <a:srgbClr val="FFFFFF"/>
+                </a:solidFill>
+              </a14:hiddenFill>
+            </a:ext>
+          </a:extLst>
+        </p:spPr>
+      </p:pic>
     </p:spTree>
   </p:cSld>
   <p:clrMapOvr>
@@ -18030,7 +17912,7 @@
         <p:spPr>
           <a:xfrm>
             <a:off x="812799" y="1147483"/>
-            <a:ext cx="9263530" cy="4108817"/>
+            <a:ext cx="9263530" cy="3780522"/>
           </a:xfrm>
           <a:prstGeom prst="rect">
             <a:avLst/>
@@ -18060,7 +17942,7 @@
             </a:r>
             <a:r>
               <a:rPr lang="en-US" altLang="zh-CN" dirty="0"/>
-              <a:t> 55 (9): 2579–89. </a:t>
+              <a:t> 55 (9): 2579–89. </a:t>
             </a:r>
             <a:r>
               <a:rPr lang="en-US" altLang="zh-CN" dirty="0">
@@ -18070,8 +17952,13 @@
             </a:r>
             <a:r>
               <a:rPr lang="en-US" altLang="zh-CN" dirty="0"/>
-              <a:t>.</a:t>
+              <a:t>. </a:t>
             </a:r>
+            <a:r>
+              <a:rPr lang="zh-CN" altLang="en-US" dirty="0"/>
+              <a:t> </a:t>
+            </a:r>
+            <a:endParaRPr lang="en-US" altLang="zh-CN" dirty="0"/>
           </a:p>
           <a:p>
             <a:pPr marL="285750" indent="285750" algn="just">
@@ -18116,10 +18003,8 @@
             </a:r>
             <a:r>
               <a:rPr lang="en-US" altLang="zh-CN" dirty="0"/>
-              <a:t>. </a:t>
+              <a:t>.</a:t>
             </a:r>
-          </a:p>
-          <a:p>
             <a:endParaRPr lang="zh-CN" altLang="en-US" dirty="0"/>
           </a:p>
         </p:txBody>
@@ -18166,12 +18051,14 @@
         </p:nvSpPr>
         <p:spPr>
           <a:xfrm>
-            <a:off x="2188491" y="1862265"/>
-            <a:ext cx="2836562" cy="915667"/>
+            <a:off x="3732903" y="2933716"/>
+            <a:ext cx="1763799" cy="915667"/>
           </a:xfrm>
         </p:spPr>
         <p:txBody>
-          <a:bodyPr/>
+          <a:bodyPr>
+            <a:normAutofit/>
+          </a:bodyPr>
           <a:lstStyle/>
           <a:p>
             <a:r>
@@ -18194,13 +18081,13 @@
           <p:nvPr>
             <p:extLst>
               <p:ext uri="{D42A27DB-BD31-4B8C-83A1-F6EECF244321}">
-                <p14:modId xmlns:p14="http://schemas.microsoft.com/office/powerpoint/2010/main" val="189826804"/>
+                <p14:modId xmlns:p14="http://schemas.microsoft.com/office/powerpoint/2010/main" val="717150938"/>
               </p:ext>
             </p:extLst>
           </p:nvPr>
         </p:nvGraphicFramePr>
         <p:xfrm>
-          <a:off x="3606772" y="1430080"/>
+          <a:off x="4078422" y="3100016"/>
           <a:ext cx="6852683" cy="4268972"/>
         </p:xfrm>
         <a:graphic>
@@ -18209,6 +18096,145 @@
           </a:graphicData>
         </a:graphic>
       </p:graphicFrame>
+      <p:sp>
+        <p:nvSpPr>
+          <p:cNvPr id="7" name="Title 1">
+            <a:extLst>
+              <a:ext uri="{FF2B5EF4-FFF2-40B4-BE49-F238E27FC236}">
+                <a16:creationId xmlns:a16="http://schemas.microsoft.com/office/drawing/2014/main" id="{07983205-D12C-5877-206F-89941A19C37B}"/>
+              </a:ext>
+            </a:extLst>
+          </p:cNvPr>
+          <p:cNvSpPr txBox="1">
+            <a:spLocks/>
+          </p:cNvSpPr>
+          <p:nvPr/>
+        </p:nvSpPr>
+        <p:spPr>
+          <a:xfrm>
+            <a:off x="3732903" y="596152"/>
+            <a:ext cx="1157784" cy="753933"/>
+          </a:xfrm>
+          <a:prstGeom prst="rect">
+            <a:avLst/>
+          </a:prstGeom>
+        </p:spPr>
+        <p:txBody>
+          <a:bodyPr vert="horz" lIns="91440" tIns="45720" rIns="91440" bIns="45720" rtlCol="0" anchor="t">
+            <a:normAutofit/>
+          </a:bodyPr>
+          <a:lstStyle>
+            <a:lvl1pPr algn="r" defTabSz="914400" rtl="0" eaLnBrk="1" latinLnBrk="0" hangingPunct="1">
+              <a:lnSpc>
+                <a:spcPct val="100000"/>
+              </a:lnSpc>
+              <a:spcBef>
+                <a:spcPct val="0"/>
+              </a:spcBef>
+              <a:buNone/>
+              <a:defRPr sz="3200" b="1" kern="1200">
+                <a:solidFill>
+                  <a:schemeClr val="accent1"/>
+                </a:solidFill>
+                <a:latin typeface="+mj-lt"/>
+                <a:ea typeface="+mj-ea"/>
+                <a:cs typeface="+mj-cs"/>
+              </a:defRPr>
+            </a:lvl1pPr>
+          </a:lstStyle>
+          <a:p>
+            <a:r>
+              <a:rPr lang="en-US" dirty="0"/>
+              <a:t>Task</a:t>
+            </a:r>
+          </a:p>
+        </p:txBody>
+      </p:sp>
+      <p:sp>
+        <p:nvSpPr>
+          <p:cNvPr id="8" name="TextBox 7">
+            <a:extLst>
+              <a:ext uri="{FF2B5EF4-FFF2-40B4-BE49-F238E27FC236}">
+                <a16:creationId xmlns:a16="http://schemas.microsoft.com/office/drawing/2014/main" id="{C59A5890-9595-3232-F891-752084436B72}"/>
+              </a:ext>
+            </a:extLst>
+          </p:cNvPr>
+          <p:cNvSpPr txBox="1"/>
+          <p:nvPr/>
+        </p:nvSpPr>
+        <p:spPr>
+          <a:xfrm>
+            <a:off x="3867374" y="1350085"/>
+            <a:ext cx="7401261" cy="1287532"/>
+          </a:xfrm>
+          <a:prstGeom prst="rect">
+            <a:avLst/>
+          </a:prstGeom>
+          <a:noFill/>
+        </p:spPr>
+        <p:txBody>
+          <a:bodyPr wrap="square" rtlCol="0">
+            <a:spAutoFit/>
+          </a:bodyPr>
+          <a:lstStyle/>
+          <a:p>
+            <a:pPr>
+              <a:lnSpc>
+                <a:spcPct val="150000"/>
+              </a:lnSpc>
+            </a:pPr>
+            <a:r>
+              <a:rPr lang="en-US" altLang="zh-CN" dirty="0"/>
+              <a:t>Provide a holistic Jan--Oct 2025 view of monthly accruals by delivering actual and estimated revenue and RPS across key dimensions using complete stream data to bridge revenue reporting delays.</a:t>
+            </a:r>
+            <a:endParaRPr lang="zh-CN" altLang="en-US" dirty="0"/>
+          </a:p>
+        </p:txBody>
+      </p:sp>
+      <p:sp>
+        <p:nvSpPr>
+          <p:cNvPr id="3" name="TextBox 2">
+            <a:extLst>
+              <a:ext uri="{FF2B5EF4-FFF2-40B4-BE49-F238E27FC236}">
+                <a16:creationId xmlns:a16="http://schemas.microsoft.com/office/drawing/2014/main" id="{DE85260E-C1ED-2818-BCC4-F69633ECCBD8}"/>
+              </a:ext>
+            </a:extLst>
+          </p:cNvPr>
+          <p:cNvSpPr txBox="1"/>
+          <p:nvPr/>
+        </p:nvSpPr>
+        <p:spPr>
+          <a:xfrm>
+            <a:off x="3033657" y="6422316"/>
+            <a:ext cx="6502998" cy="369332"/>
+          </a:xfrm>
+          <a:prstGeom prst="rect">
+            <a:avLst/>
+          </a:prstGeom>
+          <a:noFill/>
+        </p:spPr>
+        <p:txBody>
+          <a:bodyPr wrap="square" rtlCol="0">
+            <a:spAutoFit/>
+          </a:bodyPr>
+          <a:lstStyle/>
+          <a:p>
+            <a:r>
+              <a:rPr lang="en-US" altLang="zh-CN" dirty="0"/>
+              <a:t>* Implementation and exploration details in </a:t>
+            </a:r>
+            <a:r>
+              <a:rPr lang="en-US" altLang="zh-CN" dirty="0" err="1"/>
+              <a:t>Jupyter</a:t>
+            </a:r>
+            <a:r>
+              <a:rPr lang="en-US" altLang="zh-CN" dirty="0"/>
+              <a:t> notebooks.</a:t>
+            </a:r>
+            <a:endParaRPr lang="zh-CN" altLang="en-US" dirty="0"/>
+          </a:p>
+        </p:txBody>
+      </p:sp>
     </p:spTree>
   </p:cSld>
   <p:clrMapOvr>
@@ -18421,7 +18447,7 @@
             </a:r>
             <a:r>
               <a:rPr lang="en-US" altLang="zh-CN" dirty="0"/>
-              <a:t>: Jan, 2025 – Oct, 2025</a:t>
+              <a:t>: Jan, 2025 -- Oct, 2025</a:t>
             </a:r>
           </a:p>
           <a:p>
@@ -18672,38 +18698,8 @@
           </a:p>
         </p:txBody>
       </p:sp>
-      <p:pic>
-        <p:nvPicPr>
-          <p:cNvPr id="4" name="Picture 3" descr="A group of graphs with numbers and text&#10;&#10;AI-generated content may be incorrect.">
-            <a:extLst>
-              <a:ext uri="{FF2B5EF4-FFF2-40B4-BE49-F238E27FC236}">
-                <a16:creationId xmlns:a16="http://schemas.microsoft.com/office/drawing/2014/main" id="{17C3BB5B-B46F-18C3-6C77-1EF4E3A36414}"/>
-              </a:ext>
-            </a:extLst>
-          </p:cNvPr>
-          <p:cNvPicPr>
-            <a:picLocks noChangeAspect="1"/>
-          </p:cNvPicPr>
-          <p:nvPr/>
-        </p:nvPicPr>
-        <p:blipFill>
-          <a:blip r:embed="rId2"/>
-          <a:stretch>
-            <a:fillRect/>
-          </a:stretch>
-        </p:blipFill>
-        <p:spPr>
-          <a:xfrm>
-            <a:off x="6890653" y="1301027"/>
-            <a:ext cx="4506431" cy="3599676"/>
-          </a:xfrm>
-          <a:prstGeom prst="rect">
-            <a:avLst/>
-          </a:prstGeom>
-        </p:spPr>
-      </p:pic>
-      <mc:AlternateContent xmlns:mc="http://schemas.openxmlformats.org/markup-compatibility/2006">
-        <mc:Choice xmlns:a14="http://schemas.microsoft.com/office/drawing/2010/main" Requires="a14">
+      <mc:AlternateContent xmlns:mc="http://schemas.openxmlformats.org/markup-compatibility/2006" xmlns:a14="http://schemas.microsoft.com/office/drawing/2010/main">
+        <mc:Choice Requires="a14">
           <p:sp>
             <p:nvSpPr>
               <p:cNvPr id="6" name="TextBox 5">
@@ -18817,49 +18813,19 @@
                       <a:rPr lang="en-US" altLang="zh-CN" b="0" i="1" smtClean="0">
                         <a:latin typeface="Cambria Math" panose="02040503050406030204" pitchFamily="18" charset="0"/>
                       </a:rPr>
-                      <m:t>10</m:t>
+                      <m:t>10 </m:t>
                     </m:r>
                     <m:r>
                       <a:rPr lang="en-US" altLang="zh-CN" b="0" i="1" smtClean="0">
                         <a:latin typeface="Cambria Math" panose="02040503050406030204" pitchFamily="18" charset="0"/>
                       </a:rPr>
-                      <m:t> </m:t>
+                      <m:t>𝑀𝑜𝑛𝑡h𝑠</m:t>
                     </m:r>
                     <m:r>
                       <a:rPr lang="en-US" altLang="zh-CN" b="0" i="1" smtClean="0">
                         <a:latin typeface="Cambria Math" panose="02040503050406030204" pitchFamily="18" charset="0"/>
                       </a:rPr>
-                      <m:t>𝑀𝑜𝑛𝑡</m:t>
-                    </m:r>
-                    <m:r>
-                      <a:rPr lang="en-US" altLang="zh-CN" b="0" i="1" smtClean="0">
-                        <a:latin typeface="Cambria Math" panose="02040503050406030204" pitchFamily="18" charset="0"/>
-                      </a:rPr>
-                      <m:t>h</m:t>
-                    </m:r>
-                    <m:r>
-                      <a:rPr lang="en-US" altLang="zh-CN" b="0" i="1" smtClean="0">
-                        <a:latin typeface="Cambria Math" panose="02040503050406030204" pitchFamily="18" charset="0"/>
-                      </a:rPr>
-                      <m:t>𝑠</m:t>
-                    </m:r>
-                    <m:r>
-                      <a:rPr lang="en-US" altLang="zh-CN" b="0" i="1" smtClean="0">
-                        <a:latin typeface="Cambria Math" panose="02040503050406030204" pitchFamily="18" charset="0"/>
-                      </a:rPr>
-                      <m:t> ×</m:t>
-                    </m:r>
-                    <m:r>
-                      <a:rPr lang="en-US" altLang="zh-CN" b="0" i="1" smtClean="0">
-                        <a:latin typeface="Cambria Math" panose="02040503050406030204" pitchFamily="18" charset="0"/>
-                      </a:rPr>
-                      <m:t>10</m:t>
-                    </m:r>
-                    <m:r>
-                      <a:rPr lang="en-US" altLang="zh-CN" b="0" i="1" smtClean="0">
-                        <a:latin typeface="Cambria Math" panose="02040503050406030204" pitchFamily="18" charset="0"/>
-                      </a:rPr>
-                      <m:t> </m:t>
+                      <m:t> ×10 </m:t>
                     </m:r>
                     <m:r>
                       <a:rPr lang="en-US" altLang="zh-CN" b="0" i="1" smtClean="0">
@@ -18871,19 +18837,7 @@
                       <a:rPr lang="en-US" altLang="zh-CN" b="0" i="1" smtClean="0">
                         <a:latin typeface="Cambria Math" panose="02040503050406030204" pitchFamily="18" charset="0"/>
                       </a:rPr>
-                      <m:t> ×</m:t>
-                    </m:r>
-                    <m:r>
-                      <a:rPr lang="en-US" altLang="zh-CN" b="0" i="1" smtClean="0">
-                        <a:latin typeface="Cambria Math" panose="02040503050406030204" pitchFamily="18" charset="0"/>
-                      </a:rPr>
-                      <m:t>4</m:t>
-                    </m:r>
-                    <m:r>
-                      <a:rPr lang="en-US" altLang="zh-CN" b="0" i="1" smtClean="0">
-                        <a:latin typeface="Cambria Math" panose="02040503050406030204" pitchFamily="18" charset="0"/>
-                      </a:rPr>
-                      <m:t> </m:t>
+                      <m:t> ×4 </m:t>
                     </m:r>
                     <m:r>
                       <a:rPr lang="en-US" altLang="zh-CN" b="0" i="1" smtClean="0">
@@ -18895,19 +18849,7 @@
                       <a:rPr lang="en-US" altLang="zh-CN" b="0" i="1" smtClean="0">
                         <a:latin typeface="Cambria Math" panose="02040503050406030204" pitchFamily="18" charset="0"/>
                       </a:rPr>
-                      <m:t> ×</m:t>
-                    </m:r>
-                    <m:r>
-                      <a:rPr lang="en-US" altLang="zh-CN" b="0" i="1" smtClean="0">
-                        <a:latin typeface="Cambria Math" panose="02040503050406030204" pitchFamily="18" charset="0"/>
-                      </a:rPr>
-                      <m:t>5</m:t>
-                    </m:r>
-                    <m:r>
-                      <a:rPr lang="en-US" altLang="zh-CN" b="0" i="1" smtClean="0">
-                        <a:latin typeface="Cambria Math" panose="02040503050406030204" pitchFamily="18" charset="0"/>
-                      </a:rPr>
-                      <m:t> </m:t>
+                      <m:t> ×5 </m:t>
                     </m:r>
                     <m:r>
                       <a:rPr lang="en-US" altLang="zh-CN" b="0" i="1" smtClean="0">
@@ -18919,19 +18861,7 @@
                       <a:rPr lang="en-US" altLang="zh-CN" b="0" i="1" smtClean="0">
                         <a:latin typeface="Cambria Math" panose="02040503050406030204" pitchFamily="18" charset="0"/>
                       </a:rPr>
-                      <m:t> = </m:t>
-                    </m:r>
-                    <m:r>
-                      <a:rPr lang="en-US" altLang="zh-CN" b="0" i="1" smtClean="0">
-                        <a:latin typeface="Cambria Math" panose="02040503050406030204" pitchFamily="18" charset="0"/>
-                      </a:rPr>
-                      <m:t>2000</m:t>
-                    </m:r>
-                    <m:r>
-                      <a:rPr lang="en-US" altLang="zh-CN" b="0" i="1" smtClean="0">
-                        <a:latin typeface="Cambria Math" panose="02040503050406030204" pitchFamily="18" charset="0"/>
-                      </a:rPr>
-                      <m:t> </m:t>
+                      <m:t> = 2000 </m:t>
                     </m:r>
                     <m:r>
                       <a:rPr lang="en-US" altLang="zh-CN" b="0" i="1" smtClean="0">
@@ -18982,14 +18912,14 @@
                 </a:pPr>
                 <a:r>
                   <a:rPr lang="en-US" altLang="zh-CN" dirty="0"/>
-                  <a:t>Abnormalities (High Stream, Low Revenue): 36   </a:t>
+                  <a:t>Abnormalities (High Stream, Low Revenue): 52   </a:t>
                 </a:r>
                 <a:endParaRPr lang="zh-CN" altLang="en-US" dirty="0"/>
               </a:p>
             </p:txBody>
           </p:sp>
         </mc:Choice>
-        <mc:Fallback>
+        <mc:Fallback xmlns="">
           <p:sp>
             <p:nvSpPr>
               <p:cNvPr id="6" name="TextBox 5">
@@ -19013,9 +18943,9 @@
                 <a:avLst/>
               </a:prstGeom>
               <a:blipFill>
-                <a:blip r:embed="rId3"/>
+                <a:blip r:embed="rId2"/>
                 <a:stretch>
-                  <a:fillRect l="-587" r="-2838" b="-1092"/>
+                  <a:fillRect l="-587" b="-1092"/>
                 </a:stretch>
               </a:blipFill>
             </p:spPr>
@@ -19048,8 +18978,8 @@
         </p:nvSpPr>
         <p:spPr>
           <a:xfrm>
-            <a:off x="7014491" y="4900703"/>
-            <a:ext cx="4382593" cy="646331"/>
+            <a:off x="7014491" y="4567049"/>
+            <a:ext cx="4463918" cy="646331"/>
           </a:xfrm>
           <a:prstGeom prst="rect">
             <a:avLst/>
@@ -19064,12 +18994,42 @@
           <a:p>
             <a:r>
               <a:rPr lang="en-US" altLang="zh-CN" dirty="0"/>
-              <a:t>Distribution of flagged data that requires imputation based on features.</a:t>
+              <a:t>Distribution of flagged data that requires feature-based imputations.</a:t>
             </a:r>
             <a:endParaRPr lang="zh-CN" altLang="en-US" dirty="0"/>
           </a:p>
         </p:txBody>
       </p:sp>
+      <p:pic>
+        <p:nvPicPr>
+          <p:cNvPr id="5" name="Picture 4">
+            <a:extLst>
+              <a:ext uri="{FF2B5EF4-FFF2-40B4-BE49-F238E27FC236}">
+                <a16:creationId xmlns:a16="http://schemas.microsoft.com/office/drawing/2014/main" id="{56C17886-A3F0-865B-BE0A-08A6F1235F45}"/>
+              </a:ext>
+            </a:extLst>
+          </p:cNvPr>
+          <p:cNvPicPr>
+            <a:picLocks noChangeAspect="1"/>
+          </p:cNvPicPr>
+          <p:nvPr/>
+        </p:nvPicPr>
+        <p:blipFill>
+          <a:blip r:embed="rId3"/>
+          <a:stretch>
+            <a:fillRect/>
+          </a:stretch>
+        </p:blipFill>
+        <p:spPr>
+          <a:xfrm>
+            <a:off x="7014491" y="1162415"/>
+            <a:ext cx="4262257" cy="3404634"/>
+          </a:xfrm>
+          <a:prstGeom prst="rect">
+            <a:avLst/>
+          </a:prstGeom>
+        </p:spPr>
+      </p:pic>
     </p:spTree>
     <p:extLst>
       <p:ext uri="{BB962C8B-B14F-4D97-AF65-F5344CB8AC3E}">
@@ -19151,7 +19111,7 @@
         </p:blipFill>
         <p:spPr>
           <a:xfrm>
-            <a:off x="610946" y="1535512"/>
+            <a:off x="660400" y="1752644"/>
             <a:ext cx="5852923" cy="4033898"/>
           </a:xfrm>
           <a:prstGeom prst="rect">
@@ -19159,68 +19119,34 @@
           </a:prstGeom>
         </p:spPr>
       </p:pic>
-      <mc:AlternateContent xmlns:mc="http://schemas.openxmlformats.org/markup-compatibility/2006">
-        <mc:Choice xmlns:a14="http://schemas.microsoft.com/office/drawing/2010/main" Requires="a14">
-          <p:graphicFrame>
-            <p:nvGraphicFramePr>
-              <p:cNvPr id="17" name="Diagram 16">
-                <a:extLst>
-                  <a:ext uri="{FF2B5EF4-FFF2-40B4-BE49-F238E27FC236}">
-                    <a16:creationId xmlns:a16="http://schemas.microsoft.com/office/drawing/2014/main" id="{D1641946-AD46-47C5-5B2E-D17201358700}"/>
-                  </a:ext>
-                </a:extLst>
-              </p:cNvPr>
-              <p:cNvGraphicFramePr/>
-              <p:nvPr>
-                <p:extLst>
-                  <p:ext uri="{D42A27DB-BD31-4B8C-83A1-F6EECF244321}">
-                    <p14:modId xmlns:p14="http://schemas.microsoft.com/office/powerpoint/2010/main" val="1720756587"/>
-                  </p:ext>
-                </p:extLst>
-              </p:nvPr>
-            </p:nvGraphicFramePr>
-            <p:xfrm>
-              <a:off x="7112571" y="1582220"/>
-              <a:ext cx="3993793" cy="4374746"/>
-            </p:xfrm>
-            <a:graphic>
-              <a:graphicData uri="http://schemas.openxmlformats.org/drawingml/2006/diagram">
-                <dgm:relIds xmlns:dgm="http://schemas.openxmlformats.org/drawingml/2006/diagram" xmlns:r="http://schemas.openxmlformats.org/officeDocument/2006/relationships" r:dm="rId3" r:lo="rId4" r:qs="rId5" r:cs="rId6"/>
-              </a:graphicData>
-            </a:graphic>
-          </p:graphicFrame>
-        </mc:Choice>
-        <mc:Fallback>
-          <p:graphicFrame>
-            <p:nvGraphicFramePr>
-              <p:cNvPr id="17" name="Diagram 16">
-                <a:extLst>
-                  <a:ext uri="{FF2B5EF4-FFF2-40B4-BE49-F238E27FC236}">
-                    <a16:creationId xmlns:a16="http://schemas.microsoft.com/office/drawing/2014/main" id="{D1641946-AD46-47C5-5B2E-D17201358700}"/>
-                  </a:ext>
-                </a:extLst>
-              </p:cNvPr>
-              <p:cNvGraphicFramePr/>
-              <p:nvPr>
-                <p:extLst>
-                  <p:ext uri="{D42A27DB-BD31-4B8C-83A1-F6EECF244321}">
-                    <p14:modId xmlns:p14="http://schemas.microsoft.com/office/powerpoint/2010/main" val="1720756587"/>
-                  </p:ext>
-                </p:extLst>
-              </p:nvPr>
-            </p:nvGraphicFramePr>
-            <p:xfrm>
-              <a:off x="7112571" y="1582220"/>
-              <a:ext cx="3993793" cy="4374746"/>
-            </p:xfrm>
-            <a:graphic>
-              <a:graphicData uri="http://schemas.openxmlformats.org/drawingml/2006/diagram">
-                <dgm:relIds xmlns:dgm="http://schemas.openxmlformats.org/drawingml/2006/diagram" xmlns:r="http://schemas.openxmlformats.org/officeDocument/2006/relationships" r:dm="rId8" r:lo="rId4" r:qs="rId5" r:cs="rId6"/>
-              </a:graphicData>
-            </a:graphic>
-          </p:graphicFrame>
-        </mc:Fallback>
-      </mc:AlternateContent>
+      <p:graphicFrame>
+        <p:nvGraphicFramePr>
+          <p:cNvPr id="17" name="Diagram 16">
+            <a:extLst>
+              <a:ext uri="{FF2B5EF4-FFF2-40B4-BE49-F238E27FC236}">
+                <a16:creationId xmlns:a16="http://schemas.microsoft.com/office/drawing/2014/main" id="{D1641946-AD46-47C5-5B2E-D17201358700}"/>
+              </a:ext>
+            </a:extLst>
+          </p:cNvPr>
+          <p:cNvGraphicFramePr/>
+          <p:nvPr>
+            <p:extLst>
+              <p:ext uri="{D42A27DB-BD31-4B8C-83A1-F6EECF244321}">
+                <p14:modId xmlns:p14="http://schemas.microsoft.com/office/powerpoint/2010/main" val="156543890"/>
+              </p:ext>
+            </p:extLst>
+          </p:nvPr>
+        </p:nvGraphicFramePr>
+        <p:xfrm>
+          <a:off x="7112571" y="1582220"/>
+          <a:ext cx="3993793" cy="4374746"/>
+        </p:xfrm>
+        <a:graphic>
+          <a:graphicData uri="http://schemas.openxmlformats.org/drawingml/2006/diagram">
+            <dgm:relIds xmlns:dgm="http://schemas.openxmlformats.org/drawingml/2006/diagram" xmlns:r="http://schemas.openxmlformats.org/officeDocument/2006/relationships" r:dm="rId3" r:lo="rId4" r:qs="rId5" r:cs="rId6"/>
+          </a:graphicData>
+        </a:graphic>
+      </p:graphicFrame>
       <p:sp>
         <p:nvSpPr>
           <p:cNvPr id="18" name="TextBox 17">
@@ -19252,6 +19178,66 @@
             <a:r>
               <a:rPr lang="en-US" altLang="zh-CN" b="1" dirty="0"/>
               <a:t>How does lag-aware hierarchical nowcast work? </a:t>
+            </a:r>
+            <a:endParaRPr lang="zh-CN" altLang="en-US" b="1" dirty="0"/>
+          </a:p>
+        </p:txBody>
+      </p:sp>
+      <p:sp>
+        <p:nvSpPr>
+          <p:cNvPr id="4" name="TextBox 3">
+            <a:extLst>
+              <a:ext uri="{FF2B5EF4-FFF2-40B4-BE49-F238E27FC236}">
+                <a16:creationId xmlns:a16="http://schemas.microsoft.com/office/drawing/2014/main" id="{EF643EB1-FAAA-6BE9-3835-4ACB64A8683A}"/>
+              </a:ext>
+            </a:extLst>
+          </p:cNvPr>
+          <p:cNvSpPr txBox="1"/>
+          <p:nvPr/>
+        </p:nvSpPr>
+        <p:spPr>
+          <a:xfrm>
+            <a:off x="660400" y="1177962"/>
+            <a:ext cx="10612419" cy="369332"/>
+          </a:xfrm>
+          <a:prstGeom prst="rect">
+            <a:avLst/>
+          </a:prstGeom>
+          <a:noFill/>
+        </p:spPr>
+        <p:txBody>
+          <a:bodyPr wrap="square" rtlCol="0">
+            <a:spAutoFit/>
+          </a:bodyPr>
+          <a:lstStyle/>
+          <a:p>
+            <a:r>
+              <a:rPr lang="en-US" altLang="zh-CN" b="1" dirty="0"/>
+              <a:t>Key Assumption: Stream data is </a:t>
+            </a:r>
+            <a:r>
+              <a:rPr lang="en-US" altLang="zh-CN" b="1" dirty="0">
+                <a:solidFill>
+                  <a:schemeClr val="accent1"/>
+                </a:solidFill>
+              </a:rPr>
+              <a:t>complete and accurate</a:t>
+            </a:r>
+            <a:r>
+              <a:rPr lang="en-US" altLang="zh-CN" b="1" dirty="0"/>
+              <a:t>, serving as an </a:t>
+            </a:r>
+            <a:r>
+              <a:rPr lang="en-US" altLang="zh-CN" b="1" dirty="0">
+                <a:solidFill>
+                  <a:schemeClr val="accent1"/>
+                </a:solidFill>
+              </a:rPr>
+              <a:t>anchor</a:t>
+            </a:r>
+            <a:r>
+              <a:rPr lang="en-US" altLang="zh-CN" b="1" dirty="0"/>
+              <a:t> for estimation.</a:t>
             </a:r>
             <a:endParaRPr lang="zh-CN" altLang="en-US" b="1" dirty="0"/>
           </a:p>
@@ -19411,7 +19397,7 @@
           <p:nvPr>
             <p:extLst>
               <p:ext uri="{D42A27DB-BD31-4B8C-83A1-F6EECF244321}">
-                <p14:modId xmlns:p14="http://schemas.microsoft.com/office/powerpoint/2010/main" val="1598431810"/>
+                <p14:modId xmlns:p14="http://schemas.microsoft.com/office/powerpoint/2010/main" val="888047593"/>
               </p:ext>
             </p:extLst>
           </p:nvPr>
@@ -19738,8 +19724,8 @@
                         <a:buNone/>
                       </a:pPr>
                       <a:r>
-                        <a:rPr lang="en-US" altLang="zh-CN" sz="1400"/>
-                        <a:t>0.1002</a:t>
+                        <a:rPr lang="en-US" altLang="zh-CN" sz="1400" dirty="0"/>
+                        <a:t>0.1003</a:t>
                       </a:r>
                     </a:p>
                   </a:txBody>
@@ -19845,7 +19831,7 @@
                       </a:pPr>
                       <a:r>
                         <a:rPr lang="en-US" altLang="zh-CN" sz="1400" b="0" dirty="0"/>
-                        <a:t>0.1450</a:t>
+                        <a:t>0.1451</a:t>
                       </a:r>
                     </a:p>
                   </a:txBody>
@@ -21261,13 +21247,13 @@
           <p:nvPr>
             <p:extLst>
               <p:ext uri="{D42A27DB-BD31-4B8C-83A1-F6EECF244321}">
-                <p14:modId xmlns:p14="http://schemas.microsoft.com/office/powerpoint/2010/main" val="3098651279"/>
+                <p14:modId xmlns:p14="http://schemas.microsoft.com/office/powerpoint/2010/main" val="3093019821"/>
               </p:ext>
             </p:extLst>
           </p:nvPr>
         </p:nvGraphicFramePr>
         <p:xfrm>
-          <a:off x="737960" y="4451948"/>
+          <a:off x="737960" y="4251917"/>
           <a:ext cx="10593428" cy="1737216"/>
         </p:xfrm>
         <a:graphic>
@@ -21290,7 +21276,7 @@
         </p:nvSpPr>
         <p:spPr>
           <a:xfrm>
-            <a:off x="660399" y="4082616"/>
+            <a:off x="660399" y="3838220"/>
             <a:ext cx="3224440" cy="369332"/>
           </a:xfrm>
           <a:prstGeom prst="rect">
@@ -21387,8 +21373,8 @@
         </p:nvSpPr>
         <p:spPr bwMode="auto">
           <a:xfrm>
-            <a:off x="660400" y="1028699"/>
-            <a:ext cx="6804212" cy="4939814"/>
+            <a:off x="660400" y="997209"/>
+            <a:ext cx="6601012" cy="5355312"/>
           </a:xfrm>
           <a:prstGeom prst="rect">
             <a:avLst/>
@@ -21435,6 +21421,23 @@
             <a:spAutoFit/>
           </a:bodyPr>
           <a:lstStyle/>
+          <a:p>
+            <a:pPr lvl="0" eaLnBrk="0" fontAlgn="base" hangingPunct="0">
+              <a:lnSpc>
+                <a:spcPct val="150000"/>
+              </a:lnSpc>
+              <a:spcBef>
+                <a:spcPct val="0"/>
+              </a:spcBef>
+              <a:spcAft>
+                <a:spcPct val="0"/>
+              </a:spcAft>
+            </a:pPr>
+            <a:r>
+              <a:rPr lang="en-US" altLang="zh-CN" b="1" dirty="0"/>
+              <a:t>Processed Data Structure:</a:t>
+            </a:r>
+          </a:p>
           <a:p>
             <a:pPr marL="285750" lvl="0" indent="-285750" eaLnBrk="0" fontAlgn="base" hangingPunct="0">
               <a:lnSpc>
@@ -21648,7 +21651,15 @@
             </a:pPr>
             <a:r>
               <a:rPr lang="zh-CN" altLang="zh-CN" b="1" dirty="0"/>
-              <a:t>Audit &amp; Quality Flags:</a:t>
+              <a:t>Audit </a:t>
+            </a:r>
+            <a:r>
+              <a:rPr lang="en-US" altLang="zh-CN" b="1" dirty="0"/>
+              <a:t>and</a:t>
+            </a:r>
+            <a:r>
+              <a:rPr lang="zh-CN" altLang="zh-CN" b="1" dirty="0"/>
+              <a:t> Quality Flags:</a:t>
             </a:r>
             <a:r>
               <a:rPr lang="zh-CN" altLang="zh-CN" dirty="0"/>
@@ -21711,6 +21722,1215 @@
           </a:p>
         </p:txBody>
       </p:sp>
+      <p:graphicFrame>
+        <p:nvGraphicFramePr>
+          <p:cNvPr id="10" name="Table 9">
+            <a:extLst>
+              <a:ext uri="{FF2B5EF4-FFF2-40B4-BE49-F238E27FC236}">
+                <a16:creationId xmlns:a16="http://schemas.microsoft.com/office/drawing/2014/main" id="{6A9A4611-810A-BC10-28B0-97AEA15F9EE3}"/>
+              </a:ext>
+            </a:extLst>
+          </p:cNvPr>
+          <p:cNvGraphicFramePr>
+            <a:graphicFrameLocks noGrp="1"/>
+          </p:cNvGraphicFramePr>
+          <p:nvPr>
+            <p:extLst>
+              <p:ext uri="{D42A27DB-BD31-4B8C-83A1-F6EECF244321}">
+                <p14:modId xmlns:p14="http://schemas.microsoft.com/office/powerpoint/2010/main" val="4073456997"/>
+              </p:ext>
+            </p:extLst>
+          </p:nvPr>
+        </p:nvGraphicFramePr>
+        <p:xfrm>
+          <a:off x="7654066" y="1028699"/>
+          <a:ext cx="4168587" cy="4356846"/>
+        </p:xfrm>
+        <a:graphic>
+          <a:graphicData uri="http://schemas.openxmlformats.org/drawingml/2006/table">
+            <a:tbl>
+              <a:tblPr>
+                <a:tableStyleId>{284E427A-3D55-4303-BF80-6455036E1DE7}</a:tableStyleId>
+              </a:tblPr>
+              <a:tblGrid>
+                <a:gridCol w="1389529">
+                  <a:extLst>
+                    <a:ext uri="{9D8B030D-6E8A-4147-A177-3AD203B41FA5}">
+                      <a16:colId xmlns:a16="http://schemas.microsoft.com/office/drawing/2014/main" val="2524554205"/>
+                    </a:ext>
+                  </a:extLst>
+                </a:gridCol>
+                <a:gridCol w="1389529">
+                  <a:extLst>
+                    <a:ext uri="{9D8B030D-6E8A-4147-A177-3AD203B41FA5}">
+                      <a16:colId xmlns:a16="http://schemas.microsoft.com/office/drawing/2014/main" val="334163670"/>
+                    </a:ext>
+                  </a:extLst>
+                </a:gridCol>
+                <a:gridCol w="1389529">
+                  <a:extLst>
+                    <a:ext uri="{9D8B030D-6E8A-4147-A177-3AD203B41FA5}">
+                      <a16:colId xmlns:a16="http://schemas.microsoft.com/office/drawing/2014/main" val="3442229274"/>
+                    </a:ext>
+                  </a:extLst>
+                </a:gridCol>
+              </a:tblGrid>
+              <a:tr h="726141">
+                <a:tc>
+                  <a:txBody>
+                    <a:bodyPr/>
+                    <a:lstStyle/>
+                    <a:p>
+                      <a:pPr>
+                        <a:buNone/>
+                      </a:pPr>
+                      <a:r>
+                        <a:rPr lang="en-US" b="1"/>
+                        <a:t>Category</a:t>
+                      </a:r>
+                      <a:endParaRPr lang="en-US"/>
+                    </a:p>
+                  </a:txBody>
+                  <a:tcPr anchor="ctr">
+                    <a:lnL w="12700" cap="flat" cmpd="sng" algn="ctr">
+                      <a:solidFill>
+                        <a:schemeClr val="tx1"/>
+                      </a:solidFill>
+                      <a:prstDash val="solid"/>
+                      <a:round/>
+                      <a:headEnd type="none" w="med" len="med"/>
+                      <a:tailEnd type="none" w="med" len="med"/>
+                    </a:lnL>
+                    <a:lnR w="12700" cap="flat" cmpd="sng" algn="ctr">
+                      <a:solidFill>
+                        <a:schemeClr val="tx1"/>
+                      </a:solidFill>
+                      <a:prstDash val="solid"/>
+                      <a:round/>
+                      <a:headEnd type="none" w="med" len="med"/>
+                      <a:tailEnd type="none" w="med" len="med"/>
+                    </a:lnR>
+                    <a:lnT w="12700" cap="flat" cmpd="sng" algn="ctr">
+                      <a:solidFill>
+                        <a:schemeClr val="tx1"/>
+                      </a:solidFill>
+                      <a:prstDash val="solid"/>
+                      <a:round/>
+                      <a:headEnd type="none" w="med" len="med"/>
+                      <a:tailEnd type="none" w="med" len="med"/>
+                    </a:lnT>
+                    <a:lnB w="12700" cap="flat" cmpd="sng" algn="ctr">
+                      <a:solidFill>
+                        <a:schemeClr val="tx1"/>
+                      </a:solidFill>
+                      <a:prstDash val="solid"/>
+                      <a:round/>
+                      <a:headEnd type="none" w="med" len="med"/>
+                      <a:tailEnd type="none" w="med" len="med"/>
+                    </a:lnB>
+                    <a:lnTlToBr w="12700" cmpd="sng">
+                      <a:noFill/>
+                      <a:prstDash val="solid"/>
+                    </a:lnTlToBr>
+                    <a:lnBlToTr w="12700" cmpd="sng">
+                      <a:noFill/>
+                      <a:prstDash val="solid"/>
+                    </a:lnBlToTr>
+                  </a:tcPr>
+                </a:tc>
+                <a:tc>
+                  <a:txBody>
+                    <a:bodyPr/>
+                    <a:lstStyle/>
+                    <a:p>
+                      <a:pPr>
+                        <a:buNone/>
+                      </a:pPr>
+                      <a:r>
+                        <a:rPr lang="en-US" b="1" dirty="0"/>
+                        <a:t>Metric</a:t>
+                      </a:r>
+                      <a:endParaRPr lang="en-US" dirty="0"/>
+                    </a:p>
+                  </a:txBody>
+                  <a:tcPr anchor="ctr">
+                    <a:lnL w="12700" cap="flat" cmpd="sng" algn="ctr">
+                      <a:solidFill>
+                        <a:schemeClr val="tx1"/>
+                      </a:solidFill>
+                      <a:prstDash val="solid"/>
+                      <a:round/>
+                      <a:headEnd type="none" w="med" len="med"/>
+                      <a:tailEnd type="none" w="med" len="med"/>
+                    </a:lnL>
+                    <a:lnR w="12700" cap="flat" cmpd="sng" algn="ctr">
+                      <a:solidFill>
+                        <a:schemeClr val="tx1"/>
+                      </a:solidFill>
+                      <a:prstDash val="solid"/>
+                      <a:round/>
+                      <a:headEnd type="none" w="med" len="med"/>
+                      <a:tailEnd type="none" w="med" len="med"/>
+                    </a:lnR>
+                    <a:lnT w="12700" cap="flat" cmpd="sng" algn="ctr">
+                      <a:solidFill>
+                        <a:schemeClr val="tx1"/>
+                      </a:solidFill>
+                      <a:prstDash val="solid"/>
+                      <a:round/>
+                      <a:headEnd type="none" w="med" len="med"/>
+                      <a:tailEnd type="none" w="med" len="med"/>
+                    </a:lnT>
+                    <a:lnB w="12700" cap="flat" cmpd="sng" algn="ctr">
+                      <a:solidFill>
+                        <a:schemeClr val="tx1"/>
+                      </a:solidFill>
+                      <a:prstDash val="solid"/>
+                      <a:round/>
+                      <a:headEnd type="none" w="med" len="med"/>
+                      <a:tailEnd type="none" w="med" len="med"/>
+                    </a:lnB>
+                    <a:lnTlToBr w="12700" cmpd="sng">
+                      <a:noFill/>
+                      <a:prstDash val="solid"/>
+                    </a:lnTlToBr>
+                    <a:lnBlToTr w="12700" cmpd="sng">
+                      <a:noFill/>
+                      <a:prstDash val="solid"/>
+                    </a:lnBlToTr>
+                  </a:tcPr>
+                </a:tc>
+                <a:tc>
+                  <a:txBody>
+                    <a:bodyPr/>
+                    <a:lstStyle/>
+                    <a:p>
+                      <a:pPr>
+                        <a:buNone/>
+                      </a:pPr>
+                      <a:r>
+                        <a:rPr lang="en-US" b="1"/>
+                        <a:t>Value</a:t>
+                      </a:r>
+                      <a:endParaRPr lang="en-US"/>
+                    </a:p>
+                  </a:txBody>
+                  <a:tcPr anchor="ctr">
+                    <a:lnL w="12700" cap="flat" cmpd="sng" algn="ctr">
+                      <a:solidFill>
+                        <a:schemeClr val="tx1"/>
+                      </a:solidFill>
+                      <a:prstDash val="solid"/>
+                      <a:round/>
+                      <a:headEnd type="none" w="med" len="med"/>
+                      <a:tailEnd type="none" w="med" len="med"/>
+                    </a:lnL>
+                    <a:lnR w="12700" cap="flat" cmpd="sng" algn="ctr">
+                      <a:solidFill>
+                        <a:schemeClr val="tx1"/>
+                      </a:solidFill>
+                      <a:prstDash val="solid"/>
+                      <a:round/>
+                      <a:headEnd type="none" w="med" len="med"/>
+                      <a:tailEnd type="none" w="med" len="med"/>
+                    </a:lnR>
+                    <a:lnT w="12700" cap="flat" cmpd="sng" algn="ctr">
+                      <a:solidFill>
+                        <a:schemeClr val="tx1"/>
+                      </a:solidFill>
+                      <a:prstDash val="solid"/>
+                      <a:round/>
+                      <a:headEnd type="none" w="med" len="med"/>
+                      <a:tailEnd type="none" w="med" len="med"/>
+                    </a:lnT>
+                    <a:lnB w="12700" cap="flat" cmpd="sng" algn="ctr">
+                      <a:solidFill>
+                        <a:schemeClr val="tx1"/>
+                      </a:solidFill>
+                      <a:prstDash val="solid"/>
+                      <a:round/>
+                      <a:headEnd type="none" w="med" len="med"/>
+                      <a:tailEnd type="none" w="med" len="med"/>
+                    </a:lnB>
+                    <a:lnTlToBr w="12700" cmpd="sng">
+                      <a:noFill/>
+                      <a:prstDash val="solid"/>
+                    </a:lnTlToBr>
+                    <a:lnBlToTr w="12700" cmpd="sng">
+                      <a:noFill/>
+                      <a:prstDash val="solid"/>
+                    </a:lnBlToTr>
+                  </a:tcPr>
+                </a:tc>
+                <a:extLst>
+                  <a:ext uri="{0D108BD9-81ED-4DB2-BD59-A6C34878D82A}">
+                    <a16:rowId xmlns:a16="http://schemas.microsoft.com/office/drawing/2014/main" val="1461957866"/>
+                  </a:ext>
+                </a:extLst>
+              </a:tr>
+              <a:tr h="726141">
+                <a:tc>
+                  <a:txBody>
+                    <a:bodyPr/>
+                    <a:lstStyle/>
+                    <a:p>
+                      <a:pPr>
+                        <a:buNone/>
+                      </a:pPr>
+                      <a:r>
+                        <a:rPr lang="en-US" b="1" dirty="0"/>
+                        <a:t>Total Volume</a:t>
+                      </a:r>
+                      <a:endParaRPr lang="en-US" dirty="0"/>
+                    </a:p>
+                  </a:txBody>
+                  <a:tcPr anchor="ctr">
+                    <a:lnL w="12700" cap="flat" cmpd="sng" algn="ctr">
+                      <a:solidFill>
+                        <a:schemeClr val="tx1"/>
+                      </a:solidFill>
+                      <a:prstDash val="solid"/>
+                      <a:round/>
+                      <a:headEnd type="none" w="med" len="med"/>
+                      <a:tailEnd type="none" w="med" len="med"/>
+                    </a:lnL>
+                    <a:lnR w="12700" cap="flat" cmpd="sng" algn="ctr">
+                      <a:solidFill>
+                        <a:schemeClr val="tx1"/>
+                      </a:solidFill>
+                      <a:prstDash val="solid"/>
+                      <a:round/>
+                      <a:headEnd type="none" w="med" len="med"/>
+                      <a:tailEnd type="none" w="med" len="med"/>
+                    </a:lnR>
+                    <a:lnT w="12700" cap="flat" cmpd="sng" algn="ctr">
+                      <a:solidFill>
+                        <a:schemeClr val="tx1"/>
+                      </a:solidFill>
+                      <a:prstDash val="solid"/>
+                      <a:round/>
+                      <a:headEnd type="none" w="med" len="med"/>
+                      <a:tailEnd type="none" w="med" len="med"/>
+                    </a:lnT>
+                    <a:lnB w="12700" cap="flat" cmpd="sng" algn="ctr">
+                      <a:solidFill>
+                        <a:schemeClr val="tx1"/>
+                      </a:solidFill>
+                      <a:prstDash val="solid"/>
+                      <a:round/>
+                      <a:headEnd type="none" w="med" len="med"/>
+                      <a:tailEnd type="none" w="med" len="med"/>
+                    </a:lnB>
+                    <a:lnTlToBr w="12700" cmpd="sng">
+                      <a:noFill/>
+                      <a:prstDash val="solid"/>
+                    </a:lnTlToBr>
+                    <a:lnBlToTr w="12700" cmpd="sng">
+                      <a:noFill/>
+                      <a:prstDash val="solid"/>
+                    </a:lnBlToTr>
+                  </a:tcPr>
+                </a:tc>
+                <a:tc>
+                  <a:txBody>
+                    <a:bodyPr/>
+                    <a:lstStyle/>
+                    <a:p>
+                      <a:pPr>
+                        <a:buNone/>
+                      </a:pPr>
+                      <a:r>
+                        <a:rPr lang="en-US" b="1"/>
+                        <a:t>Total Rows Processed</a:t>
+                      </a:r>
+                      <a:endParaRPr lang="en-US"/>
+                    </a:p>
+                  </a:txBody>
+                  <a:tcPr anchor="ctr">
+                    <a:lnL w="12700" cap="flat" cmpd="sng" algn="ctr">
+                      <a:solidFill>
+                        <a:schemeClr val="tx1"/>
+                      </a:solidFill>
+                      <a:prstDash val="solid"/>
+                      <a:round/>
+                      <a:headEnd type="none" w="med" len="med"/>
+                      <a:tailEnd type="none" w="med" len="med"/>
+                    </a:lnL>
+                    <a:lnR w="12700" cap="flat" cmpd="sng" algn="ctr">
+                      <a:solidFill>
+                        <a:schemeClr val="tx1"/>
+                      </a:solidFill>
+                      <a:prstDash val="solid"/>
+                      <a:round/>
+                      <a:headEnd type="none" w="med" len="med"/>
+                      <a:tailEnd type="none" w="med" len="med"/>
+                    </a:lnR>
+                    <a:lnT w="12700" cap="flat" cmpd="sng" algn="ctr">
+                      <a:solidFill>
+                        <a:schemeClr val="tx1"/>
+                      </a:solidFill>
+                      <a:prstDash val="solid"/>
+                      <a:round/>
+                      <a:headEnd type="none" w="med" len="med"/>
+                      <a:tailEnd type="none" w="med" len="med"/>
+                    </a:lnT>
+                    <a:lnB w="12700" cap="flat" cmpd="sng" algn="ctr">
+                      <a:solidFill>
+                        <a:schemeClr val="tx1"/>
+                      </a:solidFill>
+                      <a:prstDash val="solid"/>
+                      <a:round/>
+                      <a:headEnd type="none" w="med" len="med"/>
+                      <a:tailEnd type="none" w="med" len="med"/>
+                    </a:lnB>
+                    <a:lnTlToBr w="12700" cmpd="sng">
+                      <a:noFill/>
+                      <a:prstDash val="solid"/>
+                    </a:lnTlToBr>
+                    <a:lnBlToTr w="12700" cmpd="sng">
+                      <a:noFill/>
+                      <a:prstDash val="solid"/>
+                    </a:lnBlToTr>
+                  </a:tcPr>
+                </a:tc>
+                <a:tc>
+                  <a:txBody>
+                    <a:bodyPr/>
+                    <a:lstStyle/>
+                    <a:p>
+                      <a:pPr>
+                        <a:buNone/>
+                      </a:pPr>
+                      <a:r>
+                        <a:rPr lang="en-US" altLang="zh-CN" b="1" dirty="0"/>
+                        <a:t>2,000</a:t>
+                      </a:r>
+                      <a:endParaRPr lang="zh-CN" altLang="en-US" dirty="0"/>
+                    </a:p>
+                  </a:txBody>
+                  <a:tcPr anchor="ctr">
+                    <a:lnL w="12700" cap="flat" cmpd="sng" algn="ctr">
+                      <a:solidFill>
+                        <a:schemeClr val="tx1"/>
+                      </a:solidFill>
+                      <a:prstDash val="solid"/>
+                      <a:round/>
+                      <a:headEnd type="none" w="med" len="med"/>
+                      <a:tailEnd type="none" w="med" len="med"/>
+                    </a:lnL>
+                    <a:lnR w="12700" cap="flat" cmpd="sng" algn="ctr">
+                      <a:solidFill>
+                        <a:schemeClr val="tx1"/>
+                      </a:solidFill>
+                      <a:prstDash val="solid"/>
+                      <a:round/>
+                      <a:headEnd type="none" w="med" len="med"/>
+                      <a:tailEnd type="none" w="med" len="med"/>
+                    </a:lnR>
+                    <a:lnT w="12700" cap="flat" cmpd="sng" algn="ctr">
+                      <a:solidFill>
+                        <a:schemeClr val="tx1"/>
+                      </a:solidFill>
+                      <a:prstDash val="solid"/>
+                      <a:round/>
+                      <a:headEnd type="none" w="med" len="med"/>
+                      <a:tailEnd type="none" w="med" len="med"/>
+                    </a:lnT>
+                    <a:lnB w="12700" cap="flat" cmpd="sng" algn="ctr">
+                      <a:solidFill>
+                        <a:schemeClr val="tx1"/>
+                      </a:solidFill>
+                      <a:prstDash val="solid"/>
+                      <a:round/>
+                      <a:headEnd type="none" w="med" len="med"/>
+                      <a:tailEnd type="none" w="med" len="med"/>
+                    </a:lnB>
+                    <a:lnTlToBr w="12700" cmpd="sng">
+                      <a:noFill/>
+                      <a:prstDash val="solid"/>
+                    </a:lnTlToBr>
+                    <a:lnBlToTr w="12700" cmpd="sng">
+                      <a:noFill/>
+                      <a:prstDash val="solid"/>
+                    </a:lnBlToTr>
+                  </a:tcPr>
+                </a:tc>
+                <a:extLst>
+                  <a:ext uri="{0D108BD9-81ED-4DB2-BD59-A6C34878D82A}">
+                    <a16:rowId xmlns:a16="http://schemas.microsoft.com/office/drawing/2014/main" val="2222432553"/>
+                  </a:ext>
+                </a:extLst>
+              </a:tr>
+              <a:tr h="726141">
+                <a:tc>
+                  <a:txBody>
+                    <a:bodyPr/>
+                    <a:lstStyle/>
+                    <a:p>
+                      <a:pPr>
+                        <a:buNone/>
+                      </a:pPr>
+                      <a:r>
+                        <a:rPr lang="en-US" b="1" dirty="0"/>
+                        <a:t>Data Source</a:t>
+                      </a:r>
+                      <a:endParaRPr lang="en-US" dirty="0"/>
+                    </a:p>
+                  </a:txBody>
+                  <a:tcPr anchor="ctr">
+                    <a:lnL w="12700" cap="flat" cmpd="sng" algn="ctr">
+                      <a:solidFill>
+                        <a:schemeClr val="tx1"/>
+                      </a:solidFill>
+                      <a:prstDash val="solid"/>
+                      <a:round/>
+                      <a:headEnd type="none" w="med" len="med"/>
+                      <a:tailEnd type="none" w="med" len="med"/>
+                    </a:lnL>
+                    <a:lnR w="12700" cap="flat" cmpd="sng" algn="ctr">
+                      <a:solidFill>
+                        <a:schemeClr val="tx1"/>
+                      </a:solidFill>
+                      <a:prstDash val="solid"/>
+                      <a:round/>
+                      <a:headEnd type="none" w="med" len="med"/>
+                      <a:tailEnd type="none" w="med" len="med"/>
+                    </a:lnR>
+                    <a:lnT w="12700" cap="flat" cmpd="sng" algn="ctr">
+                      <a:solidFill>
+                        <a:schemeClr val="tx1"/>
+                      </a:solidFill>
+                      <a:prstDash val="solid"/>
+                      <a:round/>
+                      <a:headEnd type="none" w="med" len="med"/>
+                      <a:tailEnd type="none" w="med" len="med"/>
+                    </a:lnT>
+                    <a:lnB w="12700" cap="flat" cmpd="sng" algn="ctr">
+                      <a:solidFill>
+                        <a:schemeClr val="tx1"/>
+                      </a:solidFill>
+                      <a:prstDash val="solid"/>
+                      <a:round/>
+                      <a:headEnd type="none" w="med" len="med"/>
+                      <a:tailEnd type="none" w="med" len="med"/>
+                    </a:lnB>
+                    <a:lnTlToBr w="12700" cmpd="sng">
+                      <a:noFill/>
+                      <a:prstDash val="solid"/>
+                    </a:lnTlToBr>
+                    <a:lnBlToTr w="12700" cmpd="sng">
+                      <a:noFill/>
+                      <a:prstDash val="solid"/>
+                    </a:lnBlToTr>
+                  </a:tcPr>
+                </a:tc>
+                <a:tc>
+                  <a:txBody>
+                    <a:bodyPr/>
+                    <a:lstStyle/>
+                    <a:p>
+                      <a:pPr>
+                        <a:buNone/>
+                      </a:pPr>
+                      <a:r>
+                        <a:rPr lang="en-US"/>
+                        <a:t>Actual Data Rows</a:t>
+                      </a:r>
+                    </a:p>
+                  </a:txBody>
+                  <a:tcPr anchor="ctr">
+                    <a:lnL w="12700" cap="flat" cmpd="sng" algn="ctr">
+                      <a:solidFill>
+                        <a:schemeClr val="tx1"/>
+                      </a:solidFill>
+                      <a:prstDash val="solid"/>
+                      <a:round/>
+                      <a:headEnd type="none" w="med" len="med"/>
+                      <a:tailEnd type="none" w="med" len="med"/>
+                    </a:lnL>
+                    <a:lnR w="12700" cap="flat" cmpd="sng" algn="ctr">
+                      <a:solidFill>
+                        <a:schemeClr val="tx1"/>
+                      </a:solidFill>
+                      <a:prstDash val="solid"/>
+                      <a:round/>
+                      <a:headEnd type="none" w="med" len="med"/>
+                      <a:tailEnd type="none" w="med" len="med"/>
+                    </a:lnR>
+                    <a:lnT w="12700" cap="flat" cmpd="sng" algn="ctr">
+                      <a:solidFill>
+                        <a:schemeClr val="tx1"/>
+                      </a:solidFill>
+                      <a:prstDash val="solid"/>
+                      <a:round/>
+                      <a:headEnd type="none" w="med" len="med"/>
+                      <a:tailEnd type="none" w="med" len="med"/>
+                    </a:lnT>
+                    <a:lnB w="12700" cap="flat" cmpd="sng" algn="ctr">
+                      <a:solidFill>
+                        <a:schemeClr val="tx1"/>
+                      </a:solidFill>
+                      <a:prstDash val="solid"/>
+                      <a:round/>
+                      <a:headEnd type="none" w="med" len="med"/>
+                      <a:tailEnd type="none" w="med" len="med"/>
+                    </a:lnB>
+                    <a:lnTlToBr w="12700" cmpd="sng">
+                      <a:noFill/>
+                      <a:prstDash val="solid"/>
+                    </a:lnTlToBr>
+                    <a:lnBlToTr w="12700" cmpd="sng">
+                      <a:noFill/>
+                      <a:prstDash val="solid"/>
+                    </a:lnBlToTr>
+                  </a:tcPr>
+                </a:tc>
+                <a:tc>
+                  <a:txBody>
+                    <a:bodyPr/>
+                    <a:lstStyle/>
+                    <a:p>
+                      <a:pPr>
+                        <a:buNone/>
+                      </a:pPr>
+                      <a:r>
+                        <a:rPr lang="en-US" altLang="zh-CN"/>
+                        <a:t>1,662 (83%)</a:t>
+                      </a:r>
+                    </a:p>
+                  </a:txBody>
+                  <a:tcPr anchor="ctr">
+                    <a:lnL w="12700" cap="flat" cmpd="sng" algn="ctr">
+                      <a:solidFill>
+                        <a:schemeClr val="tx1"/>
+                      </a:solidFill>
+                      <a:prstDash val="solid"/>
+                      <a:round/>
+                      <a:headEnd type="none" w="med" len="med"/>
+                      <a:tailEnd type="none" w="med" len="med"/>
+                    </a:lnL>
+                    <a:lnR w="12700" cap="flat" cmpd="sng" algn="ctr">
+                      <a:solidFill>
+                        <a:schemeClr val="tx1"/>
+                      </a:solidFill>
+                      <a:prstDash val="solid"/>
+                      <a:round/>
+                      <a:headEnd type="none" w="med" len="med"/>
+                      <a:tailEnd type="none" w="med" len="med"/>
+                    </a:lnR>
+                    <a:lnT w="12700" cap="flat" cmpd="sng" algn="ctr">
+                      <a:solidFill>
+                        <a:schemeClr val="tx1"/>
+                      </a:solidFill>
+                      <a:prstDash val="solid"/>
+                      <a:round/>
+                      <a:headEnd type="none" w="med" len="med"/>
+                      <a:tailEnd type="none" w="med" len="med"/>
+                    </a:lnT>
+                    <a:lnB w="12700" cap="flat" cmpd="sng" algn="ctr">
+                      <a:solidFill>
+                        <a:schemeClr val="tx1"/>
+                      </a:solidFill>
+                      <a:prstDash val="solid"/>
+                      <a:round/>
+                      <a:headEnd type="none" w="med" len="med"/>
+                      <a:tailEnd type="none" w="med" len="med"/>
+                    </a:lnB>
+                    <a:lnTlToBr w="12700" cmpd="sng">
+                      <a:noFill/>
+                      <a:prstDash val="solid"/>
+                    </a:lnTlToBr>
+                    <a:lnBlToTr w="12700" cmpd="sng">
+                      <a:noFill/>
+                      <a:prstDash val="solid"/>
+                    </a:lnBlToTr>
+                  </a:tcPr>
+                </a:tc>
+                <a:extLst>
+                  <a:ext uri="{0D108BD9-81ED-4DB2-BD59-A6C34878D82A}">
+                    <a16:rowId xmlns:a16="http://schemas.microsoft.com/office/drawing/2014/main" val="2375598698"/>
+                  </a:ext>
+                </a:extLst>
+              </a:tr>
+              <a:tr h="726141">
+                <a:tc>
+                  <a:txBody>
+                    <a:bodyPr/>
+                    <a:lstStyle/>
+                    <a:p>
+                      <a:pPr>
+                        <a:buNone/>
+                      </a:pPr>
+                      <a:r>
+                        <a:rPr lang="en-US" b="1" dirty="0"/>
+                        <a:t>Data Source</a:t>
+                      </a:r>
+                      <a:endParaRPr lang="en-US" dirty="0"/>
+                    </a:p>
+                  </a:txBody>
+                  <a:tcPr anchor="ctr">
+                    <a:lnL w="12700" cap="flat" cmpd="sng" algn="ctr">
+                      <a:solidFill>
+                        <a:schemeClr val="tx1"/>
+                      </a:solidFill>
+                      <a:prstDash val="solid"/>
+                      <a:round/>
+                      <a:headEnd type="none" w="med" len="med"/>
+                      <a:tailEnd type="none" w="med" len="med"/>
+                    </a:lnL>
+                    <a:lnR w="12700" cap="flat" cmpd="sng" algn="ctr">
+                      <a:solidFill>
+                        <a:schemeClr val="tx1"/>
+                      </a:solidFill>
+                      <a:prstDash val="solid"/>
+                      <a:round/>
+                      <a:headEnd type="none" w="med" len="med"/>
+                      <a:tailEnd type="none" w="med" len="med"/>
+                    </a:lnR>
+                    <a:lnT w="12700" cap="flat" cmpd="sng" algn="ctr">
+                      <a:solidFill>
+                        <a:schemeClr val="tx1"/>
+                      </a:solidFill>
+                      <a:prstDash val="solid"/>
+                      <a:round/>
+                      <a:headEnd type="none" w="med" len="med"/>
+                      <a:tailEnd type="none" w="med" len="med"/>
+                    </a:lnT>
+                    <a:lnB w="12700" cap="flat" cmpd="sng" algn="ctr">
+                      <a:solidFill>
+                        <a:schemeClr val="tx1"/>
+                      </a:solidFill>
+                      <a:prstDash val="solid"/>
+                      <a:round/>
+                      <a:headEnd type="none" w="med" len="med"/>
+                      <a:tailEnd type="none" w="med" len="med"/>
+                    </a:lnB>
+                    <a:lnTlToBr w="12700" cmpd="sng">
+                      <a:noFill/>
+                      <a:prstDash val="solid"/>
+                    </a:lnTlToBr>
+                    <a:lnBlToTr w="12700" cmpd="sng">
+                      <a:noFill/>
+                      <a:prstDash val="solid"/>
+                    </a:lnBlToTr>
+                  </a:tcPr>
+                </a:tc>
+                <a:tc>
+                  <a:txBody>
+                    <a:bodyPr/>
+                    <a:lstStyle/>
+                    <a:p>
+                      <a:pPr>
+                        <a:buNone/>
+                      </a:pPr>
+                      <a:r>
+                        <a:rPr lang="en-US"/>
+                        <a:t>Nowcasted Rows</a:t>
+                      </a:r>
+                    </a:p>
+                  </a:txBody>
+                  <a:tcPr anchor="ctr">
+                    <a:lnL w="12700" cap="flat" cmpd="sng" algn="ctr">
+                      <a:solidFill>
+                        <a:schemeClr val="tx1"/>
+                      </a:solidFill>
+                      <a:prstDash val="solid"/>
+                      <a:round/>
+                      <a:headEnd type="none" w="med" len="med"/>
+                      <a:tailEnd type="none" w="med" len="med"/>
+                    </a:lnL>
+                    <a:lnR w="12700" cap="flat" cmpd="sng" algn="ctr">
+                      <a:solidFill>
+                        <a:schemeClr val="tx1"/>
+                      </a:solidFill>
+                      <a:prstDash val="solid"/>
+                      <a:round/>
+                      <a:headEnd type="none" w="med" len="med"/>
+                      <a:tailEnd type="none" w="med" len="med"/>
+                    </a:lnR>
+                    <a:lnT w="12700" cap="flat" cmpd="sng" algn="ctr">
+                      <a:solidFill>
+                        <a:schemeClr val="tx1"/>
+                      </a:solidFill>
+                      <a:prstDash val="solid"/>
+                      <a:round/>
+                      <a:headEnd type="none" w="med" len="med"/>
+                      <a:tailEnd type="none" w="med" len="med"/>
+                    </a:lnT>
+                    <a:lnB w="12700" cap="flat" cmpd="sng" algn="ctr">
+                      <a:solidFill>
+                        <a:schemeClr val="tx1"/>
+                      </a:solidFill>
+                      <a:prstDash val="solid"/>
+                      <a:round/>
+                      <a:headEnd type="none" w="med" len="med"/>
+                      <a:tailEnd type="none" w="med" len="med"/>
+                    </a:lnB>
+                    <a:lnTlToBr w="12700" cmpd="sng">
+                      <a:noFill/>
+                      <a:prstDash val="solid"/>
+                    </a:lnTlToBr>
+                    <a:lnBlToTr w="12700" cmpd="sng">
+                      <a:noFill/>
+                      <a:prstDash val="solid"/>
+                    </a:lnBlToTr>
+                  </a:tcPr>
+                </a:tc>
+                <a:tc>
+                  <a:txBody>
+                    <a:bodyPr/>
+                    <a:lstStyle/>
+                    <a:p>
+                      <a:pPr>
+                        <a:buNone/>
+                      </a:pPr>
+                      <a:r>
+                        <a:rPr lang="en-US" altLang="zh-CN"/>
+                        <a:t>338 (17%)</a:t>
+                      </a:r>
+                    </a:p>
+                  </a:txBody>
+                  <a:tcPr anchor="ctr">
+                    <a:lnL w="12700" cap="flat" cmpd="sng" algn="ctr">
+                      <a:solidFill>
+                        <a:schemeClr val="tx1"/>
+                      </a:solidFill>
+                      <a:prstDash val="solid"/>
+                      <a:round/>
+                      <a:headEnd type="none" w="med" len="med"/>
+                      <a:tailEnd type="none" w="med" len="med"/>
+                    </a:lnL>
+                    <a:lnR w="12700" cap="flat" cmpd="sng" algn="ctr">
+                      <a:solidFill>
+                        <a:schemeClr val="tx1"/>
+                      </a:solidFill>
+                      <a:prstDash val="solid"/>
+                      <a:round/>
+                      <a:headEnd type="none" w="med" len="med"/>
+                      <a:tailEnd type="none" w="med" len="med"/>
+                    </a:lnR>
+                    <a:lnT w="12700" cap="flat" cmpd="sng" algn="ctr">
+                      <a:solidFill>
+                        <a:schemeClr val="tx1"/>
+                      </a:solidFill>
+                      <a:prstDash val="solid"/>
+                      <a:round/>
+                      <a:headEnd type="none" w="med" len="med"/>
+                      <a:tailEnd type="none" w="med" len="med"/>
+                    </a:lnT>
+                    <a:lnB w="12700" cap="flat" cmpd="sng" algn="ctr">
+                      <a:solidFill>
+                        <a:schemeClr val="tx1"/>
+                      </a:solidFill>
+                      <a:prstDash val="solid"/>
+                      <a:round/>
+                      <a:headEnd type="none" w="med" len="med"/>
+                      <a:tailEnd type="none" w="med" len="med"/>
+                    </a:lnB>
+                    <a:lnTlToBr w="12700" cmpd="sng">
+                      <a:noFill/>
+                      <a:prstDash val="solid"/>
+                    </a:lnTlToBr>
+                    <a:lnBlToTr w="12700" cmpd="sng">
+                      <a:noFill/>
+                      <a:prstDash val="solid"/>
+                    </a:lnBlToTr>
+                  </a:tcPr>
+                </a:tc>
+                <a:extLst>
+                  <a:ext uri="{0D108BD9-81ED-4DB2-BD59-A6C34878D82A}">
+                    <a16:rowId xmlns:a16="http://schemas.microsoft.com/office/drawing/2014/main" val="1315539143"/>
+                  </a:ext>
+                </a:extLst>
+              </a:tr>
+              <a:tr h="726141">
+                <a:tc>
+                  <a:txBody>
+                    <a:bodyPr/>
+                    <a:lstStyle/>
+                    <a:p>
+                      <a:pPr>
+                        <a:buNone/>
+                      </a:pPr>
+                      <a:r>
+                        <a:rPr lang="en-US" b="1" dirty="0"/>
+                        <a:t>Data Quality</a:t>
+                      </a:r>
+                      <a:endParaRPr lang="en-US" dirty="0"/>
+                    </a:p>
+                  </a:txBody>
+                  <a:tcPr anchor="ctr">
+                    <a:lnL w="12700" cap="flat" cmpd="sng" algn="ctr">
+                      <a:solidFill>
+                        <a:schemeClr val="tx1"/>
+                      </a:solidFill>
+                      <a:prstDash val="solid"/>
+                      <a:round/>
+                      <a:headEnd type="none" w="med" len="med"/>
+                      <a:tailEnd type="none" w="med" len="med"/>
+                    </a:lnL>
+                    <a:lnR w="12700" cap="flat" cmpd="sng" algn="ctr">
+                      <a:solidFill>
+                        <a:schemeClr val="tx1"/>
+                      </a:solidFill>
+                      <a:prstDash val="solid"/>
+                      <a:round/>
+                      <a:headEnd type="none" w="med" len="med"/>
+                      <a:tailEnd type="none" w="med" len="med"/>
+                    </a:lnR>
+                    <a:lnT w="12700" cap="flat" cmpd="sng" algn="ctr">
+                      <a:solidFill>
+                        <a:schemeClr val="tx1"/>
+                      </a:solidFill>
+                      <a:prstDash val="solid"/>
+                      <a:round/>
+                      <a:headEnd type="none" w="med" len="med"/>
+                      <a:tailEnd type="none" w="med" len="med"/>
+                    </a:lnT>
+                    <a:lnB w="12700" cap="flat" cmpd="sng" algn="ctr">
+                      <a:solidFill>
+                        <a:schemeClr val="tx1"/>
+                      </a:solidFill>
+                      <a:prstDash val="solid"/>
+                      <a:round/>
+                      <a:headEnd type="none" w="med" len="med"/>
+                      <a:tailEnd type="none" w="med" len="med"/>
+                    </a:lnB>
+                    <a:lnTlToBr w="12700" cmpd="sng">
+                      <a:noFill/>
+                      <a:prstDash val="solid"/>
+                    </a:lnTlToBr>
+                    <a:lnBlToTr w="12700" cmpd="sng">
+                      <a:noFill/>
+                      <a:prstDash val="solid"/>
+                    </a:lnBlToTr>
+                  </a:tcPr>
+                </a:tc>
+                <a:tc>
+                  <a:txBody>
+                    <a:bodyPr/>
+                    <a:lstStyle/>
+                    <a:p>
+                      <a:pPr>
+                        <a:buNone/>
+                      </a:pPr>
+                      <a:r>
+                        <a:rPr lang="en-US" dirty="0"/>
+                        <a:t>Quality Flag </a:t>
+                      </a:r>
+                    </a:p>
+                  </a:txBody>
+                  <a:tcPr anchor="ctr">
+                    <a:lnL w="12700" cap="flat" cmpd="sng" algn="ctr">
+                      <a:solidFill>
+                        <a:schemeClr val="tx1"/>
+                      </a:solidFill>
+                      <a:prstDash val="solid"/>
+                      <a:round/>
+                      <a:headEnd type="none" w="med" len="med"/>
+                      <a:tailEnd type="none" w="med" len="med"/>
+                    </a:lnL>
+                    <a:lnR w="12700" cap="flat" cmpd="sng" algn="ctr">
+                      <a:solidFill>
+                        <a:schemeClr val="tx1"/>
+                      </a:solidFill>
+                      <a:prstDash val="solid"/>
+                      <a:round/>
+                      <a:headEnd type="none" w="med" len="med"/>
+                      <a:tailEnd type="none" w="med" len="med"/>
+                    </a:lnR>
+                    <a:lnT w="12700" cap="flat" cmpd="sng" algn="ctr">
+                      <a:solidFill>
+                        <a:schemeClr val="tx1"/>
+                      </a:solidFill>
+                      <a:prstDash val="solid"/>
+                      <a:round/>
+                      <a:headEnd type="none" w="med" len="med"/>
+                      <a:tailEnd type="none" w="med" len="med"/>
+                    </a:lnT>
+                    <a:lnB w="12700" cap="flat" cmpd="sng" algn="ctr">
+                      <a:solidFill>
+                        <a:schemeClr val="tx1"/>
+                      </a:solidFill>
+                      <a:prstDash val="solid"/>
+                      <a:round/>
+                      <a:headEnd type="none" w="med" len="med"/>
+                      <a:tailEnd type="none" w="med" len="med"/>
+                    </a:lnB>
+                    <a:lnTlToBr w="12700" cmpd="sng">
+                      <a:noFill/>
+                      <a:prstDash val="solid"/>
+                    </a:lnTlToBr>
+                    <a:lnBlToTr w="12700" cmpd="sng">
+                      <a:noFill/>
+                      <a:prstDash val="solid"/>
+                    </a:lnBlToTr>
+                  </a:tcPr>
+                </a:tc>
+                <a:tc>
+                  <a:txBody>
+                    <a:bodyPr/>
+                    <a:lstStyle/>
+                    <a:p>
+                      <a:pPr>
+                        <a:buNone/>
+                      </a:pPr>
+                      <a:r>
+                        <a:rPr lang="en-US" altLang="zh-CN" b="1" dirty="0"/>
+                        <a:t>52</a:t>
+                      </a:r>
+                      <a:endParaRPr lang="zh-CN" altLang="en-US" dirty="0"/>
+                    </a:p>
+                  </a:txBody>
+                  <a:tcPr anchor="ctr">
+                    <a:lnL w="12700" cap="flat" cmpd="sng" algn="ctr">
+                      <a:solidFill>
+                        <a:schemeClr val="tx1"/>
+                      </a:solidFill>
+                      <a:prstDash val="solid"/>
+                      <a:round/>
+                      <a:headEnd type="none" w="med" len="med"/>
+                      <a:tailEnd type="none" w="med" len="med"/>
+                    </a:lnL>
+                    <a:lnR w="12700" cap="flat" cmpd="sng" algn="ctr">
+                      <a:solidFill>
+                        <a:schemeClr val="tx1"/>
+                      </a:solidFill>
+                      <a:prstDash val="solid"/>
+                      <a:round/>
+                      <a:headEnd type="none" w="med" len="med"/>
+                      <a:tailEnd type="none" w="med" len="med"/>
+                    </a:lnR>
+                    <a:lnT w="12700" cap="flat" cmpd="sng" algn="ctr">
+                      <a:solidFill>
+                        <a:schemeClr val="tx1"/>
+                      </a:solidFill>
+                      <a:prstDash val="solid"/>
+                      <a:round/>
+                      <a:headEnd type="none" w="med" len="med"/>
+                      <a:tailEnd type="none" w="med" len="med"/>
+                    </a:lnT>
+                    <a:lnB w="12700" cap="flat" cmpd="sng" algn="ctr">
+                      <a:solidFill>
+                        <a:schemeClr val="tx1"/>
+                      </a:solidFill>
+                      <a:prstDash val="solid"/>
+                      <a:round/>
+                      <a:headEnd type="none" w="med" len="med"/>
+                      <a:tailEnd type="none" w="med" len="med"/>
+                    </a:lnB>
+                    <a:lnTlToBr w="12700" cmpd="sng">
+                      <a:noFill/>
+                      <a:prstDash val="solid"/>
+                    </a:lnTlToBr>
+                    <a:lnBlToTr w="12700" cmpd="sng">
+                      <a:noFill/>
+                      <a:prstDash val="solid"/>
+                    </a:lnBlToTr>
+                  </a:tcPr>
+                </a:tc>
+                <a:extLst>
+                  <a:ext uri="{0D108BD9-81ED-4DB2-BD59-A6C34878D82A}">
+                    <a16:rowId xmlns:a16="http://schemas.microsoft.com/office/drawing/2014/main" val="116690418"/>
+                  </a:ext>
+                </a:extLst>
+              </a:tr>
+              <a:tr h="726141">
+                <a:tc>
+                  <a:txBody>
+                    <a:bodyPr/>
+                    <a:lstStyle/>
+                    <a:p>
+                      <a:pPr>
+                        <a:buNone/>
+                      </a:pPr>
+                      <a:r>
+                        <a:rPr lang="en-US" b="1" dirty="0"/>
+                        <a:t>Integrity</a:t>
+                      </a:r>
+                      <a:endParaRPr lang="en-US" dirty="0"/>
+                    </a:p>
+                  </a:txBody>
+                  <a:tcPr anchor="ctr">
+                    <a:lnL w="12700" cap="flat" cmpd="sng" algn="ctr">
+                      <a:solidFill>
+                        <a:schemeClr val="tx1"/>
+                      </a:solidFill>
+                      <a:prstDash val="solid"/>
+                      <a:round/>
+                      <a:headEnd type="none" w="med" len="med"/>
+                      <a:tailEnd type="none" w="med" len="med"/>
+                    </a:lnL>
+                    <a:lnR w="12700" cap="flat" cmpd="sng" algn="ctr">
+                      <a:solidFill>
+                        <a:schemeClr val="tx1"/>
+                      </a:solidFill>
+                      <a:prstDash val="solid"/>
+                      <a:round/>
+                      <a:headEnd type="none" w="med" len="med"/>
+                      <a:tailEnd type="none" w="med" len="med"/>
+                    </a:lnR>
+                    <a:lnT w="12700" cap="flat" cmpd="sng" algn="ctr">
+                      <a:solidFill>
+                        <a:schemeClr val="tx1"/>
+                      </a:solidFill>
+                      <a:prstDash val="solid"/>
+                      <a:round/>
+                      <a:headEnd type="none" w="med" len="med"/>
+                      <a:tailEnd type="none" w="med" len="med"/>
+                    </a:lnT>
+                    <a:lnB w="12700" cap="flat" cmpd="sng" algn="ctr">
+                      <a:solidFill>
+                        <a:schemeClr val="tx1"/>
+                      </a:solidFill>
+                      <a:prstDash val="solid"/>
+                      <a:round/>
+                      <a:headEnd type="none" w="med" len="med"/>
+                      <a:tailEnd type="none" w="med" len="med"/>
+                    </a:lnB>
+                    <a:lnTlToBr w="12700" cmpd="sng">
+                      <a:noFill/>
+                      <a:prstDash val="solid"/>
+                    </a:lnTlToBr>
+                    <a:lnBlToTr w="12700" cmpd="sng">
+                      <a:noFill/>
+                      <a:prstDash val="solid"/>
+                    </a:lnBlToTr>
+                  </a:tcPr>
+                </a:tc>
+                <a:tc>
+                  <a:txBody>
+                    <a:bodyPr/>
+                    <a:lstStyle/>
+                    <a:p>
+                      <a:pPr>
+                        <a:buNone/>
+                      </a:pPr>
+                      <a:r>
+                        <a:rPr lang="en-US" dirty="0"/>
+                        <a:t>Severe Suspicious</a:t>
+                      </a:r>
+                    </a:p>
+                  </a:txBody>
+                  <a:tcPr anchor="ctr">
+                    <a:lnL w="12700" cap="flat" cmpd="sng" algn="ctr">
+                      <a:solidFill>
+                        <a:schemeClr val="tx1"/>
+                      </a:solidFill>
+                      <a:prstDash val="solid"/>
+                      <a:round/>
+                      <a:headEnd type="none" w="med" len="med"/>
+                      <a:tailEnd type="none" w="med" len="med"/>
+                    </a:lnL>
+                    <a:lnR w="12700" cap="flat" cmpd="sng" algn="ctr">
+                      <a:solidFill>
+                        <a:schemeClr val="tx1"/>
+                      </a:solidFill>
+                      <a:prstDash val="solid"/>
+                      <a:round/>
+                      <a:headEnd type="none" w="med" len="med"/>
+                      <a:tailEnd type="none" w="med" len="med"/>
+                    </a:lnR>
+                    <a:lnT w="12700" cap="flat" cmpd="sng" algn="ctr">
+                      <a:solidFill>
+                        <a:schemeClr val="tx1"/>
+                      </a:solidFill>
+                      <a:prstDash val="solid"/>
+                      <a:round/>
+                      <a:headEnd type="none" w="med" len="med"/>
+                      <a:tailEnd type="none" w="med" len="med"/>
+                    </a:lnT>
+                    <a:lnB w="12700" cap="flat" cmpd="sng" algn="ctr">
+                      <a:solidFill>
+                        <a:schemeClr val="tx1"/>
+                      </a:solidFill>
+                      <a:prstDash val="solid"/>
+                      <a:round/>
+                      <a:headEnd type="none" w="med" len="med"/>
+                      <a:tailEnd type="none" w="med" len="med"/>
+                    </a:lnB>
+                    <a:lnTlToBr w="12700" cmpd="sng">
+                      <a:noFill/>
+                      <a:prstDash val="solid"/>
+                    </a:lnTlToBr>
+                    <a:lnBlToTr w="12700" cmpd="sng">
+                      <a:noFill/>
+                      <a:prstDash val="solid"/>
+                    </a:lnBlToTr>
+                  </a:tcPr>
+                </a:tc>
+                <a:tc>
+                  <a:txBody>
+                    <a:bodyPr/>
+                    <a:lstStyle/>
+                    <a:p>
+                      <a:pPr>
+                        <a:buNone/>
+                      </a:pPr>
+                      <a:r>
+                        <a:rPr lang="en-US" altLang="zh-CN" b="1" dirty="0"/>
+                        <a:t>0</a:t>
+                      </a:r>
+                      <a:endParaRPr lang="zh-CN" altLang="en-US" dirty="0"/>
+                    </a:p>
+                  </a:txBody>
+                  <a:tcPr anchor="ctr">
+                    <a:lnL w="12700" cap="flat" cmpd="sng" algn="ctr">
+                      <a:solidFill>
+                        <a:schemeClr val="tx1"/>
+                      </a:solidFill>
+                      <a:prstDash val="solid"/>
+                      <a:round/>
+                      <a:headEnd type="none" w="med" len="med"/>
+                      <a:tailEnd type="none" w="med" len="med"/>
+                    </a:lnL>
+                    <a:lnR w="12700" cap="flat" cmpd="sng" algn="ctr">
+                      <a:solidFill>
+                        <a:schemeClr val="tx1"/>
+                      </a:solidFill>
+                      <a:prstDash val="solid"/>
+                      <a:round/>
+                      <a:headEnd type="none" w="med" len="med"/>
+                      <a:tailEnd type="none" w="med" len="med"/>
+                    </a:lnR>
+                    <a:lnT w="12700" cap="flat" cmpd="sng" algn="ctr">
+                      <a:solidFill>
+                        <a:schemeClr val="tx1"/>
+                      </a:solidFill>
+                      <a:prstDash val="solid"/>
+                      <a:round/>
+                      <a:headEnd type="none" w="med" len="med"/>
+                      <a:tailEnd type="none" w="med" len="med"/>
+                    </a:lnT>
+                    <a:lnB w="12700" cap="flat" cmpd="sng" algn="ctr">
+                      <a:solidFill>
+                        <a:schemeClr val="tx1"/>
+                      </a:solidFill>
+                      <a:prstDash val="solid"/>
+                      <a:round/>
+                      <a:headEnd type="none" w="med" len="med"/>
+                      <a:tailEnd type="none" w="med" len="med"/>
+                    </a:lnB>
+                    <a:lnTlToBr w="12700" cmpd="sng">
+                      <a:noFill/>
+                      <a:prstDash val="solid"/>
+                    </a:lnTlToBr>
+                    <a:lnBlToTr w="12700" cmpd="sng">
+                      <a:noFill/>
+                      <a:prstDash val="solid"/>
+                    </a:lnBlToTr>
+                  </a:tcPr>
+                </a:tc>
+                <a:extLst>
+                  <a:ext uri="{0D108BD9-81ED-4DB2-BD59-A6C34878D82A}">
+                    <a16:rowId xmlns:a16="http://schemas.microsoft.com/office/drawing/2014/main" val="454343112"/>
+                  </a:ext>
+                </a:extLst>
+              </a:tr>
+            </a:tbl>
+          </a:graphicData>
+        </a:graphic>
+      </p:graphicFrame>
     </p:spTree>
     <p:extLst>
       <p:ext uri="{BB962C8B-B14F-4D97-AF65-F5344CB8AC3E}">
@@ -21770,36 +22990,6 @@
           </a:p>
         </p:txBody>
       </p:sp>
-      <p:pic>
-        <p:nvPicPr>
-          <p:cNvPr id="4" name="Picture 3">
-            <a:extLst>
-              <a:ext uri="{FF2B5EF4-FFF2-40B4-BE49-F238E27FC236}">
-                <a16:creationId xmlns:a16="http://schemas.microsoft.com/office/drawing/2014/main" id="{37D2EC94-5441-C02B-C6CC-49A2FC3C85AA}"/>
-              </a:ext>
-            </a:extLst>
-          </p:cNvPr>
-          <p:cNvPicPr>
-            <a:picLocks noChangeAspect="1"/>
-          </p:cNvPicPr>
-          <p:nvPr/>
-        </p:nvPicPr>
-        <p:blipFill>
-          <a:blip r:embed="rId2"/>
-          <a:stretch>
-            <a:fillRect/>
-          </a:stretch>
-        </p:blipFill>
-        <p:spPr>
-          <a:xfrm>
-            <a:off x="660400" y="1251209"/>
-            <a:ext cx="5322047" cy="2638662"/>
-          </a:xfrm>
-          <a:prstGeom prst="rect">
-            <a:avLst/>
-          </a:prstGeom>
-        </p:spPr>
-      </p:pic>
       <p:sp>
         <p:nvSpPr>
           <p:cNvPr id="7" name="TextBox 6">
@@ -21815,7 +23005,7 @@
         <p:spPr>
           <a:xfrm>
             <a:off x="460188" y="3889871"/>
-            <a:ext cx="6131859" cy="1287532"/>
+            <a:ext cx="6131859" cy="2118529"/>
           </a:xfrm>
           <a:prstGeom prst="rect">
             <a:avLst/>
@@ -21837,7 +23027,19 @@
             </a:pPr>
             <a:r>
               <a:rPr lang="en-US" altLang="zh-CN" dirty="0"/>
-              <a:t>RPS by DSP exhibits consistent performance over time.</a:t>
+              <a:t>RPS by DSP exhibits </a:t>
+            </a:r>
+            <a:r>
+              <a:rPr lang="en-US" altLang="zh-CN" dirty="0">
+                <a:solidFill>
+                  <a:schemeClr val="accent1"/>
+                </a:solidFill>
+              </a:rPr>
+              <a:t>consistent performance </a:t>
+            </a:r>
+            <a:r>
+              <a:rPr lang="en-US" altLang="zh-CN" dirty="0"/>
+              <a:t>over time.</a:t>
             </a:r>
           </a:p>
           <a:p>
@@ -21851,6 +23053,31 @@
             <a:r>
               <a:rPr lang="en-US" altLang="zh-CN" dirty="0"/>
               <a:t>Forecasted data confirms the order of RPS rankings remained unchanged. </a:t>
+            </a:r>
+          </a:p>
+          <a:p>
+            <a:pPr marL="285750" indent="-285750">
+              <a:lnSpc>
+                <a:spcPct val="150000"/>
+              </a:lnSpc>
+              <a:buFont typeface="Arial" panose="020B0604020202020204" pitchFamily="34" charset="0"/>
+              <a:buChar char="•"/>
+            </a:pPr>
+            <a:r>
+              <a:rPr lang="en-US" altLang="zh-CN" dirty="0"/>
+              <a:t>The output data was </a:t>
+            </a:r>
+            <a:r>
+              <a:rPr lang="en-US" altLang="zh-CN" dirty="0">
+                <a:solidFill>
+                  <a:schemeClr val="accent1"/>
+                </a:solidFill>
+              </a:rPr>
+              <a:t>manually inspected </a:t>
+            </a:r>
+            <a:r>
+              <a:rPr lang="en-US" altLang="zh-CN" dirty="0"/>
+              <a:t>to ensure no formatting anomalies exist.</a:t>
             </a:r>
           </a:p>
         </p:txBody>
@@ -21946,6 +23173,36 @@
           </a:p>
         </p:txBody>
       </p:sp>
+      <p:pic>
+        <p:nvPicPr>
+          <p:cNvPr id="5" name="Picture 4">
+            <a:extLst>
+              <a:ext uri="{FF2B5EF4-FFF2-40B4-BE49-F238E27FC236}">
+                <a16:creationId xmlns:a16="http://schemas.microsoft.com/office/drawing/2014/main" id="{93F9256D-4B08-D593-3EBB-64EE6D79262A}"/>
+              </a:ext>
+            </a:extLst>
+          </p:cNvPr>
+          <p:cNvPicPr>
+            <a:picLocks noChangeAspect="1"/>
+          </p:cNvPicPr>
+          <p:nvPr/>
+        </p:nvPicPr>
+        <p:blipFill>
+          <a:blip r:embed="rId2"/>
+          <a:stretch>
+            <a:fillRect/>
+          </a:stretch>
+        </p:blipFill>
+        <p:spPr>
+          <a:xfrm>
+            <a:off x="660400" y="1240894"/>
+            <a:ext cx="5342853" cy="2648977"/>
+          </a:xfrm>
+          <a:prstGeom prst="rect">
+            <a:avLst/>
+          </a:prstGeom>
+        </p:spPr>
+      </p:pic>
     </p:spTree>
     <p:extLst>
       <p:ext uri="{BB962C8B-B14F-4D97-AF65-F5344CB8AC3E}">
@@ -21999,7 +23256,7 @@
           <a:p>
             <a:r>
               <a:rPr lang="en-US" altLang="zh-CN" dirty="0"/>
-              <a:t>Reproducible Workflow</a:t>
+              <a:t>Reproducible Workflow (Python Script)</a:t>
             </a:r>
             <a:endParaRPr lang="zh-CN" altLang="en-US" dirty="0"/>
           </a:p>
@@ -22018,14 +23275,14 @@
           <p:nvPr>
             <p:extLst>
               <p:ext uri="{D42A27DB-BD31-4B8C-83A1-F6EECF244321}">
-                <p14:modId xmlns:p14="http://schemas.microsoft.com/office/powerpoint/2010/main" val="3959889665"/>
+                <p14:modId xmlns:p14="http://schemas.microsoft.com/office/powerpoint/2010/main" val="902901048"/>
               </p:ext>
             </p:extLst>
           </p:nvPr>
         </p:nvGraphicFramePr>
         <p:xfrm>
           <a:off x="877481" y="583336"/>
-          <a:ext cx="10437037" cy="3253562"/>
+          <a:ext cx="10437037" cy="3063506"/>
         </p:xfrm>
         <a:graphic>
           <a:graphicData uri="http://schemas.openxmlformats.org/drawingml/2006/diagram">
@@ -22047,7 +23304,7 @@
         </p:nvSpPr>
         <p:spPr>
           <a:xfrm>
-            <a:off x="1203694" y="4696934"/>
+            <a:off x="1184717" y="4465644"/>
             <a:ext cx="9771912" cy="1049964"/>
           </a:xfrm>
           <a:prstGeom prst="roundRect">
@@ -22111,8 +23368,8 @@
         </p:nvSpPr>
         <p:spPr bwMode="auto">
           <a:xfrm>
-            <a:off x="1471428" y="2976861"/>
-            <a:ext cx="6781023" cy="2031325"/>
+            <a:off x="1235370" y="2756329"/>
+            <a:ext cx="9721259" cy="2031325"/>
           </a:xfrm>
           <a:prstGeom prst="rect">
             <a:avLst/>
@@ -22152,7 +23409,7 @@
           </a:extLst>
         </p:spPr>
         <p:txBody>
-          <a:bodyPr vert="horz" wrap="none" lIns="91440" tIns="45720" rIns="91440" bIns="45720" numCol="1" anchor="ctr" anchorCtr="0" compatLnSpc="1">
+          <a:bodyPr vert="horz" wrap="square" lIns="91440" tIns="45720" rIns="91440" bIns="45720" numCol="1" anchor="ctr" anchorCtr="0" compatLnSpc="1">
             <a:prstTxWarp prst="textNoShape">
               <a:avLst/>
             </a:prstTxWarp>
@@ -22264,7 +23521,31 @@
                 </a:solidFill>
                 <a:effectLst/>
               </a:rPr>
-              <a:t>Process massive datasets more efficiently with SQL.</a:t>
+              <a:t>Process massive datasets more </a:t>
+            </a:r>
+            <a:r>
+              <a:rPr kumimoji="0" lang="zh-CN" altLang="zh-CN" sz="2000" b="0" i="0" u="none" strike="noStrike" cap="none" normalizeH="0" baseline="0" dirty="0">
+                <a:ln>
+                  <a:noFill/>
+                </a:ln>
+                <a:solidFill>
+                  <a:schemeClr val="accent1"/>
+                </a:solidFill>
+                <a:effectLst/>
+              </a:rPr>
+              <a:t>efficiently</a:t>
+            </a:r>
+            <a:r>
+              <a:rPr kumimoji="0" lang="zh-CN" altLang="zh-CN" sz="2000" b="0" i="0" u="none" strike="noStrike" cap="none" normalizeH="0" baseline="0" dirty="0">
+                <a:ln>
+                  <a:noFill/>
+                </a:ln>
+                <a:solidFill>
+                  <a:schemeClr val="tx1"/>
+                </a:solidFill>
+                <a:effectLst/>
+              </a:rPr>
+              <a:t> with SQL.</a:t>
             </a:r>
           </a:p>
           <a:p>
@@ -22318,7 +23599,73 @@
                 </a:solidFill>
                 <a:effectLst/>
               </a:rPr>
-              <a:t> with clear output and audit</a:t>
+              <a:t> with </a:t>
+            </a:r>
+            <a:r>
+              <a:rPr kumimoji="0" lang="zh-CN" altLang="zh-CN" sz="2000" b="0" i="0" u="none" strike="noStrike" cap="none" normalizeH="0" baseline="0" dirty="0">
+                <a:ln>
+                  <a:noFill/>
+                </a:ln>
+                <a:effectLst/>
+              </a:rPr>
+              <a:t>clear output</a:t>
+            </a:r>
+            <a:r>
+              <a:rPr kumimoji="0" lang="en-US" altLang="zh-CN" sz="2000" b="0" i="0" u="none" strike="noStrike" cap="none" normalizeH="0" baseline="0" dirty="0">
+                <a:ln>
+                  <a:noFill/>
+                </a:ln>
+                <a:effectLst/>
+              </a:rPr>
+              <a:t> </a:t>
+            </a:r>
+            <a:r>
+              <a:rPr lang="en-US" altLang="zh-CN" sz="2000" dirty="0"/>
+              <a:t>in </a:t>
+            </a:r>
+            <a:r>
+              <a:rPr lang="en-US" altLang="zh-CN" sz="2000" dirty="0">
+                <a:solidFill>
+                  <a:schemeClr val="accent1"/>
+                </a:solidFill>
+              </a:rPr>
+              <a:t>csv and xlsx formats</a:t>
+            </a:r>
+            <a:r>
+              <a:rPr kumimoji="0" lang="zh-CN" altLang="zh-CN" sz="2000" b="0" i="0" u="none" strike="noStrike" cap="none" normalizeH="0" baseline="0" dirty="0">
+                <a:ln>
+                  <a:noFill/>
+                </a:ln>
+                <a:solidFill>
+                  <a:schemeClr val="accent1"/>
+                </a:solidFill>
+                <a:effectLst/>
+              </a:rPr>
+              <a:t> </a:t>
+            </a:r>
+            <a:r>
+              <a:rPr kumimoji="0" lang="zh-CN" altLang="zh-CN" sz="2000" b="0" i="0" u="none" strike="noStrike" cap="none" normalizeH="0" baseline="0" dirty="0">
+                <a:ln>
+                  <a:noFill/>
+                </a:ln>
+                <a:solidFill>
+                  <a:schemeClr val="tx1"/>
+                </a:solidFill>
+                <a:effectLst/>
+              </a:rPr>
+              <a:t>and </a:t>
+            </a:r>
+            <a:r>
+              <a:rPr kumimoji="0" lang="zh-CN" altLang="zh-CN" sz="2000" b="0" i="0" u="none" strike="noStrike" cap="none" normalizeH="0" baseline="0" dirty="0">
+                <a:ln>
+                  <a:noFill/>
+                </a:ln>
+                <a:solidFill>
+                  <a:schemeClr val="accent1"/>
+                </a:solidFill>
+                <a:effectLst/>
+              </a:rPr>
+              <a:t>audit</a:t>
             </a:r>
             <a:r>
               <a:rPr kumimoji="0" lang="en-US" altLang="zh-CN" sz="2000" b="0" i="0" u="none" strike="noStrike" cap="none" normalizeH="0" baseline="0" dirty="0">
@@ -22326,7 +23673,7 @@
                   <a:noFill/>
                 </a:ln>
                 <a:solidFill>
-                  <a:schemeClr val="tx1"/>
+                  <a:schemeClr val="accent1"/>
                 </a:solidFill>
                 <a:effectLst/>
               </a:rPr>
@@ -22338,11 +23685,23 @@
                   <a:noFill/>
                 </a:ln>
                 <a:solidFill>
+                  <a:schemeClr val="accent1"/>
+                </a:solidFill>
+                <a:effectLst/>
+              </a:rPr>
+              <a:t> reports</a:t>
+            </a:r>
+            <a:r>
+              <a:rPr kumimoji="0" lang="zh-CN" altLang="zh-CN" sz="2000" b="0" i="0" u="none" strike="noStrike" cap="none" normalizeH="0" baseline="0" dirty="0">
+                <a:ln>
+                  <a:noFill/>
+                </a:ln>
+                <a:solidFill>
                   <a:schemeClr val="tx1"/>
                 </a:solidFill>
                 <a:effectLst/>
               </a:rPr>
-              <a:t> reports.</a:t>
+              <a:t>.</a:t>
             </a:r>
           </a:p>
           <a:p>
